--- a/iaq-deck/template/IAQ-Master-Template-2026.pptx
+++ b/iaq-deck/template/IAQ-Master-Template-2026.pptx
@@ -23,45 +23,48 @@
     <p:sldId id="271" r:id="rId22"/>
     <p:sldId id="272" r:id="rId23"/>
     <p:sldId id="273" r:id="rId24"/>
+    <p:sldId id="274" r:id="rId25"/>
+    <p:sldId id="275" r:id="rId26"/>
+    <p:sldId id="276" r:id="rId27"/>
   </p:sldIdLst>
   <p:sldSz cx="12192000" cy="6858000" type="screen4x3"/>
   <p:notesSz cx="6858000" cy="9144000"/>
   <p:embeddedFontLst>
     <p:embeddedFont>
       <p:font typeface="League Spartan" pitchFamily="34" charset="0"/>
-      <p:regular r:id="rId25"/>
+      <p:regular r:id="rId28"/>
     </p:embeddedFont>
     <p:embeddedFont>
       <p:font typeface="League Spartan Medium" pitchFamily="34" charset="0"/>
-      <p:regular r:id="rId26"/>
+      <p:regular r:id="rId29"/>
     </p:embeddedFont>
     <p:embeddedFont>
       <p:font typeface="League Spartan SemiBold" pitchFamily="34" charset="0"/>
-      <p:regular r:id="rId27"/>
+      <p:regular r:id="rId30"/>
     </p:embeddedFont>
     <p:embeddedFont>
       <p:font typeface="Poppins Medium" pitchFamily="34" charset="0"/>
-      <p:regular r:id="rId28"/>
+      <p:regular r:id="rId31"/>
     </p:embeddedFont>
     <p:embeddedFont>
       <p:font typeface="Poppins SemiBold" pitchFamily="34" charset="0"/>
-      <p:regular r:id="rId29"/>
+      <p:regular r:id="rId32"/>
     </p:embeddedFont>
     <p:embeddedFont>
       <p:font typeface="Poppins" pitchFamily="34" charset="0"/>
-      <p:bold r:id="rId30"/>
+      <p:bold r:id="rId33"/>
     </p:embeddedFont>
     <p:embeddedFont>
       <p:font typeface="Urbanist" pitchFamily="34" charset="0"/>
-      <p:regular r:id="rId31"/>
+      <p:regular r:id="rId34"/>
     </p:embeddedFont>
     <p:embeddedFont>
       <p:font typeface="Urbanist Medium" pitchFamily="34" charset="0"/>
-      <p:regular r:id="rId32"/>
+      <p:regular r:id="rId35"/>
     </p:embeddedFont>
     <p:embeddedFont>
       <p:font typeface="Urbanist SemiBold" pitchFamily="34" charset="0"/>
-      <p:regular r:id="rId33"/>
+      <p:regular r:id="rId36"/>
     </p:embeddedFont>
   </p:embeddedFontLst>
   <p:defaultTextStyle>
@@ -5233,6 +5236,339 @@
         </p:nvSpPr>
         <p:spPr>
           <a:xfrm>
+            <a:off x="6178550" y="4079875"/>
+            <a:ext cx="292100" cy="76200"/>
+          </a:xfrm>
+          <a:prstGeom prst="rect">
+            <a:avLst/>
+          </a:prstGeom>
+          <a:noFill/>
+        </p:spPr>
+        <p:txBody>
+          <a:bodyPr wrap="none" lIns="0" rIns="0" tIns="0" bIns="0" anchor="ctr">
+            <a:noAutofit/>
+          </a:bodyPr>
+          <a:lstStyle/>
+          <a:p>
+            <a:pPr algn="l"/>
+            <a:r>
+              <a:rPr sz="650" b="0" i="0" spc="91">
+                <a:solidFill>
+                  <a:srgbClr val="EC2326"/>
+                </a:solidFill>
+                <a:latin typeface="League Spartan SemiBold"/>
+                <a:ea typeface="League Spartan SemiBold"/>
+                <a:cs typeface="League Spartan SemiBold"/>
+              </a:rPr>
+              <a:t>18</a:t>
+            </a:r>
+          </a:p>
+        </p:txBody>
+      </p:sp>
+      <p:sp>
+        <p:nvSpPr>
+          <p:cNvPr id="60" name="TextBox 59"/>
+          <p:cNvSpPr txBox="1"/>
+          <p:nvPr/>
+        </p:nvSpPr>
+        <p:spPr>
+          <a:xfrm>
+            <a:off x="6572250" y="4022725"/>
+            <a:ext cx="1587500" cy="152400"/>
+          </a:xfrm>
+          <a:prstGeom prst="rect">
+            <a:avLst/>
+          </a:prstGeom>
+          <a:noFill/>
+        </p:spPr>
+        <p:txBody>
+          <a:bodyPr wrap="none" lIns="0" rIns="0" tIns="0" bIns="0" anchor="ctr">
+            <a:noAutofit/>
+          </a:bodyPr>
+          <a:lstStyle/>
+          <a:p>
+            <a:pPr algn="l"/>
+            <a:r>
+              <a:rPr sz="850" b="0" i="0" spc="-17">
+                <a:solidFill>
+                  <a:srgbClr val="101A2B"/>
+                </a:solidFill>
+                <a:latin typeface="Poppins SemiBold"/>
+                <a:ea typeface="Poppins SemiBold"/>
+                <a:cs typeface="Poppins SemiBold"/>
+              </a:rPr>
+              <a:t>Agenda</a:t>
+            </a:r>
+          </a:p>
+        </p:txBody>
+      </p:sp>
+      <p:sp>
+        <p:nvSpPr>
+          <p:cNvPr id="61" name="TextBox 60"/>
+          <p:cNvSpPr txBox="1"/>
+          <p:nvPr/>
+        </p:nvSpPr>
+        <p:spPr>
+          <a:xfrm>
+            <a:off x="8261350" y="4048125"/>
+            <a:ext cx="3321050" cy="114300"/>
+          </a:xfrm>
+          <a:prstGeom prst="rect">
+            <a:avLst/>
+          </a:prstGeom>
+          <a:noFill/>
+        </p:spPr>
+        <p:txBody>
+          <a:bodyPr wrap="none" lIns="0" rIns="0" tIns="0" bIns="0" anchor="ctr">
+            <a:noAutofit/>
+          </a:bodyPr>
+          <a:lstStyle/>
+          <a:p>
+            <a:pPr algn="l"/>
+            <a:r>
+              <a:rPr sz="720" b="0" i="0">
+                <a:solidFill>
+                  <a:srgbClr val="64707A"/>
+                </a:solidFill>
+                <a:latin typeface="Urbanist"/>
+                <a:ea typeface="Urbanist"/>
+                <a:cs typeface="Urbanist"/>
+              </a:rPr>
+              <a:t>What the deck covers, before it covers it.</a:t>
+            </a:r>
+          </a:p>
+        </p:txBody>
+      </p:sp>
+      <p:sp>
+        <p:nvSpPr>
+          <p:cNvPr id="62" name="TextBox 61"/>
+          <p:cNvSpPr txBox="1"/>
+          <p:nvPr/>
+        </p:nvSpPr>
+        <p:spPr>
+          <a:xfrm>
+            <a:off x="609600" y="4362850"/>
+            <a:ext cx="292100" cy="76200"/>
+          </a:xfrm>
+          <a:prstGeom prst="rect">
+            <a:avLst/>
+          </a:prstGeom>
+          <a:noFill/>
+        </p:spPr>
+        <p:txBody>
+          <a:bodyPr wrap="none" lIns="0" rIns="0" tIns="0" bIns="0" anchor="ctr">
+            <a:noAutofit/>
+          </a:bodyPr>
+          <a:lstStyle/>
+          <a:p>
+            <a:pPr algn="l"/>
+            <a:r>
+              <a:rPr sz="650" b="0" i="0" spc="91">
+                <a:solidFill>
+                  <a:srgbClr val="EC2326"/>
+                </a:solidFill>
+                <a:latin typeface="League Spartan SemiBold"/>
+                <a:ea typeface="League Spartan SemiBold"/>
+                <a:cs typeface="League Spartan SemiBold"/>
+              </a:rPr>
+              <a:t>19</a:t>
+            </a:r>
+          </a:p>
+        </p:txBody>
+      </p:sp>
+      <p:sp>
+        <p:nvSpPr>
+          <p:cNvPr id="63" name="TextBox 62"/>
+          <p:cNvSpPr txBox="1"/>
+          <p:nvPr/>
+        </p:nvSpPr>
+        <p:spPr>
+          <a:xfrm>
+            <a:off x="1003300" y="4305700"/>
+            <a:ext cx="1587500" cy="152400"/>
+          </a:xfrm>
+          <a:prstGeom prst="rect">
+            <a:avLst/>
+          </a:prstGeom>
+          <a:noFill/>
+        </p:spPr>
+        <p:txBody>
+          <a:bodyPr wrap="none" lIns="0" rIns="0" tIns="0" bIns="0" anchor="ctr">
+            <a:noAutofit/>
+          </a:bodyPr>
+          <a:lstStyle/>
+          <a:p>
+            <a:pPr algn="l"/>
+            <a:r>
+              <a:rPr sz="850" b="0" i="0" spc="-17">
+                <a:solidFill>
+                  <a:srgbClr val="101A2B"/>
+                </a:solidFill>
+                <a:latin typeface="Poppins SemiBold"/>
+                <a:ea typeface="Poppins SemiBold"/>
+                <a:cs typeface="Poppins SemiBold"/>
+              </a:rPr>
+              <a:t>Quote</a:t>
+            </a:r>
+          </a:p>
+        </p:txBody>
+      </p:sp>
+      <p:sp>
+        <p:nvSpPr>
+          <p:cNvPr id="64" name="TextBox 63"/>
+          <p:cNvSpPr txBox="1"/>
+          <p:nvPr/>
+        </p:nvSpPr>
+        <p:spPr>
+          <a:xfrm>
+            <a:off x="2692400" y="4331100"/>
+            <a:ext cx="3321050" cy="114300"/>
+          </a:xfrm>
+          <a:prstGeom prst="rect">
+            <a:avLst/>
+          </a:prstGeom>
+          <a:noFill/>
+        </p:spPr>
+        <p:txBody>
+          <a:bodyPr wrap="none" lIns="0" rIns="0" tIns="0" bIns="0" anchor="ctr">
+            <a:noAutofit/>
+          </a:bodyPr>
+          <a:lstStyle/>
+          <a:p>
+            <a:pPr algn="l"/>
+            <a:r>
+              <a:rPr sz="720" b="0" i="0">
+                <a:solidFill>
+                  <a:srgbClr val="64707A"/>
+                </a:solidFill>
+                <a:latin typeface="Urbanist"/>
+                <a:ea typeface="Urbanist"/>
+                <a:cs typeface="Urbanist"/>
+              </a:rPr>
+              <a:t>Let a client, or the board, say it instead of you.</a:t>
+            </a:r>
+          </a:p>
+        </p:txBody>
+      </p:sp>
+      <p:sp>
+        <p:nvSpPr>
+          <p:cNvPr id="65" name="TextBox 64"/>
+          <p:cNvSpPr txBox="1"/>
+          <p:nvPr/>
+        </p:nvSpPr>
+        <p:spPr>
+          <a:xfrm>
+            <a:off x="6178550" y="4362850"/>
+            <a:ext cx="292100" cy="76200"/>
+          </a:xfrm>
+          <a:prstGeom prst="rect">
+            <a:avLst/>
+          </a:prstGeom>
+          <a:noFill/>
+        </p:spPr>
+        <p:txBody>
+          <a:bodyPr wrap="none" lIns="0" rIns="0" tIns="0" bIns="0" anchor="ctr">
+            <a:noAutofit/>
+          </a:bodyPr>
+          <a:lstStyle/>
+          <a:p>
+            <a:pPr algn="l"/>
+            <a:r>
+              <a:rPr sz="650" b="0" i="0" spc="91">
+                <a:solidFill>
+                  <a:srgbClr val="EC2326"/>
+                </a:solidFill>
+                <a:latin typeface="League Spartan SemiBold"/>
+                <a:ea typeface="League Spartan SemiBold"/>
+                <a:cs typeface="League Spartan SemiBold"/>
+              </a:rPr>
+              <a:t>20</a:t>
+            </a:r>
+          </a:p>
+        </p:txBody>
+      </p:sp>
+      <p:sp>
+        <p:nvSpPr>
+          <p:cNvPr id="66" name="TextBox 65"/>
+          <p:cNvSpPr txBox="1"/>
+          <p:nvPr/>
+        </p:nvSpPr>
+        <p:spPr>
+          <a:xfrm>
+            <a:off x="6572250" y="4305700"/>
+            <a:ext cx="1587500" cy="152400"/>
+          </a:xfrm>
+          <a:prstGeom prst="rect">
+            <a:avLst/>
+          </a:prstGeom>
+          <a:noFill/>
+        </p:spPr>
+        <p:txBody>
+          <a:bodyPr wrap="none" lIns="0" rIns="0" tIns="0" bIns="0" anchor="ctr">
+            <a:noAutofit/>
+          </a:bodyPr>
+          <a:lstStyle/>
+          <a:p>
+            <a:pPr algn="l"/>
+            <a:r>
+              <a:rPr sz="850" b="0" i="0" spc="-17">
+                <a:solidFill>
+                  <a:srgbClr val="101A2B"/>
+                </a:solidFill>
+                <a:latin typeface="Poppins SemiBold"/>
+                <a:ea typeface="Poppins SemiBold"/>
+                <a:cs typeface="Poppins SemiBold"/>
+              </a:rPr>
+              <a:t>Before and after</a:t>
+            </a:r>
+          </a:p>
+        </p:txBody>
+      </p:sp>
+      <p:sp>
+        <p:nvSpPr>
+          <p:cNvPr id="67" name="TextBox 66"/>
+          <p:cNvSpPr txBox="1"/>
+          <p:nvPr/>
+        </p:nvSpPr>
+        <p:spPr>
+          <a:xfrm>
+            <a:off x="8261350" y="4331100"/>
+            <a:ext cx="3321050" cy="114300"/>
+          </a:xfrm>
+          <a:prstGeom prst="rect">
+            <a:avLst/>
+          </a:prstGeom>
+          <a:noFill/>
+        </p:spPr>
+        <p:txBody>
+          <a:bodyPr wrap="none" lIns="0" rIns="0" tIns="0" bIns="0" anchor="ctr">
+            <a:noAutofit/>
+          </a:bodyPr>
+          <a:lstStyle/>
+          <a:p>
+            <a:pPr algn="l"/>
+            <a:r>
+              <a:rPr sz="720" b="0" i="0">
+                <a:solidFill>
+                  <a:srgbClr val="64707A"/>
+                </a:solidFill>
+                <a:latin typeface="Urbanist"/>
+                <a:ea typeface="Urbanist"/>
+                <a:cs typeface="Urbanist"/>
+              </a:rPr>
+              <a:t>Two states of the same thing, side by side.</a:t>
+            </a:r>
+          </a:p>
+        </p:txBody>
+      </p:sp>
+      <p:sp>
+        <p:nvSpPr>
+          <p:cNvPr id="68" name="TextBox 67"/>
+          <p:cNvSpPr txBox="1"/>
+          <p:nvPr/>
+        </p:nvSpPr>
+        <p:spPr>
+          <a:xfrm>
             <a:off x="609600" y="6445250"/>
             <a:ext cx="138112" cy="76200"/>
           </a:xfrm>
@@ -5264,7 +5600,7 @@
       </p:sp>
       <p:sp>
         <p:nvSpPr>
-          <p:cNvPr id="60" name="TextBox 59"/>
+          <p:cNvPr id="69" name="TextBox 68"/>
           <p:cNvSpPr txBox="1"/>
           <p:nvPr/>
         </p:nvSpPr>
@@ -17946,6 +18282,1560 @@
 </p:sld>
 </file>
 
+<file path=ppt/slides/slide19.xml><?xml version="1.0" encoding="utf-8"?>
+<p:sld xmlns:a="http://schemas.openxmlformats.org/drawingml/2006/main" xmlns:p="http://schemas.openxmlformats.org/presentationml/2006/main" xmlns:r="http://schemas.openxmlformats.org/officeDocument/2006/relationships">
+  <p:cSld>
+    <p:spTree>
+      <p:nvGrpSpPr>
+        <p:cNvPr id="1" name=""/>
+        <p:cNvGrpSpPr/>
+        <p:nvPr/>
+      </p:nvGrpSpPr>
+      <p:grpSpPr/>
+      <p:sp>
+        <p:nvSpPr>
+          <p:cNvPr id="2" name="Rectangle 1"/>
+          <p:cNvSpPr/>
+          <p:nvPr/>
+        </p:nvSpPr>
+        <p:spPr>
+          <a:xfrm>
+            <a:off x="0" y="0"/>
+            <a:ext cx="12192000" cy="6858000"/>
+          </a:xfrm>
+          <a:prstGeom prst="rect">
+            <a:avLst/>
+          </a:prstGeom>
+          <a:solidFill>
+            <a:srgbClr val="F6F7F9"/>
+          </a:solidFill>
+          <a:ln>
+            <a:noFill/>
+          </a:ln>
+          <a:effectLst/>
+        </p:spPr>
+        <p:txBody>
+          <a:bodyPr rtlCol="0" anchor="ctr"/>
+          <a:lstStyle/>
+          <a:p>
+            <a:pPr algn="ctr"/>
+          </a:p>
+        </p:txBody>
+      </p:sp>
+      <p:sp>
+        <p:nvSpPr>
+          <p:cNvPr id="3" name="Rectangle 2"/>
+          <p:cNvSpPr/>
+          <p:nvPr/>
+        </p:nvSpPr>
+        <p:spPr>
+          <a:xfrm>
+            <a:off x="609600" y="381000"/>
+            <a:ext cx="235350" cy="165100"/>
+          </a:xfrm>
+          <a:prstGeom prst="rect">
+            <a:avLst/>
+          </a:prstGeom>
+          <a:solidFill>
+            <a:srgbClr val="EC2326"/>
+          </a:solidFill>
+          <a:ln>
+            <a:noFill/>
+          </a:ln>
+          <a:effectLst/>
+        </p:spPr>
+        <p:txBody>
+          <a:bodyPr rtlCol="0" anchor="ctr"/>
+          <a:lstStyle/>
+          <a:p>
+            <a:pPr algn="ctr"/>
+          </a:p>
+        </p:txBody>
+      </p:sp>
+      <p:sp>
+        <p:nvSpPr>
+          <p:cNvPr id="4" name="TextBox 3"/>
+          <p:cNvSpPr txBox="1"/>
+          <p:nvPr/>
+        </p:nvSpPr>
+        <p:spPr>
+          <a:xfrm>
+            <a:off x="609600" y="425450"/>
+            <a:ext cx="235350" cy="82550"/>
+          </a:xfrm>
+          <a:prstGeom prst="rect">
+            <a:avLst/>
+          </a:prstGeom>
+          <a:noFill/>
+        </p:spPr>
+        <p:txBody>
+          <a:bodyPr wrap="none" lIns="69850" rIns="69850" tIns="0" bIns="0" anchor="ctr">
+            <a:noAutofit/>
+          </a:bodyPr>
+          <a:lstStyle/>
+          <a:p>
+            <a:pPr algn="l"/>
+            <a:r>
+              <a:rPr sz="700" b="0" i="0" spc="70">
+                <a:solidFill>
+                  <a:srgbClr val="FFFFFF"/>
+                </a:solidFill>
+                <a:latin typeface="League Spartan SemiBold"/>
+                <a:ea typeface="League Spartan SemiBold"/>
+                <a:cs typeface="League Spartan SemiBold"/>
+              </a:rPr>
+              <a:t>18</a:t>
+            </a:r>
+          </a:p>
+        </p:txBody>
+      </p:sp>
+      <p:sp>
+        <p:nvSpPr>
+          <p:cNvPr id="5" name="TextBox 4"/>
+          <p:cNvSpPr txBox="1"/>
+          <p:nvPr/>
+        </p:nvSpPr>
+        <p:spPr>
+          <a:xfrm>
+            <a:off x="946550" y="414338"/>
+            <a:ext cx="957859" cy="88900"/>
+          </a:xfrm>
+          <a:prstGeom prst="rect">
+            <a:avLst/>
+          </a:prstGeom>
+          <a:noFill/>
+        </p:spPr>
+        <p:txBody>
+          <a:bodyPr wrap="none" lIns="0" rIns="0" tIns="0" bIns="0" anchor="ctr">
+            <a:noAutofit/>
+          </a:bodyPr>
+          <a:lstStyle/>
+          <a:p>
+            <a:pPr algn="l"/>
+            <a:r>
+              <a:rPr sz="780" b="0" i="0" spc="186">
+                <a:solidFill>
+                  <a:srgbClr val="101A2B"/>
+                </a:solidFill>
+                <a:latin typeface="League Spartan SemiBold"/>
+                <a:ea typeface="League Spartan SemiBold"/>
+                <a:cs typeface="League Spartan SemiBold"/>
+              </a:rPr>
+              <a:t>SECTION NAME</a:t>
+            </a:r>
+          </a:p>
+        </p:txBody>
+      </p:sp>
+      <p:pic>
+        <p:nvPicPr>
+          <p:cNvPr id="6" name="Picture 5" descr="iaq-logo-tag.png"/>
+          <p:cNvPicPr>
+            <a:picLocks noChangeAspect="1"/>
+          </p:cNvPicPr>
+          <p:nvPr/>
+        </p:nvPicPr>
+        <p:blipFill>
+          <a:blip r:embed="rId2"/>
+          <a:stretch>
+            <a:fillRect/>
+          </a:stretch>
+        </p:blipFill>
+        <p:spPr>
+          <a:xfrm>
+            <a:off x="10947400" y="304800"/>
+            <a:ext cx="635000" cy="317500"/>
+          </a:xfrm>
+          <a:prstGeom prst="rect">
+            <a:avLst/>
+          </a:prstGeom>
+        </p:spPr>
+      </p:pic>
+      <p:sp>
+        <p:nvSpPr>
+          <p:cNvPr id="7" name="Rectangle 6"/>
+          <p:cNvSpPr/>
+          <p:nvPr/>
+        </p:nvSpPr>
+        <p:spPr>
+          <a:xfrm>
+            <a:off x="609600" y="1438872"/>
+            <a:ext cx="10972800" cy="6350"/>
+          </a:xfrm>
+          <a:prstGeom prst="rect">
+            <a:avLst/>
+          </a:prstGeom>
+          <a:solidFill>
+            <a:srgbClr val="D5DBE2"/>
+          </a:solidFill>
+          <a:ln>
+            <a:noFill/>
+          </a:ln>
+          <a:effectLst/>
+        </p:spPr>
+        <p:txBody>
+          <a:bodyPr rtlCol="0" anchor="ctr"/>
+          <a:lstStyle/>
+          <a:p>
+            <a:pPr algn="ctr"/>
+          </a:p>
+        </p:txBody>
+      </p:sp>
+      <p:sp>
+        <p:nvSpPr>
+          <p:cNvPr id="8" name="TextBox 7"/>
+          <p:cNvSpPr txBox="1"/>
+          <p:nvPr/>
+        </p:nvSpPr>
+        <p:spPr>
+          <a:xfrm>
+            <a:off x="609600" y="768350"/>
+            <a:ext cx="10972800" cy="304800"/>
+          </a:xfrm>
+          <a:prstGeom prst="rect">
+            <a:avLst/>
+          </a:prstGeom>
+          <a:noFill/>
+        </p:spPr>
+        <p:txBody>
+          <a:bodyPr wrap="none" lIns="0" rIns="0" tIns="0" bIns="0" anchor="ctr">
+            <a:noAutofit/>
+          </a:bodyPr>
+          <a:lstStyle/>
+          <a:p>
+            <a:pPr algn="l"/>
+            <a:r>
+              <a:rPr sz="1700" b="0" i="0" spc="-34">
+                <a:solidFill>
+                  <a:srgbClr val="64707A"/>
+                </a:solidFill>
+                <a:latin typeface="Poppins SemiBold"/>
+                <a:ea typeface="Poppins SemiBold"/>
+                <a:cs typeface="Poppins SemiBold"/>
+              </a:rPr>
+              <a:t>Page title</a:t>
+            </a:r>
+          </a:p>
+        </p:txBody>
+      </p:sp>
+      <p:sp>
+        <p:nvSpPr>
+          <p:cNvPr id="9" name="TextBox 8"/>
+          <p:cNvSpPr txBox="1"/>
+          <p:nvPr/>
+        </p:nvSpPr>
+        <p:spPr>
+          <a:xfrm>
+            <a:off x="609600" y="1118197"/>
+            <a:ext cx="6985000" cy="146050"/>
+          </a:xfrm>
+          <a:prstGeom prst="rect">
+            <a:avLst/>
+          </a:prstGeom>
+          <a:noFill/>
+        </p:spPr>
+        <p:txBody>
+          <a:bodyPr wrap="none" lIns="0" rIns="0" tIns="0" bIns="0" anchor="ctr">
+            <a:noAutofit/>
+          </a:bodyPr>
+          <a:lstStyle/>
+          <a:p>
+            <a:pPr algn="l"/>
+            <a:r>
+              <a:rPr sz="950" b="0" i="0">
+                <a:solidFill>
+                  <a:srgbClr val="64707A"/>
+                </a:solidFill>
+                <a:latin typeface="Urbanist"/>
+                <a:ea typeface="Urbanist"/>
+                <a:cs typeface="Urbanist"/>
+              </a:rPr>
+              <a:t>One line under it saying what the page is for.</a:t>
+            </a:r>
+          </a:p>
+        </p:txBody>
+      </p:sp>
+      <p:sp>
+        <p:nvSpPr>
+          <p:cNvPr id="10" name="TextBox 9"/>
+          <p:cNvSpPr txBox="1"/>
+          <p:nvPr/>
+        </p:nvSpPr>
+        <p:spPr>
+          <a:xfrm>
+            <a:off x="609600" y="1631950"/>
+            <a:ext cx="3547466" cy="463550"/>
+          </a:xfrm>
+          <a:prstGeom prst="rect">
+            <a:avLst/>
+          </a:prstGeom>
+          <a:noFill/>
+        </p:spPr>
+        <p:txBody>
+          <a:bodyPr wrap="none" lIns="0" rIns="0" tIns="0" bIns="0" anchor="ctr">
+            <a:noAutofit/>
+          </a:bodyPr>
+          <a:lstStyle/>
+          <a:p>
+            <a:pPr algn="l"/>
+            <a:r>
+              <a:rPr sz="2600" b="1" i="0" spc="-104">
+                <a:solidFill>
+                  <a:srgbClr val="64707A"/>
+                </a:solidFill>
+                <a:latin typeface="Poppins"/>
+                <a:ea typeface="Poppins"/>
+                <a:cs typeface="Poppins"/>
+              </a:rPr>
+              <a:t>01</a:t>
+            </a:r>
+          </a:p>
+        </p:txBody>
+      </p:sp>
+      <p:sp>
+        <p:nvSpPr>
+          <p:cNvPr id="11" name="Rectangle 10"/>
+          <p:cNvSpPr/>
+          <p:nvPr/>
+        </p:nvSpPr>
+        <p:spPr>
+          <a:xfrm>
+            <a:off x="609600" y="2397722"/>
+            <a:ext cx="3547466" cy="12700"/>
+          </a:xfrm>
+          <a:prstGeom prst="rect">
+            <a:avLst/>
+          </a:prstGeom>
+          <a:solidFill>
+            <a:srgbClr val="EC2326"/>
+          </a:solidFill>
+          <a:ln>
+            <a:noFill/>
+          </a:ln>
+          <a:effectLst/>
+        </p:spPr>
+        <p:txBody>
+          <a:bodyPr rtlCol="0" anchor="ctr"/>
+          <a:lstStyle/>
+          <a:p>
+            <a:pPr algn="ctr"/>
+          </a:p>
+        </p:txBody>
+      </p:sp>
+      <p:sp>
+        <p:nvSpPr>
+          <p:cNvPr id="12" name="TextBox 11"/>
+          <p:cNvSpPr txBox="1"/>
+          <p:nvPr/>
+        </p:nvSpPr>
+        <p:spPr>
+          <a:xfrm>
+            <a:off x="609600" y="2114550"/>
+            <a:ext cx="3547466" cy="209550"/>
+          </a:xfrm>
+          <a:prstGeom prst="rect">
+            <a:avLst/>
+          </a:prstGeom>
+          <a:noFill/>
+        </p:spPr>
+        <p:txBody>
+          <a:bodyPr wrap="none" lIns="0" rIns="0" tIns="0" bIns="0" anchor="ctr">
+            <a:noAutofit/>
+          </a:bodyPr>
+          <a:lstStyle/>
+          <a:p>
+            <a:pPr algn="l"/>
+            <a:r>
+              <a:rPr sz="1200" b="0" i="0" spc="-24">
+                <a:solidFill>
+                  <a:srgbClr val="64707A"/>
+                </a:solidFill>
+                <a:latin typeface="Poppins SemiBold"/>
+                <a:ea typeface="Poppins SemiBold"/>
+                <a:cs typeface="Poppins SemiBold"/>
+              </a:rPr>
+              <a:t>Part name</a:t>
+            </a:r>
+          </a:p>
+        </p:txBody>
+      </p:sp>
+      <p:sp>
+        <p:nvSpPr>
+          <p:cNvPr id="13" name="TextBox 12"/>
+          <p:cNvSpPr txBox="1"/>
+          <p:nvPr/>
+        </p:nvSpPr>
+        <p:spPr>
+          <a:xfrm>
+            <a:off x="609600" y="2562822"/>
+            <a:ext cx="279400" cy="76200"/>
+          </a:xfrm>
+          <a:prstGeom prst="rect">
+            <a:avLst/>
+          </a:prstGeom>
+          <a:noFill/>
+        </p:spPr>
+        <p:txBody>
+          <a:bodyPr wrap="none" lIns="0" rIns="0" tIns="0" bIns="0" anchor="ctr">
+            <a:noAutofit/>
+          </a:bodyPr>
+          <a:lstStyle/>
+          <a:p>
+            <a:pPr algn="l"/>
+            <a:r>
+              <a:rPr sz="620" b="0" i="0" spc="100">
+                <a:solidFill>
+                  <a:srgbClr val="64707A"/>
+                </a:solidFill>
+                <a:latin typeface="League Spartan SemiBold"/>
+                <a:ea typeface="League Spartan SemiBold"/>
+                <a:cs typeface="League Spartan SemiBold"/>
+              </a:rPr>
+              <a:t>01.1</a:t>
+            </a:r>
+          </a:p>
+        </p:txBody>
+      </p:sp>
+      <p:sp>
+        <p:nvSpPr>
+          <p:cNvPr id="14" name="TextBox 13"/>
+          <p:cNvSpPr txBox="1"/>
+          <p:nvPr/>
+        </p:nvSpPr>
+        <p:spPr>
+          <a:xfrm>
+            <a:off x="977900" y="2518372"/>
+            <a:ext cx="3179166" cy="127000"/>
+          </a:xfrm>
+          <a:prstGeom prst="rect">
+            <a:avLst/>
+          </a:prstGeom>
+          <a:noFill/>
+        </p:spPr>
+        <p:txBody>
+          <a:bodyPr wrap="none" lIns="0" rIns="0" tIns="0" bIns="0" anchor="ctr">
+            <a:noAutofit/>
+          </a:bodyPr>
+          <a:lstStyle/>
+          <a:p>
+            <a:pPr algn="l"/>
+            <a:r>
+              <a:rPr sz="850" b="0" i="0">
+                <a:solidFill>
+                  <a:srgbClr val="64707A"/>
+                </a:solidFill>
+                <a:latin typeface="Urbanist Medium"/>
+                <a:ea typeface="Urbanist Medium"/>
+                <a:cs typeface="Urbanist Medium"/>
+              </a:rPr>
+              <a:t>What this section answers</a:t>
+            </a:r>
+          </a:p>
+        </p:txBody>
+      </p:sp>
+      <p:sp>
+        <p:nvSpPr>
+          <p:cNvPr id="15" name="TextBox 14"/>
+          <p:cNvSpPr txBox="1"/>
+          <p:nvPr/>
+        </p:nvSpPr>
+        <p:spPr>
+          <a:xfrm>
+            <a:off x="609600" y="2779319"/>
+            <a:ext cx="279400" cy="76200"/>
+          </a:xfrm>
+          <a:prstGeom prst="rect">
+            <a:avLst/>
+          </a:prstGeom>
+          <a:noFill/>
+        </p:spPr>
+        <p:txBody>
+          <a:bodyPr wrap="none" lIns="0" rIns="0" tIns="0" bIns="0" anchor="ctr">
+            <a:noAutofit/>
+          </a:bodyPr>
+          <a:lstStyle/>
+          <a:p>
+            <a:pPr algn="l"/>
+            <a:r>
+              <a:rPr sz="620" b="0" i="0" spc="100">
+                <a:solidFill>
+                  <a:srgbClr val="64707A"/>
+                </a:solidFill>
+                <a:latin typeface="League Spartan SemiBold"/>
+                <a:ea typeface="League Spartan SemiBold"/>
+                <a:cs typeface="League Spartan SemiBold"/>
+              </a:rPr>
+              <a:t>01.2</a:t>
+            </a:r>
+          </a:p>
+        </p:txBody>
+      </p:sp>
+      <p:sp>
+        <p:nvSpPr>
+          <p:cNvPr id="16" name="TextBox 15"/>
+          <p:cNvSpPr txBox="1"/>
+          <p:nvPr/>
+        </p:nvSpPr>
+        <p:spPr>
+          <a:xfrm>
+            <a:off x="977900" y="2734869"/>
+            <a:ext cx="3179166" cy="127000"/>
+          </a:xfrm>
+          <a:prstGeom prst="rect">
+            <a:avLst/>
+          </a:prstGeom>
+          <a:noFill/>
+        </p:spPr>
+        <p:txBody>
+          <a:bodyPr wrap="none" lIns="0" rIns="0" tIns="0" bIns="0" anchor="ctr">
+            <a:noAutofit/>
+          </a:bodyPr>
+          <a:lstStyle/>
+          <a:p>
+            <a:pPr algn="l"/>
+            <a:r>
+              <a:rPr sz="850" b="0" i="0">
+                <a:solidFill>
+                  <a:srgbClr val="64707A"/>
+                </a:solidFill>
+                <a:latin typeface="Urbanist Medium"/>
+                <a:ea typeface="Urbanist Medium"/>
+                <a:cs typeface="Urbanist Medium"/>
+              </a:rPr>
+              <a:t>What this section answers</a:t>
+            </a:r>
+          </a:p>
+        </p:txBody>
+      </p:sp>
+      <p:sp>
+        <p:nvSpPr>
+          <p:cNvPr id="17" name="TextBox 16"/>
+          <p:cNvSpPr txBox="1"/>
+          <p:nvPr/>
+        </p:nvSpPr>
+        <p:spPr>
+          <a:xfrm>
+            <a:off x="609600" y="2995809"/>
+            <a:ext cx="279400" cy="76200"/>
+          </a:xfrm>
+          <a:prstGeom prst="rect">
+            <a:avLst/>
+          </a:prstGeom>
+          <a:noFill/>
+        </p:spPr>
+        <p:txBody>
+          <a:bodyPr wrap="none" lIns="0" rIns="0" tIns="0" bIns="0" anchor="ctr">
+            <a:noAutofit/>
+          </a:bodyPr>
+          <a:lstStyle/>
+          <a:p>
+            <a:pPr algn="l"/>
+            <a:r>
+              <a:rPr sz="620" b="0" i="0" spc="100">
+                <a:solidFill>
+                  <a:srgbClr val="64707A"/>
+                </a:solidFill>
+                <a:latin typeface="League Spartan SemiBold"/>
+                <a:ea typeface="League Spartan SemiBold"/>
+                <a:cs typeface="League Spartan SemiBold"/>
+              </a:rPr>
+              <a:t>01.3</a:t>
+            </a:r>
+          </a:p>
+        </p:txBody>
+      </p:sp>
+      <p:sp>
+        <p:nvSpPr>
+          <p:cNvPr id="18" name="TextBox 17"/>
+          <p:cNvSpPr txBox="1"/>
+          <p:nvPr/>
+        </p:nvSpPr>
+        <p:spPr>
+          <a:xfrm>
+            <a:off x="977900" y="2951359"/>
+            <a:ext cx="3179166" cy="127000"/>
+          </a:xfrm>
+          <a:prstGeom prst="rect">
+            <a:avLst/>
+          </a:prstGeom>
+          <a:noFill/>
+        </p:spPr>
+        <p:txBody>
+          <a:bodyPr wrap="none" lIns="0" rIns="0" tIns="0" bIns="0" anchor="ctr">
+            <a:noAutofit/>
+          </a:bodyPr>
+          <a:lstStyle/>
+          <a:p>
+            <a:pPr algn="l"/>
+            <a:r>
+              <a:rPr sz="850" b="0" i="0">
+                <a:solidFill>
+                  <a:srgbClr val="64707A"/>
+                </a:solidFill>
+                <a:latin typeface="Urbanist Medium"/>
+                <a:ea typeface="Urbanist Medium"/>
+                <a:cs typeface="Urbanist Medium"/>
+              </a:rPr>
+              <a:t>What this section answers</a:t>
+            </a:r>
+          </a:p>
+        </p:txBody>
+      </p:sp>
+      <p:sp>
+        <p:nvSpPr>
+          <p:cNvPr id="19" name="TextBox 18"/>
+          <p:cNvSpPr txBox="1"/>
+          <p:nvPr/>
+        </p:nvSpPr>
+        <p:spPr>
+          <a:xfrm>
+            <a:off x="609600" y="3212306"/>
+            <a:ext cx="279400" cy="76200"/>
+          </a:xfrm>
+          <a:prstGeom prst="rect">
+            <a:avLst/>
+          </a:prstGeom>
+          <a:noFill/>
+        </p:spPr>
+        <p:txBody>
+          <a:bodyPr wrap="none" lIns="0" rIns="0" tIns="0" bIns="0" anchor="ctr">
+            <a:noAutofit/>
+          </a:bodyPr>
+          <a:lstStyle/>
+          <a:p>
+            <a:pPr algn="l"/>
+            <a:r>
+              <a:rPr sz="620" b="0" i="0" spc="100">
+                <a:solidFill>
+                  <a:srgbClr val="64707A"/>
+                </a:solidFill>
+                <a:latin typeface="League Spartan SemiBold"/>
+                <a:ea typeface="League Spartan SemiBold"/>
+                <a:cs typeface="League Spartan SemiBold"/>
+              </a:rPr>
+              <a:t>01.4</a:t>
+            </a:r>
+          </a:p>
+        </p:txBody>
+      </p:sp>
+      <p:sp>
+        <p:nvSpPr>
+          <p:cNvPr id="20" name="TextBox 19"/>
+          <p:cNvSpPr txBox="1"/>
+          <p:nvPr/>
+        </p:nvSpPr>
+        <p:spPr>
+          <a:xfrm>
+            <a:off x="977900" y="3167856"/>
+            <a:ext cx="3179166" cy="127000"/>
+          </a:xfrm>
+          <a:prstGeom prst="rect">
+            <a:avLst/>
+          </a:prstGeom>
+          <a:noFill/>
+        </p:spPr>
+        <p:txBody>
+          <a:bodyPr wrap="none" lIns="0" rIns="0" tIns="0" bIns="0" anchor="ctr">
+            <a:noAutofit/>
+          </a:bodyPr>
+          <a:lstStyle/>
+          <a:p>
+            <a:pPr algn="l"/>
+            <a:r>
+              <a:rPr sz="850" b="0" i="0">
+                <a:solidFill>
+                  <a:srgbClr val="64707A"/>
+                </a:solidFill>
+                <a:latin typeface="Urbanist Medium"/>
+                <a:ea typeface="Urbanist Medium"/>
+                <a:cs typeface="Urbanist Medium"/>
+              </a:rPr>
+              <a:t>What this section answers</a:t>
+            </a:r>
+          </a:p>
+        </p:txBody>
+      </p:sp>
+      <p:sp>
+        <p:nvSpPr>
+          <p:cNvPr id="21" name="TextBox 20"/>
+          <p:cNvSpPr txBox="1"/>
+          <p:nvPr/>
+        </p:nvSpPr>
+        <p:spPr>
+          <a:xfrm>
+            <a:off x="4322166" y="1631950"/>
+            <a:ext cx="3547567" cy="463550"/>
+          </a:xfrm>
+          <a:prstGeom prst="rect">
+            <a:avLst/>
+          </a:prstGeom>
+          <a:noFill/>
+        </p:spPr>
+        <p:txBody>
+          <a:bodyPr wrap="none" lIns="0" rIns="0" tIns="0" bIns="0" anchor="ctr">
+            <a:noAutofit/>
+          </a:bodyPr>
+          <a:lstStyle/>
+          <a:p>
+            <a:pPr algn="l"/>
+            <a:r>
+              <a:rPr sz="2600" b="1" i="0" spc="-104">
+                <a:solidFill>
+                  <a:srgbClr val="64707A"/>
+                </a:solidFill>
+                <a:latin typeface="Poppins"/>
+                <a:ea typeface="Poppins"/>
+                <a:cs typeface="Poppins"/>
+              </a:rPr>
+              <a:t>02</a:t>
+            </a:r>
+          </a:p>
+        </p:txBody>
+      </p:sp>
+      <p:sp>
+        <p:nvSpPr>
+          <p:cNvPr id="22" name="Rectangle 21"/>
+          <p:cNvSpPr/>
+          <p:nvPr/>
+        </p:nvSpPr>
+        <p:spPr>
+          <a:xfrm>
+            <a:off x="4322166" y="2397722"/>
+            <a:ext cx="3547567" cy="12700"/>
+          </a:xfrm>
+          <a:prstGeom prst="rect">
+            <a:avLst/>
+          </a:prstGeom>
+          <a:solidFill>
+            <a:srgbClr val="EC2326"/>
+          </a:solidFill>
+          <a:ln>
+            <a:noFill/>
+          </a:ln>
+          <a:effectLst/>
+        </p:spPr>
+        <p:txBody>
+          <a:bodyPr rtlCol="0" anchor="ctr"/>
+          <a:lstStyle/>
+          <a:p>
+            <a:pPr algn="ctr"/>
+          </a:p>
+        </p:txBody>
+      </p:sp>
+      <p:sp>
+        <p:nvSpPr>
+          <p:cNvPr id="23" name="TextBox 22"/>
+          <p:cNvSpPr txBox="1"/>
+          <p:nvPr/>
+        </p:nvSpPr>
+        <p:spPr>
+          <a:xfrm>
+            <a:off x="4322166" y="2114550"/>
+            <a:ext cx="3547567" cy="209550"/>
+          </a:xfrm>
+          <a:prstGeom prst="rect">
+            <a:avLst/>
+          </a:prstGeom>
+          <a:noFill/>
+        </p:spPr>
+        <p:txBody>
+          <a:bodyPr wrap="none" lIns="0" rIns="0" tIns="0" bIns="0" anchor="ctr">
+            <a:noAutofit/>
+          </a:bodyPr>
+          <a:lstStyle/>
+          <a:p>
+            <a:pPr algn="l"/>
+            <a:r>
+              <a:rPr sz="1200" b="0" i="0" spc="-24">
+                <a:solidFill>
+                  <a:srgbClr val="64707A"/>
+                </a:solidFill>
+                <a:latin typeface="Poppins SemiBold"/>
+                <a:ea typeface="Poppins SemiBold"/>
+                <a:cs typeface="Poppins SemiBold"/>
+              </a:rPr>
+              <a:t>Part name</a:t>
+            </a:r>
+          </a:p>
+        </p:txBody>
+      </p:sp>
+      <p:sp>
+        <p:nvSpPr>
+          <p:cNvPr id="24" name="TextBox 23"/>
+          <p:cNvSpPr txBox="1"/>
+          <p:nvPr/>
+        </p:nvSpPr>
+        <p:spPr>
+          <a:xfrm>
+            <a:off x="4322166" y="2562822"/>
+            <a:ext cx="279400" cy="76200"/>
+          </a:xfrm>
+          <a:prstGeom prst="rect">
+            <a:avLst/>
+          </a:prstGeom>
+          <a:noFill/>
+        </p:spPr>
+        <p:txBody>
+          <a:bodyPr wrap="none" lIns="0" rIns="0" tIns="0" bIns="0" anchor="ctr">
+            <a:noAutofit/>
+          </a:bodyPr>
+          <a:lstStyle/>
+          <a:p>
+            <a:pPr algn="l"/>
+            <a:r>
+              <a:rPr sz="620" b="0" i="0" spc="100">
+                <a:solidFill>
+                  <a:srgbClr val="64707A"/>
+                </a:solidFill>
+                <a:latin typeface="League Spartan SemiBold"/>
+                <a:ea typeface="League Spartan SemiBold"/>
+                <a:cs typeface="League Spartan SemiBold"/>
+              </a:rPr>
+              <a:t>02.1</a:t>
+            </a:r>
+          </a:p>
+        </p:txBody>
+      </p:sp>
+      <p:sp>
+        <p:nvSpPr>
+          <p:cNvPr id="25" name="TextBox 24"/>
+          <p:cNvSpPr txBox="1"/>
+          <p:nvPr/>
+        </p:nvSpPr>
+        <p:spPr>
+          <a:xfrm>
+            <a:off x="4690466" y="2518372"/>
+            <a:ext cx="3179267" cy="127000"/>
+          </a:xfrm>
+          <a:prstGeom prst="rect">
+            <a:avLst/>
+          </a:prstGeom>
+          <a:noFill/>
+        </p:spPr>
+        <p:txBody>
+          <a:bodyPr wrap="none" lIns="0" rIns="0" tIns="0" bIns="0" anchor="ctr">
+            <a:noAutofit/>
+          </a:bodyPr>
+          <a:lstStyle/>
+          <a:p>
+            <a:pPr algn="l"/>
+            <a:r>
+              <a:rPr sz="850" b="0" i="0">
+                <a:solidFill>
+                  <a:srgbClr val="64707A"/>
+                </a:solidFill>
+                <a:latin typeface="Urbanist Medium"/>
+                <a:ea typeface="Urbanist Medium"/>
+                <a:cs typeface="Urbanist Medium"/>
+              </a:rPr>
+              <a:t>What this section answers</a:t>
+            </a:r>
+          </a:p>
+        </p:txBody>
+      </p:sp>
+      <p:sp>
+        <p:nvSpPr>
+          <p:cNvPr id="26" name="TextBox 25"/>
+          <p:cNvSpPr txBox="1"/>
+          <p:nvPr/>
+        </p:nvSpPr>
+        <p:spPr>
+          <a:xfrm>
+            <a:off x="4322166" y="2779319"/>
+            <a:ext cx="279400" cy="76200"/>
+          </a:xfrm>
+          <a:prstGeom prst="rect">
+            <a:avLst/>
+          </a:prstGeom>
+          <a:noFill/>
+        </p:spPr>
+        <p:txBody>
+          <a:bodyPr wrap="none" lIns="0" rIns="0" tIns="0" bIns="0" anchor="ctr">
+            <a:noAutofit/>
+          </a:bodyPr>
+          <a:lstStyle/>
+          <a:p>
+            <a:pPr algn="l"/>
+            <a:r>
+              <a:rPr sz="620" b="0" i="0" spc="100">
+                <a:solidFill>
+                  <a:srgbClr val="64707A"/>
+                </a:solidFill>
+                <a:latin typeface="League Spartan SemiBold"/>
+                <a:ea typeface="League Spartan SemiBold"/>
+                <a:cs typeface="League Spartan SemiBold"/>
+              </a:rPr>
+              <a:t>02.2</a:t>
+            </a:r>
+          </a:p>
+        </p:txBody>
+      </p:sp>
+      <p:sp>
+        <p:nvSpPr>
+          <p:cNvPr id="27" name="TextBox 26"/>
+          <p:cNvSpPr txBox="1"/>
+          <p:nvPr/>
+        </p:nvSpPr>
+        <p:spPr>
+          <a:xfrm>
+            <a:off x="4690466" y="2734869"/>
+            <a:ext cx="3179267" cy="127000"/>
+          </a:xfrm>
+          <a:prstGeom prst="rect">
+            <a:avLst/>
+          </a:prstGeom>
+          <a:noFill/>
+        </p:spPr>
+        <p:txBody>
+          <a:bodyPr wrap="none" lIns="0" rIns="0" tIns="0" bIns="0" anchor="ctr">
+            <a:noAutofit/>
+          </a:bodyPr>
+          <a:lstStyle/>
+          <a:p>
+            <a:pPr algn="l"/>
+            <a:r>
+              <a:rPr sz="850" b="0" i="0">
+                <a:solidFill>
+                  <a:srgbClr val="64707A"/>
+                </a:solidFill>
+                <a:latin typeface="Urbanist Medium"/>
+                <a:ea typeface="Urbanist Medium"/>
+                <a:cs typeface="Urbanist Medium"/>
+              </a:rPr>
+              <a:t>What this section answers</a:t>
+            </a:r>
+          </a:p>
+        </p:txBody>
+      </p:sp>
+      <p:sp>
+        <p:nvSpPr>
+          <p:cNvPr id="28" name="TextBox 27"/>
+          <p:cNvSpPr txBox="1"/>
+          <p:nvPr/>
+        </p:nvSpPr>
+        <p:spPr>
+          <a:xfrm>
+            <a:off x="4322166" y="2995809"/>
+            <a:ext cx="279400" cy="76200"/>
+          </a:xfrm>
+          <a:prstGeom prst="rect">
+            <a:avLst/>
+          </a:prstGeom>
+          <a:noFill/>
+        </p:spPr>
+        <p:txBody>
+          <a:bodyPr wrap="none" lIns="0" rIns="0" tIns="0" bIns="0" anchor="ctr">
+            <a:noAutofit/>
+          </a:bodyPr>
+          <a:lstStyle/>
+          <a:p>
+            <a:pPr algn="l"/>
+            <a:r>
+              <a:rPr sz="620" b="0" i="0" spc="100">
+                <a:solidFill>
+                  <a:srgbClr val="64707A"/>
+                </a:solidFill>
+                <a:latin typeface="League Spartan SemiBold"/>
+                <a:ea typeface="League Spartan SemiBold"/>
+                <a:cs typeface="League Spartan SemiBold"/>
+              </a:rPr>
+              <a:t>02.3</a:t>
+            </a:r>
+          </a:p>
+        </p:txBody>
+      </p:sp>
+      <p:sp>
+        <p:nvSpPr>
+          <p:cNvPr id="29" name="TextBox 28"/>
+          <p:cNvSpPr txBox="1"/>
+          <p:nvPr/>
+        </p:nvSpPr>
+        <p:spPr>
+          <a:xfrm>
+            <a:off x="4690466" y="2951359"/>
+            <a:ext cx="3179267" cy="127000"/>
+          </a:xfrm>
+          <a:prstGeom prst="rect">
+            <a:avLst/>
+          </a:prstGeom>
+          <a:noFill/>
+        </p:spPr>
+        <p:txBody>
+          <a:bodyPr wrap="none" lIns="0" rIns="0" tIns="0" bIns="0" anchor="ctr">
+            <a:noAutofit/>
+          </a:bodyPr>
+          <a:lstStyle/>
+          <a:p>
+            <a:pPr algn="l"/>
+            <a:r>
+              <a:rPr sz="850" b="0" i="0">
+                <a:solidFill>
+                  <a:srgbClr val="64707A"/>
+                </a:solidFill>
+                <a:latin typeface="Urbanist Medium"/>
+                <a:ea typeface="Urbanist Medium"/>
+                <a:cs typeface="Urbanist Medium"/>
+              </a:rPr>
+              <a:t>What this section answers</a:t>
+            </a:r>
+          </a:p>
+        </p:txBody>
+      </p:sp>
+      <p:sp>
+        <p:nvSpPr>
+          <p:cNvPr id="30" name="TextBox 29"/>
+          <p:cNvSpPr txBox="1"/>
+          <p:nvPr/>
+        </p:nvSpPr>
+        <p:spPr>
+          <a:xfrm>
+            <a:off x="4322166" y="3212306"/>
+            <a:ext cx="279400" cy="76200"/>
+          </a:xfrm>
+          <a:prstGeom prst="rect">
+            <a:avLst/>
+          </a:prstGeom>
+          <a:noFill/>
+        </p:spPr>
+        <p:txBody>
+          <a:bodyPr wrap="none" lIns="0" rIns="0" tIns="0" bIns="0" anchor="ctr">
+            <a:noAutofit/>
+          </a:bodyPr>
+          <a:lstStyle/>
+          <a:p>
+            <a:pPr algn="l"/>
+            <a:r>
+              <a:rPr sz="620" b="0" i="0" spc="100">
+                <a:solidFill>
+                  <a:srgbClr val="64707A"/>
+                </a:solidFill>
+                <a:latin typeface="League Spartan SemiBold"/>
+                <a:ea typeface="League Spartan SemiBold"/>
+                <a:cs typeface="League Spartan SemiBold"/>
+              </a:rPr>
+              <a:t>02.4</a:t>
+            </a:r>
+          </a:p>
+        </p:txBody>
+      </p:sp>
+      <p:sp>
+        <p:nvSpPr>
+          <p:cNvPr id="31" name="TextBox 30"/>
+          <p:cNvSpPr txBox="1"/>
+          <p:nvPr/>
+        </p:nvSpPr>
+        <p:spPr>
+          <a:xfrm>
+            <a:off x="4690466" y="3167856"/>
+            <a:ext cx="3179267" cy="127000"/>
+          </a:xfrm>
+          <a:prstGeom prst="rect">
+            <a:avLst/>
+          </a:prstGeom>
+          <a:noFill/>
+        </p:spPr>
+        <p:txBody>
+          <a:bodyPr wrap="none" lIns="0" rIns="0" tIns="0" bIns="0" anchor="ctr">
+            <a:noAutofit/>
+          </a:bodyPr>
+          <a:lstStyle/>
+          <a:p>
+            <a:pPr algn="l"/>
+            <a:r>
+              <a:rPr sz="850" b="0" i="0">
+                <a:solidFill>
+                  <a:srgbClr val="64707A"/>
+                </a:solidFill>
+                <a:latin typeface="Urbanist Medium"/>
+                <a:ea typeface="Urbanist Medium"/>
+                <a:cs typeface="Urbanist Medium"/>
+              </a:rPr>
+              <a:t>What this section answers</a:t>
+            </a:r>
+          </a:p>
+        </p:txBody>
+      </p:sp>
+      <p:sp>
+        <p:nvSpPr>
+          <p:cNvPr id="32" name="TextBox 31"/>
+          <p:cNvSpPr txBox="1"/>
+          <p:nvPr/>
+        </p:nvSpPr>
+        <p:spPr>
+          <a:xfrm>
+            <a:off x="8034833" y="1631950"/>
+            <a:ext cx="3547567" cy="463550"/>
+          </a:xfrm>
+          <a:prstGeom prst="rect">
+            <a:avLst/>
+          </a:prstGeom>
+          <a:noFill/>
+        </p:spPr>
+        <p:txBody>
+          <a:bodyPr wrap="none" lIns="0" rIns="0" tIns="0" bIns="0" anchor="ctr">
+            <a:noAutofit/>
+          </a:bodyPr>
+          <a:lstStyle/>
+          <a:p>
+            <a:pPr algn="l"/>
+            <a:r>
+              <a:rPr sz="2600" b="1" i="0" spc="-104">
+                <a:solidFill>
+                  <a:srgbClr val="64707A"/>
+                </a:solidFill>
+                <a:latin typeface="Poppins"/>
+                <a:ea typeface="Poppins"/>
+                <a:cs typeface="Poppins"/>
+              </a:rPr>
+              <a:t>03</a:t>
+            </a:r>
+          </a:p>
+        </p:txBody>
+      </p:sp>
+      <p:sp>
+        <p:nvSpPr>
+          <p:cNvPr id="33" name="Rectangle 32"/>
+          <p:cNvSpPr/>
+          <p:nvPr/>
+        </p:nvSpPr>
+        <p:spPr>
+          <a:xfrm>
+            <a:off x="8034833" y="2397722"/>
+            <a:ext cx="3547567" cy="12700"/>
+          </a:xfrm>
+          <a:prstGeom prst="rect">
+            <a:avLst/>
+          </a:prstGeom>
+          <a:solidFill>
+            <a:srgbClr val="EC2326"/>
+          </a:solidFill>
+          <a:ln>
+            <a:noFill/>
+          </a:ln>
+          <a:effectLst/>
+        </p:spPr>
+        <p:txBody>
+          <a:bodyPr rtlCol="0" anchor="ctr"/>
+          <a:lstStyle/>
+          <a:p>
+            <a:pPr algn="ctr"/>
+          </a:p>
+        </p:txBody>
+      </p:sp>
+      <p:sp>
+        <p:nvSpPr>
+          <p:cNvPr id="34" name="TextBox 33"/>
+          <p:cNvSpPr txBox="1"/>
+          <p:nvPr/>
+        </p:nvSpPr>
+        <p:spPr>
+          <a:xfrm>
+            <a:off x="8034833" y="2114550"/>
+            <a:ext cx="3547567" cy="209550"/>
+          </a:xfrm>
+          <a:prstGeom prst="rect">
+            <a:avLst/>
+          </a:prstGeom>
+          <a:noFill/>
+        </p:spPr>
+        <p:txBody>
+          <a:bodyPr wrap="none" lIns="0" rIns="0" tIns="0" bIns="0" anchor="ctr">
+            <a:noAutofit/>
+          </a:bodyPr>
+          <a:lstStyle/>
+          <a:p>
+            <a:pPr algn="l"/>
+            <a:r>
+              <a:rPr sz="1200" b="0" i="0" spc="-24">
+                <a:solidFill>
+                  <a:srgbClr val="64707A"/>
+                </a:solidFill>
+                <a:latin typeface="Poppins SemiBold"/>
+                <a:ea typeface="Poppins SemiBold"/>
+                <a:cs typeface="Poppins SemiBold"/>
+              </a:rPr>
+              <a:t>Part name</a:t>
+            </a:r>
+          </a:p>
+        </p:txBody>
+      </p:sp>
+      <p:sp>
+        <p:nvSpPr>
+          <p:cNvPr id="35" name="TextBox 34"/>
+          <p:cNvSpPr txBox="1"/>
+          <p:nvPr/>
+        </p:nvSpPr>
+        <p:spPr>
+          <a:xfrm>
+            <a:off x="8034833" y="2562822"/>
+            <a:ext cx="279400" cy="76200"/>
+          </a:xfrm>
+          <a:prstGeom prst="rect">
+            <a:avLst/>
+          </a:prstGeom>
+          <a:noFill/>
+        </p:spPr>
+        <p:txBody>
+          <a:bodyPr wrap="none" lIns="0" rIns="0" tIns="0" bIns="0" anchor="ctr">
+            <a:noAutofit/>
+          </a:bodyPr>
+          <a:lstStyle/>
+          <a:p>
+            <a:pPr algn="l"/>
+            <a:r>
+              <a:rPr sz="620" b="0" i="0" spc="100">
+                <a:solidFill>
+                  <a:srgbClr val="64707A"/>
+                </a:solidFill>
+                <a:latin typeface="League Spartan SemiBold"/>
+                <a:ea typeface="League Spartan SemiBold"/>
+                <a:cs typeface="League Spartan SemiBold"/>
+              </a:rPr>
+              <a:t>03.1</a:t>
+            </a:r>
+          </a:p>
+        </p:txBody>
+      </p:sp>
+      <p:sp>
+        <p:nvSpPr>
+          <p:cNvPr id="36" name="TextBox 35"/>
+          <p:cNvSpPr txBox="1"/>
+          <p:nvPr/>
+        </p:nvSpPr>
+        <p:spPr>
+          <a:xfrm>
+            <a:off x="8403133" y="2518372"/>
+            <a:ext cx="3179267" cy="127000"/>
+          </a:xfrm>
+          <a:prstGeom prst="rect">
+            <a:avLst/>
+          </a:prstGeom>
+          <a:noFill/>
+        </p:spPr>
+        <p:txBody>
+          <a:bodyPr wrap="none" lIns="0" rIns="0" tIns="0" bIns="0" anchor="ctr">
+            <a:noAutofit/>
+          </a:bodyPr>
+          <a:lstStyle/>
+          <a:p>
+            <a:pPr algn="l"/>
+            <a:r>
+              <a:rPr sz="850" b="0" i="0">
+                <a:solidFill>
+                  <a:srgbClr val="64707A"/>
+                </a:solidFill>
+                <a:latin typeface="Urbanist Medium"/>
+                <a:ea typeface="Urbanist Medium"/>
+                <a:cs typeface="Urbanist Medium"/>
+              </a:rPr>
+              <a:t>What this section answers</a:t>
+            </a:r>
+          </a:p>
+        </p:txBody>
+      </p:sp>
+      <p:sp>
+        <p:nvSpPr>
+          <p:cNvPr id="37" name="TextBox 36"/>
+          <p:cNvSpPr txBox="1"/>
+          <p:nvPr/>
+        </p:nvSpPr>
+        <p:spPr>
+          <a:xfrm>
+            <a:off x="8034833" y="2779319"/>
+            <a:ext cx="279400" cy="76200"/>
+          </a:xfrm>
+          <a:prstGeom prst="rect">
+            <a:avLst/>
+          </a:prstGeom>
+          <a:noFill/>
+        </p:spPr>
+        <p:txBody>
+          <a:bodyPr wrap="none" lIns="0" rIns="0" tIns="0" bIns="0" anchor="ctr">
+            <a:noAutofit/>
+          </a:bodyPr>
+          <a:lstStyle/>
+          <a:p>
+            <a:pPr algn="l"/>
+            <a:r>
+              <a:rPr sz="620" b="0" i="0" spc="100">
+                <a:solidFill>
+                  <a:srgbClr val="64707A"/>
+                </a:solidFill>
+                <a:latin typeface="League Spartan SemiBold"/>
+                <a:ea typeface="League Spartan SemiBold"/>
+                <a:cs typeface="League Spartan SemiBold"/>
+              </a:rPr>
+              <a:t>03.2</a:t>
+            </a:r>
+          </a:p>
+        </p:txBody>
+      </p:sp>
+      <p:sp>
+        <p:nvSpPr>
+          <p:cNvPr id="38" name="TextBox 37"/>
+          <p:cNvSpPr txBox="1"/>
+          <p:nvPr/>
+        </p:nvSpPr>
+        <p:spPr>
+          <a:xfrm>
+            <a:off x="8403133" y="2734869"/>
+            <a:ext cx="3179267" cy="127000"/>
+          </a:xfrm>
+          <a:prstGeom prst="rect">
+            <a:avLst/>
+          </a:prstGeom>
+          <a:noFill/>
+        </p:spPr>
+        <p:txBody>
+          <a:bodyPr wrap="none" lIns="0" rIns="0" tIns="0" bIns="0" anchor="ctr">
+            <a:noAutofit/>
+          </a:bodyPr>
+          <a:lstStyle/>
+          <a:p>
+            <a:pPr algn="l"/>
+            <a:r>
+              <a:rPr sz="850" b="0" i="0">
+                <a:solidFill>
+                  <a:srgbClr val="64707A"/>
+                </a:solidFill>
+                <a:latin typeface="Urbanist Medium"/>
+                <a:ea typeface="Urbanist Medium"/>
+                <a:cs typeface="Urbanist Medium"/>
+              </a:rPr>
+              <a:t>What this section answers</a:t>
+            </a:r>
+          </a:p>
+        </p:txBody>
+      </p:sp>
+      <p:sp>
+        <p:nvSpPr>
+          <p:cNvPr id="39" name="TextBox 38"/>
+          <p:cNvSpPr txBox="1"/>
+          <p:nvPr/>
+        </p:nvSpPr>
+        <p:spPr>
+          <a:xfrm>
+            <a:off x="8034833" y="2995809"/>
+            <a:ext cx="279400" cy="76200"/>
+          </a:xfrm>
+          <a:prstGeom prst="rect">
+            <a:avLst/>
+          </a:prstGeom>
+          <a:noFill/>
+        </p:spPr>
+        <p:txBody>
+          <a:bodyPr wrap="none" lIns="0" rIns="0" tIns="0" bIns="0" anchor="ctr">
+            <a:noAutofit/>
+          </a:bodyPr>
+          <a:lstStyle/>
+          <a:p>
+            <a:pPr algn="l"/>
+            <a:r>
+              <a:rPr sz="620" b="0" i="0" spc="100">
+                <a:solidFill>
+                  <a:srgbClr val="64707A"/>
+                </a:solidFill>
+                <a:latin typeface="League Spartan SemiBold"/>
+                <a:ea typeface="League Spartan SemiBold"/>
+                <a:cs typeface="League Spartan SemiBold"/>
+              </a:rPr>
+              <a:t>03.3</a:t>
+            </a:r>
+          </a:p>
+        </p:txBody>
+      </p:sp>
+      <p:sp>
+        <p:nvSpPr>
+          <p:cNvPr id="40" name="TextBox 39"/>
+          <p:cNvSpPr txBox="1"/>
+          <p:nvPr/>
+        </p:nvSpPr>
+        <p:spPr>
+          <a:xfrm>
+            <a:off x="8403133" y="2951359"/>
+            <a:ext cx="3179267" cy="127000"/>
+          </a:xfrm>
+          <a:prstGeom prst="rect">
+            <a:avLst/>
+          </a:prstGeom>
+          <a:noFill/>
+        </p:spPr>
+        <p:txBody>
+          <a:bodyPr wrap="none" lIns="0" rIns="0" tIns="0" bIns="0" anchor="ctr">
+            <a:noAutofit/>
+          </a:bodyPr>
+          <a:lstStyle/>
+          <a:p>
+            <a:pPr algn="l"/>
+            <a:r>
+              <a:rPr sz="850" b="0" i="0">
+                <a:solidFill>
+                  <a:srgbClr val="64707A"/>
+                </a:solidFill>
+                <a:latin typeface="Urbanist Medium"/>
+                <a:ea typeface="Urbanist Medium"/>
+                <a:cs typeface="Urbanist Medium"/>
+              </a:rPr>
+              <a:t>What this section answers</a:t>
+            </a:r>
+          </a:p>
+        </p:txBody>
+      </p:sp>
+      <p:sp>
+        <p:nvSpPr>
+          <p:cNvPr id="41" name="TextBox 40"/>
+          <p:cNvSpPr txBox="1"/>
+          <p:nvPr/>
+        </p:nvSpPr>
+        <p:spPr>
+          <a:xfrm>
+            <a:off x="8034833" y="3212306"/>
+            <a:ext cx="279400" cy="76200"/>
+          </a:xfrm>
+          <a:prstGeom prst="rect">
+            <a:avLst/>
+          </a:prstGeom>
+          <a:noFill/>
+        </p:spPr>
+        <p:txBody>
+          <a:bodyPr wrap="none" lIns="0" rIns="0" tIns="0" bIns="0" anchor="ctr">
+            <a:noAutofit/>
+          </a:bodyPr>
+          <a:lstStyle/>
+          <a:p>
+            <a:pPr algn="l"/>
+            <a:r>
+              <a:rPr sz="620" b="0" i="0" spc="100">
+                <a:solidFill>
+                  <a:srgbClr val="64707A"/>
+                </a:solidFill>
+                <a:latin typeface="League Spartan SemiBold"/>
+                <a:ea typeface="League Spartan SemiBold"/>
+                <a:cs typeface="League Spartan SemiBold"/>
+              </a:rPr>
+              <a:t>03.4</a:t>
+            </a:r>
+          </a:p>
+        </p:txBody>
+      </p:sp>
+      <p:sp>
+        <p:nvSpPr>
+          <p:cNvPr id="42" name="TextBox 41"/>
+          <p:cNvSpPr txBox="1"/>
+          <p:nvPr/>
+        </p:nvSpPr>
+        <p:spPr>
+          <a:xfrm>
+            <a:off x="8403133" y="3167856"/>
+            <a:ext cx="3179267" cy="127000"/>
+          </a:xfrm>
+          <a:prstGeom prst="rect">
+            <a:avLst/>
+          </a:prstGeom>
+          <a:noFill/>
+        </p:spPr>
+        <p:txBody>
+          <a:bodyPr wrap="none" lIns="0" rIns="0" tIns="0" bIns="0" anchor="ctr">
+            <a:noAutofit/>
+          </a:bodyPr>
+          <a:lstStyle/>
+          <a:p>
+            <a:pPr algn="l"/>
+            <a:r>
+              <a:rPr sz="850" b="0" i="0">
+                <a:solidFill>
+                  <a:srgbClr val="64707A"/>
+                </a:solidFill>
+                <a:latin typeface="Urbanist Medium"/>
+                <a:ea typeface="Urbanist Medium"/>
+                <a:cs typeface="Urbanist Medium"/>
+              </a:rPr>
+              <a:t>What this section answers</a:t>
+            </a:r>
+          </a:p>
+        </p:txBody>
+      </p:sp>
+      <p:sp>
+        <p:nvSpPr>
+          <p:cNvPr id="43" name="TextBox 42"/>
+          <p:cNvSpPr txBox="1"/>
+          <p:nvPr/>
+        </p:nvSpPr>
+        <p:spPr>
+          <a:xfrm>
+            <a:off x="609600" y="6445250"/>
+            <a:ext cx="111919" cy="76200"/>
+          </a:xfrm>
+          <a:prstGeom prst="rect">
+            <a:avLst/>
+          </a:prstGeom>
+          <a:noFill/>
+        </p:spPr>
+        <p:txBody>
+          <a:bodyPr wrap="none" lIns="0" rIns="0" tIns="0" bIns="0" anchor="ctr">
+            <a:noAutofit/>
+          </a:bodyPr>
+          <a:lstStyle/>
+          <a:p>
+            <a:pPr algn="l"/>
+            <a:r>
+              <a:rPr sz="680" b="0" i="0" spc="148">
+                <a:solidFill>
+                  <a:srgbClr val="64707A"/>
+                </a:solidFill>
+                <a:latin typeface="League Spartan Medium"/>
+                <a:ea typeface="League Spartan Medium"/>
+                <a:cs typeface="League Spartan Medium"/>
+              </a:rPr>
+              <a:t>18</a:t>
+            </a:r>
+          </a:p>
+        </p:txBody>
+      </p:sp>
+      <p:sp>
+        <p:nvSpPr>
+          <p:cNvPr id="44" name="TextBox 43"/>
+          <p:cNvSpPr txBox="1"/>
+          <p:nvPr/>
+        </p:nvSpPr>
+        <p:spPr>
+          <a:xfrm>
+            <a:off x="11154969" y="6429375"/>
+            <a:ext cx="427438" cy="76200"/>
+          </a:xfrm>
+          <a:prstGeom prst="rect">
+            <a:avLst/>
+          </a:prstGeom>
+          <a:noFill/>
+        </p:spPr>
+        <p:txBody>
+          <a:bodyPr wrap="none" lIns="0" rIns="0" tIns="0" bIns="0" anchor="ctr">
+            <a:noAutofit/>
+          </a:bodyPr>
+          <a:lstStyle/>
+          <a:p>
+            <a:pPr algn="l"/>
+            <a:r>
+              <a:rPr sz="680" b="0" i="0" spc="148">
+                <a:solidFill>
+                  <a:srgbClr val="64707A"/>
+                </a:solidFill>
+                <a:latin typeface="League Spartan"/>
+                <a:ea typeface="League Spartan"/>
+                <a:cs typeface="League Spartan"/>
+              </a:rPr>
+              <a:t>AGENDA</a:t>
+            </a:r>
+          </a:p>
+        </p:txBody>
+      </p:sp>
+    </p:spTree>
+  </p:cSld>
+  <p:clrMapOvr>
+    <a:masterClrMapping/>
+  </p:clrMapOvr>
+</p:sld>
+</file>
+
 <file path=ppt/slides/slide2.xml><?xml version="1.0" encoding="utf-8"?>
 <p:sld xmlns:a="http://schemas.openxmlformats.org/drawingml/2006/main" xmlns:p="http://schemas.openxmlformats.org/presentationml/2006/main" xmlns:r="http://schemas.openxmlformats.org/officeDocument/2006/relationships">
   <p:cSld>
@@ -18456,6 +20346,1343 @@
                 <a:cs typeface="League Spartan"/>
               </a:rPr>
               <a:t>TITLE</a:t>
+            </a:r>
+          </a:p>
+        </p:txBody>
+      </p:sp>
+    </p:spTree>
+  </p:cSld>
+  <p:clrMapOvr>
+    <a:masterClrMapping/>
+  </p:clrMapOvr>
+</p:sld>
+</file>
+
+<file path=ppt/slides/slide20.xml><?xml version="1.0" encoding="utf-8"?>
+<p:sld xmlns:a="http://schemas.openxmlformats.org/drawingml/2006/main" xmlns:p="http://schemas.openxmlformats.org/presentationml/2006/main" xmlns:r="http://schemas.openxmlformats.org/officeDocument/2006/relationships">
+  <p:cSld>
+    <p:spTree>
+      <p:nvGrpSpPr>
+        <p:cNvPr id="1" name=""/>
+        <p:cNvGrpSpPr/>
+        <p:nvPr/>
+      </p:nvGrpSpPr>
+      <p:grpSpPr/>
+      <p:sp>
+        <p:nvSpPr>
+          <p:cNvPr id="2" name="Rectangle 1"/>
+          <p:cNvSpPr/>
+          <p:nvPr/>
+        </p:nvSpPr>
+        <p:spPr>
+          <a:xfrm>
+            <a:off x="0" y="0"/>
+            <a:ext cx="12192000" cy="6858000"/>
+          </a:xfrm>
+          <a:prstGeom prst="rect">
+            <a:avLst/>
+          </a:prstGeom>
+          <a:solidFill>
+            <a:srgbClr val="F6F7F9"/>
+          </a:solidFill>
+          <a:ln>
+            <a:noFill/>
+          </a:ln>
+          <a:effectLst/>
+        </p:spPr>
+        <p:txBody>
+          <a:bodyPr rtlCol="0" anchor="ctr"/>
+          <a:lstStyle/>
+          <a:p>
+            <a:pPr algn="ctr"/>
+          </a:p>
+        </p:txBody>
+      </p:sp>
+      <p:sp>
+        <p:nvSpPr>
+          <p:cNvPr id="3" name="Rectangle 2"/>
+          <p:cNvSpPr/>
+          <p:nvPr/>
+        </p:nvSpPr>
+        <p:spPr>
+          <a:xfrm>
+            <a:off x="609600" y="381000"/>
+            <a:ext cx="235445" cy="165100"/>
+          </a:xfrm>
+          <a:prstGeom prst="rect">
+            <a:avLst/>
+          </a:prstGeom>
+          <a:solidFill>
+            <a:srgbClr val="EC2326"/>
+          </a:solidFill>
+          <a:ln>
+            <a:noFill/>
+          </a:ln>
+          <a:effectLst/>
+        </p:spPr>
+        <p:txBody>
+          <a:bodyPr rtlCol="0" anchor="ctr"/>
+          <a:lstStyle/>
+          <a:p>
+            <a:pPr algn="ctr"/>
+          </a:p>
+        </p:txBody>
+      </p:sp>
+      <p:sp>
+        <p:nvSpPr>
+          <p:cNvPr id="4" name="TextBox 3"/>
+          <p:cNvSpPr txBox="1"/>
+          <p:nvPr/>
+        </p:nvSpPr>
+        <p:spPr>
+          <a:xfrm>
+            <a:off x="609600" y="425450"/>
+            <a:ext cx="235445" cy="82550"/>
+          </a:xfrm>
+          <a:prstGeom prst="rect">
+            <a:avLst/>
+          </a:prstGeom>
+          <a:noFill/>
+        </p:spPr>
+        <p:txBody>
+          <a:bodyPr wrap="none" lIns="69850" rIns="69850" tIns="0" bIns="0" anchor="ctr">
+            <a:noAutofit/>
+          </a:bodyPr>
+          <a:lstStyle/>
+          <a:p>
+            <a:pPr algn="l"/>
+            <a:r>
+              <a:rPr sz="700" b="0" i="0" spc="70">
+                <a:solidFill>
+                  <a:srgbClr val="FFFFFF"/>
+                </a:solidFill>
+                <a:latin typeface="League Spartan SemiBold"/>
+                <a:ea typeface="League Spartan SemiBold"/>
+                <a:cs typeface="League Spartan SemiBold"/>
+              </a:rPr>
+              <a:t>19</a:t>
+            </a:r>
+          </a:p>
+        </p:txBody>
+      </p:sp>
+      <p:sp>
+        <p:nvSpPr>
+          <p:cNvPr id="5" name="TextBox 4"/>
+          <p:cNvSpPr txBox="1"/>
+          <p:nvPr/>
+        </p:nvSpPr>
+        <p:spPr>
+          <a:xfrm>
+            <a:off x="946645" y="414338"/>
+            <a:ext cx="957859" cy="88900"/>
+          </a:xfrm>
+          <a:prstGeom prst="rect">
+            <a:avLst/>
+          </a:prstGeom>
+          <a:noFill/>
+        </p:spPr>
+        <p:txBody>
+          <a:bodyPr wrap="none" lIns="0" rIns="0" tIns="0" bIns="0" anchor="ctr">
+            <a:noAutofit/>
+          </a:bodyPr>
+          <a:lstStyle/>
+          <a:p>
+            <a:pPr algn="l"/>
+            <a:r>
+              <a:rPr sz="780" b="0" i="0" spc="186">
+                <a:solidFill>
+                  <a:srgbClr val="101A2B"/>
+                </a:solidFill>
+                <a:latin typeface="League Spartan SemiBold"/>
+                <a:ea typeface="League Spartan SemiBold"/>
+                <a:cs typeface="League Spartan SemiBold"/>
+              </a:rPr>
+              <a:t>SECTION NAME</a:t>
+            </a:r>
+          </a:p>
+        </p:txBody>
+      </p:sp>
+      <p:pic>
+        <p:nvPicPr>
+          <p:cNvPr id="6" name="Picture 5" descr="iaq-logo-tag.png"/>
+          <p:cNvPicPr>
+            <a:picLocks noChangeAspect="1"/>
+          </p:cNvPicPr>
+          <p:nvPr/>
+        </p:nvPicPr>
+        <p:blipFill>
+          <a:blip r:embed="rId2"/>
+          <a:stretch>
+            <a:fillRect/>
+          </a:stretch>
+        </p:blipFill>
+        <p:spPr>
+          <a:xfrm>
+            <a:off x="10947400" y="304800"/>
+            <a:ext cx="635000" cy="317500"/>
+          </a:xfrm>
+          <a:prstGeom prst="rect">
+            <a:avLst/>
+          </a:prstGeom>
+        </p:spPr>
+      </p:pic>
+      <p:sp>
+        <p:nvSpPr>
+          <p:cNvPr id="7" name="Rectangle 6"/>
+          <p:cNvSpPr/>
+          <p:nvPr/>
+        </p:nvSpPr>
+        <p:spPr>
+          <a:xfrm>
+            <a:off x="609600" y="1438872"/>
+            <a:ext cx="10972800" cy="6350"/>
+          </a:xfrm>
+          <a:prstGeom prst="rect">
+            <a:avLst/>
+          </a:prstGeom>
+          <a:solidFill>
+            <a:srgbClr val="D5DBE2"/>
+          </a:solidFill>
+          <a:ln>
+            <a:noFill/>
+          </a:ln>
+          <a:effectLst/>
+        </p:spPr>
+        <p:txBody>
+          <a:bodyPr rtlCol="0" anchor="ctr"/>
+          <a:lstStyle/>
+          <a:p>
+            <a:pPr algn="ctr"/>
+          </a:p>
+        </p:txBody>
+      </p:sp>
+      <p:sp>
+        <p:nvSpPr>
+          <p:cNvPr id="8" name="TextBox 7"/>
+          <p:cNvSpPr txBox="1"/>
+          <p:nvPr/>
+        </p:nvSpPr>
+        <p:spPr>
+          <a:xfrm>
+            <a:off x="609600" y="768350"/>
+            <a:ext cx="10972800" cy="304800"/>
+          </a:xfrm>
+          <a:prstGeom prst="rect">
+            <a:avLst/>
+          </a:prstGeom>
+          <a:noFill/>
+        </p:spPr>
+        <p:txBody>
+          <a:bodyPr wrap="none" lIns="0" rIns="0" tIns="0" bIns="0" anchor="ctr">
+            <a:noAutofit/>
+          </a:bodyPr>
+          <a:lstStyle/>
+          <a:p>
+            <a:pPr algn="l"/>
+            <a:r>
+              <a:rPr sz="1700" b="0" i="0" spc="-34">
+                <a:solidFill>
+                  <a:srgbClr val="64707A"/>
+                </a:solidFill>
+                <a:latin typeface="Poppins SemiBold"/>
+                <a:ea typeface="Poppins SemiBold"/>
+                <a:cs typeface="Poppins SemiBold"/>
+              </a:rPr>
+              <a:t>Page title</a:t>
+            </a:r>
+          </a:p>
+        </p:txBody>
+      </p:sp>
+      <p:sp>
+        <p:nvSpPr>
+          <p:cNvPr id="9" name="TextBox 8"/>
+          <p:cNvSpPr txBox="1"/>
+          <p:nvPr/>
+        </p:nvSpPr>
+        <p:spPr>
+          <a:xfrm>
+            <a:off x="609600" y="1118197"/>
+            <a:ext cx="6985000" cy="146050"/>
+          </a:xfrm>
+          <a:prstGeom prst="rect">
+            <a:avLst/>
+          </a:prstGeom>
+          <a:noFill/>
+        </p:spPr>
+        <p:txBody>
+          <a:bodyPr wrap="none" lIns="0" rIns="0" tIns="0" bIns="0" anchor="ctr">
+            <a:noAutofit/>
+          </a:bodyPr>
+          <a:lstStyle/>
+          <a:p>
+            <a:pPr algn="l"/>
+            <a:r>
+              <a:rPr sz="950" b="0" i="0">
+                <a:solidFill>
+                  <a:srgbClr val="64707A"/>
+                </a:solidFill>
+                <a:latin typeface="Urbanist"/>
+                <a:ea typeface="Urbanist"/>
+                <a:cs typeface="Urbanist"/>
+              </a:rPr>
+              <a:t>One line under it saying what the page is for.</a:t>
+            </a:r>
+          </a:p>
+        </p:txBody>
+      </p:sp>
+      <p:sp>
+        <p:nvSpPr>
+          <p:cNvPr id="10" name="TextBox 9"/>
+          <p:cNvSpPr txBox="1"/>
+          <p:nvPr/>
+        </p:nvSpPr>
+        <p:spPr>
+          <a:xfrm>
+            <a:off x="609600" y="2946400"/>
+            <a:ext cx="7112000" cy="806450"/>
+          </a:xfrm>
+          <a:prstGeom prst="rect">
+            <a:avLst/>
+          </a:prstGeom>
+          <a:noFill/>
+        </p:spPr>
+        <p:txBody>
+          <a:bodyPr wrap="none" lIns="0" rIns="0" tIns="0" bIns="0" anchor="ctr">
+            <a:noAutofit/>
+          </a:bodyPr>
+          <a:lstStyle/>
+          <a:p>
+            <a:pPr algn="l"/>
+            <a:r>
+              <a:rPr sz="4500" b="1" i="0">
+                <a:solidFill>
+                  <a:srgbClr val="64707A"/>
+                </a:solidFill>
+                <a:latin typeface="Poppins"/>
+                <a:ea typeface="Poppins"/>
+                <a:cs typeface="Poppins"/>
+              </a:rPr>
+              <a:t>“</a:t>
+            </a:r>
+          </a:p>
+        </p:txBody>
+      </p:sp>
+      <p:sp>
+        <p:nvSpPr>
+          <p:cNvPr id="11" name="TextBox 10"/>
+          <p:cNvSpPr txBox="1"/>
+          <p:nvPr/>
+        </p:nvSpPr>
+        <p:spPr>
+          <a:xfrm>
+            <a:off x="609600" y="3683000"/>
+            <a:ext cx="7112000" cy="638175"/>
+          </a:xfrm>
+          <a:prstGeom prst="rect">
+            <a:avLst/>
+          </a:prstGeom>
+          <a:noFill/>
+        </p:spPr>
+        <p:txBody>
+          <a:bodyPr wrap="square" lIns="0" rIns="0" tIns="0" bIns="0" anchor="ctr">
+            <a:noAutofit/>
+          </a:bodyPr>
+          <a:lstStyle/>
+          <a:p>
+            <a:pPr algn="l">
+              <a:lnSpc>
+                <a:spcPts val="2375"/>
+              </a:lnSpc>
+            </a:pPr>
+            <a:r>
+              <a:rPr sz="1900" b="0" i="0" spc="-38">
+                <a:solidFill>
+                  <a:srgbClr val="64707A"/>
+                </a:solidFill>
+                <a:latin typeface="Poppins SemiBold"/>
+                <a:ea typeface="Poppins SemiBold"/>
+                <a:cs typeface="Poppins SemiBold"/>
+              </a:rPr>
+              <a:t>The quotation, two lines at most. Cut it back until only the part worth repeating is left.</a:t>
+            </a:r>
+          </a:p>
+        </p:txBody>
+      </p:sp>
+      <p:sp>
+        <p:nvSpPr>
+          <p:cNvPr id="12" name="Rectangle 11"/>
+          <p:cNvSpPr/>
+          <p:nvPr/>
+        </p:nvSpPr>
+        <p:spPr>
+          <a:xfrm>
+            <a:off x="609600" y="4483100"/>
+            <a:ext cx="7112000" cy="12700"/>
+          </a:xfrm>
+          <a:prstGeom prst="rect">
+            <a:avLst/>
+          </a:prstGeom>
+          <a:solidFill>
+            <a:srgbClr val="EC2326"/>
+          </a:solidFill>
+          <a:ln>
+            <a:noFill/>
+          </a:ln>
+          <a:effectLst/>
+        </p:spPr>
+        <p:txBody>
+          <a:bodyPr rtlCol="0" anchor="ctr"/>
+          <a:lstStyle/>
+          <a:p>
+            <a:pPr algn="ctr"/>
+          </a:p>
+        </p:txBody>
+      </p:sp>
+      <p:sp>
+        <p:nvSpPr>
+          <p:cNvPr id="13" name="TextBox 12"/>
+          <p:cNvSpPr txBox="1"/>
+          <p:nvPr/>
+        </p:nvSpPr>
+        <p:spPr>
+          <a:xfrm>
+            <a:off x="609600" y="4622800"/>
+            <a:ext cx="7112000" cy="139700"/>
+          </a:xfrm>
+          <a:prstGeom prst="rect">
+            <a:avLst/>
+          </a:prstGeom>
+          <a:noFill/>
+        </p:spPr>
+        <p:txBody>
+          <a:bodyPr wrap="none" lIns="0" rIns="0" tIns="0" bIns="0" anchor="ctr">
+            <a:noAutofit/>
+          </a:bodyPr>
+          <a:lstStyle/>
+          <a:p>
+            <a:pPr algn="l"/>
+            <a:r>
+              <a:rPr sz="900" b="0" i="0">
+                <a:solidFill>
+                  <a:srgbClr val="64707A"/>
+                </a:solidFill>
+                <a:latin typeface="Urbanist SemiBold"/>
+                <a:ea typeface="Urbanist SemiBold"/>
+                <a:cs typeface="Urbanist SemiBold"/>
+              </a:rPr>
+              <a:t>Name of the person</a:t>
+            </a:r>
+          </a:p>
+        </p:txBody>
+      </p:sp>
+      <p:sp>
+        <p:nvSpPr>
+          <p:cNvPr id="14" name="TextBox 13"/>
+          <p:cNvSpPr txBox="1"/>
+          <p:nvPr/>
+        </p:nvSpPr>
+        <p:spPr>
+          <a:xfrm>
+            <a:off x="609600" y="4794250"/>
+            <a:ext cx="7112000" cy="76200"/>
+          </a:xfrm>
+          <a:prstGeom prst="rect">
+            <a:avLst/>
+          </a:prstGeom>
+          <a:noFill/>
+        </p:spPr>
+        <p:txBody>
+          <a:bodyPr wrap="none" lIns="0" rIns="0" tIns="0" bIns="0" anchor="ctr">
+            <a:noAutofit/>
+          </a:bodyPr>
+          <a:lstStyle/>
+          <a:p>
+            <a:pPr algn="l"/>
+            <a:r>
+              <a:rPr sz="620" b="0" i="0" spc="125">
+                <a:solidFill>
+                  <a:srgbClr val="64707A"/>
+                </a:solidFill>
+                <a:latin typeface="League Spartan SemiBold"/>
+                <a:ea typeface="League Spartan SemiBold"/>
+                <a:cs typeface="League Spartan SemiBold"/>
+              </a:rPr>
+              <a:t>ROLE · ORGANISATION</a:t>
+            </a:r>
+          </a:p>
+        </p:txBody>
+      </p:sp>
+      <p:sp>
+        <p:nvSpPr>
+          <p:cNvPr id="15" name="Rectangle 14"/>
+          <p:cNvSpPr/>
+          <p:nvPr/>
+        </p:nvSpPr>
+        <p:spPr>
+          <a:xfrm>
+            <a:off x="8026400" y="1701800"/>
+            <a:ext cx="3556000" cy="4648200"/>
+          </a:xfrm>
+          <a:prstGeom prst="rect">
+            <a:avLst/>
+          </a:prstGeom>
+          <a:solidFill>
+            <a:srgbClr val="FFFFFF"/>
+          </a:solidFill>
+          <a:ln>
+            <a:noFill/>
+          </a:ln>
+          <a:effectLst/>
+        </p:spPr>
+        <p:txBody>
+          <a:bodyPr rtlCol="0" anchor="ctr"/>
+          <a:lstStyle/>
+          <a:p>
+            <a:pPr algn="ctr"/>
+          </a:p>
+        </p:txBody>
+      </p:sp>
+      <p:pic>
+        <p:nvPicPr>
+          <p:cNvPr id="16" name="Picture 15" descr="refs-crew.jpg"/>
+          <p:cNvPicPr>
+            <a:picLocks noChangeAspect="1"/>
+          </p:cNvPicPr>
+          <p:nvPr/>
+        </p:nvPicPr>
+        <p:blipFill>
+          <a:blip r:embed="rId3"/>
+          <a:srcRect l="5883" r="5883"/>
+          <a:stretch>
+            <a:fillRect/>
+          </a:stretch>
+        </p:blipFill>
+        <p:spPr>
+          <a:xfrm>
+            <a:off x="8026400" y="1701800"/>
+            <a:ext cx="3556000" cy="4648200"/>
+          </a:xfrm>
+          <a:prstGeom prst="rect">
+            <a:avLst/>
+          </a:prstGeom>
+        </p:spPr>
+      </p:pic>
+      <p:sp>
+        <p:nvSpPr>
+          <p:cNvPr id="17" name="TextBox 16"/>
+          <p:cNvSpPr txBox="1"/>
+          <p:nvPr/>
+        </p:nvSpPr>
+        <p:spPr>
+          <a:xfrm>
+            <a:off x="609600" y="6445250"/>
+            <a:ext cx="112020" cy="76200"/>
+          </a:xfrm>
+          <a:prstGeom prst="rect">
+            <a:avLst/>
+          </a:prstGeom>
+          <a:noFill/>
+        </p:spPr>
+        <p:txBody>
+          <a:bodyPr wrap="none" lIns="0" rIns="0" tIns="0" bIns="0" anchor="ctr">
+            <a:noAutofit/>
+          </a:bodyPr>
+          <a:lstStyle/>
+          <a:p>
+            <a:pPr algn="l"/>
+            <a:r>
+              <a:rPr sz="680" b="0" i="0" spc="148">
+                <a:solidFill>
+                  <a:srgbClr val="64707A"/>
+                </a:solidFill>
+                <a:latin typeface="League Spartan Medium"/>
+                <a:ea typeface="League Spartan Medium"/>
+                <a:cs typeface="League Spartan Medium"/>
+              </a:rPr>
+              <a:t>19</a:t>
+            </a:r>
+          </a:p>
+        </p:txBody>
+      </p:sp>
+      <p:sp>
+        <p:nvSpPr>
+          <p:cNvPr id="18" name="TextBox 17"/>
+          <p:cNvSpPr txBox="1"/>
+          <p:nvPr/>
+        </p:nvSpPr>
+        <p:spPr>
+          <a:xfrm>
+            <a:off x="11226902" y="6429375"/>
+            <a:ext cx="355498" cy="76200"/>
+          </a:xfrm>
+          <a:prstGeom prst="rect">
+            <a:avLst/>
+          </a:prstGeom>
+          <a:noFill/>
+        </p:spPr>
+        <p:txBody>
+          <a:bodyPr wrap="none" lIns="0" rIns="0" tIns="0" bIns="0" anchor="ctr">
+            <a:noAutofit/>
+          </a:bodyPr>
+          <a:lstStyle/>
+          <a:p>
+            <a:pPr algn="l"/>
+            <a:r>
+              <a:rPr sz="680" b="0" i="0" spc="148">
+                <a:solidFill>
+                  <a:srgbClr val="64707A"/>
+                </a:solidFill>
+                <a:latin typeface="League Spartan"/>
+                <a:ea typeface="League Spartan"/>
+                <a:cs typeface="League Spartan"/>
+              </a:rPr>
+              <a:t>QUOTE</a:t>
+            </a:r>
+          </a:p>
+        </p:txBody>
+      </p:sp>
+    </p:spTree>
+  </p:cSld>
+  <p:clrMapOvr>
+    <a:masterClrMapping/>
+  </p:clrMapOvr>
+</p:sld>
+</file>
+
+<file path=ppt/slides/slide21.xml><?xml version="1.0" encoding="utf-8"?>
+<p:sld xmlns:a="http://schemas.openxmlformats.org/drawingml/2006/main" xmlns:p="http://schemas.openxmlformats.org/presentationml/2006/main" xmlns:r="http://schemas.openxmlformats.org/officeDocument/2006/relationships">
+  <p:cSld>
+    <p:spTree>
+      <p:nvGrpSpPr>
+        <p:cNvPr id="1" name=""/>
+        <p:cNvGrpSpPr/>
+        <p:nvPr/>
+      </p:nvGrpSpPr>
+      <p:grpSpPr/>
+      <p:sp>
+        <p:nvSpPr>
+          <p:cNvPr id="2" name="Rectangle 1"/>
+          <p:cNvSpPr/>
+          <p:nvPr/>
+        </p:nvSpPr>
+        <p:spPr>
+          <a:xfrm>
+            <a:off x="0" y="0"/>
+            <a:ext cx="12192000" cy="6858000"/>
+          </a:xfrm>
+          <a:prstGeom prst="rect">
+            <a:avLst/>
+          </a:prstGeom>
+          <a:solidFill>
+            <a:srgbClr val="F6F7F9"/>
+          </a:solidFill>
+          <a:ln>
+            <a:noFill/>
+          </a:ln>
+          <a:effectLst/>
+        </p:spPr>
+        <p:txBody>
+          <a:bodyPr rtlCol="0" anchor="ctr"/>
+          <a:lstStyle/>
+          <a:p>
+            <a:pPr algn="ctr"/>
+          </a:p>
+        </p:txBody>
+      </p:sp>
+      <p:sp>
+        <p:nvSpPr>
+          <p:cNvPr id="3" name="Rectangle 2"/>
+          <p:cNvSpPr/>
+          <p:nvPr/>
+        </p:nvSpPr>
+        <p:spPr>
+          <a:xfrm>
+            <a:off x="609600" y="381000"/>
+            <a:ext cx="259658" cy="165100"/>
+          </a:xfrm>
+          <a:prstGeom prst="rect">
+            <a:avLst/>
+          </a:prstGeom>
+          <a:solidFill>
+            <a:srgbClr val="EC2326"/>
+          </a:solidFill>
+          <a:ln>
+            <a:noFill/>
+          </a:ln>
+          <a:effectLst/>
+        </p:spPr>
+        <p:txBody>
+          <a:bodyPr rtlCol="0" anchor="ctr"/>
+          <a:lstStyle/>
+          <a:p>
+            <a:pPr algn="ctr"/>
+          </a:p>
+        </p:txBody>
+      </p:sp>
+      <p:sp>
+        <p:nvSpPr>
+          <p:cNvPr id="4" name="TextBox 3"/>
+          <p:cNvSpPr txBox="1"/>
+          <p:nvPr/>
+        </p:nvSpPr>
+        <p:spPr>
+          <a:xfrm>
+            <a:off x="609600" y="425450"/>
+            <a:ext cx="259658" cy="82550"/>
+          </a:xfrm>
+          <a:prstGeom prst="rect">
+            <a:avLst/>
+          </a:prstGeom>
+          <a:noFill/>
+        </p:spPr>
+        <p:txBody>
+          <a:bodyPr wrap="none" lIns="69850" rIns="69850" tIns="0" bIns="0" anchor="ctr">
+            <a:noAutofit/>
+          </a:bodyPr>
+          <a:lstStyle/>
+          <a:p>
+            <a:pPr algn="l"/>
+            <a:r>
+              <a:rPr sz="700" b="0" i="0" spc="70">
+                <a:solidFill>
+                  <a:srgbClr val="FFFFFF"/>
+                </a:solidFill>
+                <a:latin typeface="League Spartan SemiBold"/>
+                <a:ea typeface="League Spartan SemiBold"/>
+                <a:cs typeface="League Spartan SemiBold"/>
+              </a:rPr>
+              <a:t>20</a:t>
+            </a:r>
+          </a:p>
+        </p:txBody>
+      </p:sp>
+      <p:sp>
+        <p:nvSpPr>
+          <p:cNvPr id="5" name="TextBox 4"/>
+          <p:cNvSpPr txBox="1"/>
+          <p:nvPr/>
+        </p:nvSpPr>
+        <p:spPr>
+          <a:xfrm>
+            <a:off x="970858" y="414338"/>
+            <a:ext cx="957859" cy="88900"/>
+          </a:xfrm>
+          <a:prstGeom prst="rect">
+            <a:avLst/>
+          </a:prstGeom>
+          <a:noFill/>
+        </p:spPr>
+        <p:txBody>
+          <a:bodyPr wrap="none" lIns="0" rIns="0" tIns="0" bIns="0" anchor="ctr">
+            <a:noAutofit/>
+          </a:bodyPr>
+          <a:lstStyle/>
+          <a:p>
+            <a:pPr algn="l"/>
+            <a:r>
+              <a:rPr sz="780" b="0" i="0" spc="186">
+                <a:solidFill>
+                  <a:srgbClr val="101A2B"/>
+                </a:solidFill>
+                <a:latin typeface="League Spartan SemiBold"/>
+                <a:ea typeface="League Spartan SemiBold"/>
+                <a:cs typeface="League Spartan SemiBold"/>
+              </a:rPr>
+              <a:t>SECTION NAME</a:t>
+            </a:r>
+          </a:p>
+        </p:txBody>
+      </p:sp>
+      <p:pic>
+        <p:nvPicPr>
+          <p:cNvPr id="6" name="Picture 5" descr="iaq-logo-tag.png"/>
+          <p:cNvPicPr>
+            <a:picLocks noChangeAspect="1"/>
+          </p:cNvPicPr>
+          <p:nvPr/>
+        </p:nvPicPr>
+        <p:blipFill>
+          <a:blip r:embed="rId2"/>
+          <a:stretch>
+            <a:fillRect/>
+          </a:stretch>
+        </p:blipFill>
+        <p:spPr>
+          <a:xfrm>
+            <a:off x="10947400" y="304800"/>
+            <a:ext cx="635000" cy="317500"/>
+          </a:xfrm>
+          <a:prstGeom prst="rect">
+            <a:avLst/>
+          </a:prstGeom>
+        </p:spPr>
+      </p:pic>
+      <p:sp>
+        <p:nvSpPr>
+          <p:cNvPr id="7" name="Rectangle 6"/>
+          <p:cNvSpPr/>
+          <p:nvPr/>
+        </p:nvSpPr>
+        <p:spPr>
+          <a:xfrm>
+            <a:off x="609600" y="1438872"/>
+            <a:ext cx="10972800" cy="6350"/>
+          </a:xfrm>
+          <a:prstGeom prst="rect">
+            <a:avLst/>
+          </a:prstGeom>
+          <a:solidFill>
+            <a:srgbClr val="D5DBE2"/>
+          </a:solidFill>
+          <a:ln>
+            <a:noFill/>
+          </a:ln>
+          <a:effectLst/>
+        </p:spPr>
+        <p:txBody>
+          <a:bodyPr rtlCol="0" anchor="ctr"/>
+          <a:lstStyle/>
+          <a:p>
+            <a:pPr algn="ctr"/>
+          </a:p>
+        </p:txBody>
+      </p:sp>
+      <p:sp>
+        <p:nvSpPr>
+          <p:cNvPr id="8" name="TextBox 7"/>
+          <p:cNvSpPr txBox="1"/>
+          <p:nvPr/>
+        </p:nvSpPr>
+        <p:spPr>
+          <a:xfrm>
+            <a:off x="609600" y="768350"/>
+            <a:ext cx="10972800" cy="304800"/>
+          </a:xfrm>
+          <a:prstGeom prst="rect">
+            <a:avLst/>
+          </a:prstGeom>
+          <a:noFill/>
+        </p:spPr>
+        <p:txBody>
+          <a:bodyPr wrap="none" lIns="0" rIns="0" tIns="0" bIns="0" anchor="ctr">
+            <a:noAutofit/>
+          </a:bodyPr>
+          <a:lstStyle/>
+          <a:p>
+            <a:pPr algn="l"/>
+            <a:r>
+              <a:rPr sz="1700" b="0" i="0" spc="-34">
+                <a:solidFill>
+                  <a:srgbClr val="64707A"/>
+                </a:solidFill>
+                <a:latin typeface="Poppins SemiBold"/>
+                <a:ea typeface="Poppins SemiBold"/>
+                <a:cs typeface="Poppins SemiBold"/>
+              </a:rPr>
+              <a:t>Page title</a:t>
+            </a:r>
+          </a:p>
+        </p:txBody>
+      </p:sp>
+      <p:sp>
+        <p:nvSpPr>
+          <p:cNvPr id="9" name="TextBox 8"/>
+          <p:cNvSpPr txBox="1"/>
+          <p:nvPr/>
+        </p:nvSpPr>
+        <p:spPr>
+          <a:xfrm>
+            <a:off x="609600" y="1118197"/>
+            <a:ext cx="6985000" cy="146050"/>
+          </a:xfrm>
+          <a:prstGeom prst="rect">
+            <a:avLst/>
+          </a:prstGeom>
+          <a:noFill/>
+        </p:spPr>
+        <p:txBody>
+          <a:bodyPr wrap="none" lIns="0" rIns="0" tIns="0" bIns="0" anchor="ctr">
+            <a:noAutofit/>
+          </a:bodyPr>
+          <a:lstStyle/>
+          <a:p>
+            <a:pPr algn="l"/>
+            <a:r>
+              <a:rPr sz="950" b="0" i="0">
+                <a:solidFill>
+                  <a:srgbClr val="64707A"/>
+                </a:solidFill>
+                <a:latin typeface="Urbanist"/>
+                <a:ea typeface="Urbanist"/>
+                <a:cs typeface="Urbanist"/>
+              </a:rPr>
+              <a:t>One line under it saying what the page is for.</a:t>
+            </a:r>
+          </a:p>
+        </p:txBody>
+      </p:sp>
+      <p:sp>
+        <p:nvSpPr>
+          <p:cNvPr id="10" name="Rectangle 9"/>
+          <p:cNvSpPr/>
+          <p:nvPr/>
+        </p:nvSpPr>
+        <p:spPr>
+          <a:xfrm>
+            <a:off x="609600" y="1701800"/>
+            <a:ext cx="5403850" cy="4174630"/>
+          </a:xfrm>
+          <a:prstGeom prst="rect">
+            <a:avLst/>
+          </a:prstGeom>
+          <a:solidFill>
+            <a:srgbClr val="FFFFFF"/>
+          </a:solidFill>
+          <a:ln>
+            <a:noFill/>
+          </a:ln>
+          <a:effectLst/>
+        </p:spPr>
+        <p:txBody>
+          <a:bodyPr rtlCol="0" anchor="ctr"/>
+          <a:lstStyle/>
+          <a:p>
+            <a:pPr algn="ctr"/>
+          </a:p>
+        </p:txBody>
+      </p:sp>
+      <p:sp>
+        <p:nvSpPr>
+          <p:cNvPr id="11" name="Rectangle 10"/>
+          <p:cNvSpPr/>
+          <p:nvPr/>
+        </p:nvSpPr>
+        <p:spPr>
+          <a:xfrm>
+            <a:off x="609600" y="1701800"/>
+            <a:ext cx="567830" cy="190500"/>
+          </a:xfrm>
+          <a:prstGeom prst="rect">
+            <a:avLst/>
+          </a:prstGeom>
+          <a:solidFill>
+            <a:srgbClr val="101A2B"/>
+          </a:solidFill>
+          <a:ln>
+            <a:noFill/>
+          </a:ln>
+          <a:effectLst/>
+        </p:spPr>
+        <p:txBody>
+          <a:bodyPr rtlCol="0" anchor="ctr"/>
+          <a:lstStyle/>
+          <a:p>
+            <a:pPr algn="ctr"/>
+          </a:p>
+        </p:txBody>
+      </p:sp>
+      <p:sp>
+        <p:nvSpPr>
+          <p:cNvPr id="12" name="TextBox 11"/>
+          <p:cNvSpPr txBox="1"/>
+          <p:nvPr/>
+        </p:nvSpPr>
+        <p:spPr>
+          <a:xfrm>
+            <a:off x="609600" y="1758950"/>
+            <a:ext cx="567830" cy="76200"/>
+          </a:xfrm>
+          <a:prstGeom prst="rect">
+            <a:avLst/>
+          </a:prstGeom>
+          <a:noFill/>
+        </p:spPr>
+        <p:txBody>
+          <a:bodyPr wrap="none" lIns="101600" rIns="101600" tIns="0" bIns="0" anchor="ctr">
+            <a:noAutofit/>
+          </a:bodyPr>
+          <a:lstStyle/>
+          <a:p>
+            <a:pPr algn="l"/>
+            <a:r>
+              <a:rPr sz="620" b="0" i="0" spc="125">
+                <a:solidFill>
+                  <a:srgbClr val="FFFFFF"/>
+                </a:solidFill>
+                <a:latin typeface="League Spartan SemiBold"/>
+                <a:ea typeface="League Spartan SemiBold"/>
+                <a:cs typeface="League Spartan SemiBold"/>
+              </a:rPr>
+              <a:t>BEFORE</a:t>
+            </a:r>
+          </a:p>
+        </p:txBody>
+      </p:sp>
+      <p:pic>
+        <p:nvPicPr>
+          <p:cNvPr id="13" name="Picture 12" descr="about-facility.jpg"/>
+          <p:cNvPicPr>
+            <a:picLocks noChangeAspect="1"/>
+          </p:cNvPicPr>
+          <p:nvPr/>
+        </p:nvPicPr>
+        <p:blipFill>
+          <a:blip r:embed="rId3"/>
+          <a:srcRect l="17639" r="17639"/>
+          <a:stretch>
+            <a:fillRect/>
+          </a:stretch>
+        </p:blipFill>
+        <p:spPr>
+          <a:xfrm>
+            <a:off x="609600" y="1701800"/>
+            <a:ext cx="5403850" cy="4174630"/>
+          </a:xfrm>
+          <a:prstGeom prst="rect">
+            <a:avLst/>
+          </a:prstGeom>
+        </p:spPr>
+      </p:pic>
+      <p:sp>
+        <p:nvSpPr>
+          <p:cNvPr id="14" name="TextBox 13"/>
+          <p:cNvSpPr txBox="1"/>
+          <p:nvPr/>
+        </p:nvSpPr>
+        <p:spPr>
+          <a:xfrm>
+            <a:off x="609600" y="5971680"/>
+            <a:ext cx="5403850" cy="196850"/>
+          </a:xfrm>
+          <a:prstGeom prst="rect">
+            <a:avLst/>
+          </a:prstGeom>
+          <a:noFill/>
+        </p:spPr>
+        <p:txBody>
+          <a:bodyPr wrap="none" lIns="0" rIns="0" tIns="0" bIns="0" anchor="ctr">
+            <a:noAutofit/>
+          </a:bodyPr>
+          <a:lstStyle/>
+          <a:p>
+            <a:pPr algn="l"/>
+            <a:r>
+              <a:rPr sz="1100" b="0" i="0" spc="-22">
+                <a:solidFill>
+                  <a:srgbClr val="64707A"/>
+                </a:solidFill>
+                <a:latin typeface="Poppins SemiBold"/>
+                <a:ea typeface="Poppins SemiBold"/>
+                <a:cs typeface="Poppins SemiBold"/>
+              </a:rPr>
+              <a:t>What it was</a:t>
+            </a:r>
+          </a:p>
+        </p:txBody>
+      </p:sp>
+      <p:sp>
+        <p:nvSpPr>
+          <p:cNvPr id="15" name="TextBox 14"/>
+          <p:cNvSpPr txBox="1"/>
+          <p:nvPr/>
+        </p:nvSpPr>
+        <p:spPr>
+          <a:xfrm>
+            <a:off x="609600" y="6215463"/>
+            <a:ext cx="5403850" cy="120650"/>
+          </a:xfrm>
+          <a:prstGeom prst="rect">
+            <a:avLst/>
+          </a:prstGeom>
+          <a:noFill/>
+        </p:spPr>
+        <p:txBody>
+          <a:bodyPr wrap="none" lIns="0" rIns="0" tIns="0" bIns="0" anchor="ctr">
+            <a:noAutofit/>
+          </a:bodyPr>
+          <a:lstStyle/>
+          <a:p>
+            <a:pPr algn="l"/>
+            <a:r>
+              <a:rPr sz="800" b="0" i="0">
+                <a:solidFill>
+                  <a:srgbClr val="64707A"/>
+                </a:solidFill>
+                <a:latin typeface="Urbanist"/>
+                <a:ea typeface="Urbanist"/>
+                <a:cs typeface="Urbanist"/>
+              </a:rPr>
+              <a:t>One or two sentences on the state it started in.</a:t>
+            </a:r>
+          </a:p>
+        </p:txBody>
+      </p:sp>
+      <p:sp>
+        <p:nvSpPr>
+          <p:cNvPr id="16" name="Rectangle 15"/>
+          <p:cNvSpPr/>
+          <p:nvPr/>
+        </p:nvSpPr>
+        <p:spPr>
+          <a:xfrm>
+            <a:off x="6178550" y="1701800"/>
+            <a:ext cx="5403850" cy="4174630"/>
+          </a:xfrm>
+          <a:prstGeom prst="rect">
+            <a:avLst/>
+          </a:prstGeom>
+          <a:solidFill>
+            <a:srgbClr val="FFFFFF"/>
+          </a:solidFill>
+          <a:ln>
+            <a:noFill/>
+          </a:ln>
+          <a:effectLst/>
+        </p:spPr>
+        <p:txBody>
+          <a:bodyPr rtlCol="0" anchor="ctr"/>
+          <a:lstStyle/>
+          <a:p>
+            <a:pPr algn="ctr"/>
+          </a:p>
+        </p:txBody>
+      </p:sp>
+      <p:sp>
+        <p:nvSpPr>
+          <p:cNvPr id="17" name="Rectangle 16"/>
+          <p:cNvSpPr/>
+          <p:nvPr/>
+        </p:nvSpPr>
+        <p:spPr>
+          <a:xfrm>
+            <a:off x="6178550" y="1701800"/>
+            <a:ext cx="499370" cy="190500"/>
+          </a:xfrm>
+          <a:prstGeom prst="rect">
+            <a:avLst/>
+          </a:prstGeom>
+          <a:solidFill>
+            <a:srgbClr val="EC2326"/>
+          </a:solidFill>
+          <a:ln>
+            <a:noFill/>
+          </a:ln>
+          <a:effectLst/>
+        </p:spPr>
+        <p:txBody>
+          <a:bodyPr rtlCol="0" anchor="ctr"/>
+          <a:lstStyle/>
+          <a:p>
+            <a:pPr algn="ctr"/>
+          </a:p>
+        </p:txBody>
+      </p:sp>
+      <p:sp>
+        <p:nvSpPr>
+          <p:cNvPr id="18" name="TextBox 17"/>
+          <p:cNvSpPr txBox="1"/>
+          <p:nvPr/>
+        </p:nvSpPr>
+        <p:spPr>
+          <a:xfrm>
+            <a:off x="6178550" y="1758950"/>
+            <a:ext cx="499370" cy="76200"/>
+          </a:xfrm>
+          <a:prstGeom prst="rect">
+            <a:avLst/>
+          </a:prstGeom>
+          <a:noFill/>
+        </p:spPr>
+        <p:txBody>
+          <a:bodyPr wrap="none" lIns="101600" rIns="101600" tIns="0" bIns="0" anchor="ctr">
+            <a:noAutofit/>
+          </a:bodyPr>
+          <a:lstStyle/>
+          <a:p>
+            <a:pPr algn="l"/>
+            <a:r>
+              <a:rPr sz="620" b="0" i="0" spc="125">
+                <a:solidFill>
+                  <a:srgbClr val="FFFFFF"/>
+                </a:solidFill>
+                <a:latin typeface="League Spartan SemiBold"/>
+                <a:ea typeface="League Spartan SemiBold"/>
+                <a:cs typeface="League Spartan SemiBold"/>
+              </a:rPr>
+              <a:t>AFTER</a:t>
+            </a:r>
+          </a:p>
+        </p:txBody>
+      </p:sp>
+      <p:pic>
+        <p:nvPicPr>
+          <p:cNvPr id="19" name="Picture 18" descr="glance-cleanroom.jpg"/>
+          <p:cNvPicPr>
+            <a:picLocks noChangeAspect="1"/>
+          </p:cNvPicPr>
+          <p:nvPr/>
+        </p:nvPicPr>
+        <p:blipFill>
+          <a:blip r:embed="rId4"/>
+          <a:srcRect t="15233" b="15233"/>
+          <a:stretch>
+            <a:fillRect/>
+          </a:stretch>
+        </p:blipFill>
+        <p:spPr>
+          <a:xfrm>
+            <a:off x="6178550" y="1701800"/>
+            <a:ext cx="5403850" cy="4174630"/>
+          </a:xfrm>
+          <a:prstGeom prst="rect">
+            <a:avLst/>
+          </a:prstGeom>
+        </p:spPr>
+      </p:pic>
+      <p:sp>
+        <p:nvSpPr>
+          <p:cNvPr id="20" name="TextBox 19"/>
+          <p:cNvSpPr txBox="1"/>
+          <p:nvPr/>
+        </p:nvSpPr>
+        <p:spPr>
+          <a:xfrm>
+            <a:off x="6178550" y="5971680"/>
+            <a:ext cx="5403850" cy="196850"/>
+          </a:xfrm>
+          <a:prstGeom prst="rect">
+            <a:avLst/>
+          </a:prstGeom>
+          <a:noFill/>
+        </p:spPr>
+        <p:txBody>
+          <a:bodyPr wrap="none" lIns="0" rIns="0" tIns="0" bIns="0" anchor="ctr">
+            <a:noAutofit/>
+          </a:bodyPr>
+          <a:lstStyle/>
+          <a:p>
+            <a:pPr algn="l"/>
+            <a:r>
+              <a:rPr sz="1100" b="0" i="0" spc="-22">
+                <a:solidFill>
+                  <a:srgbClr val="64707A"/>
+                </a:solidFill>
+                <a:latin typeface="Poppins SemiBold"/>
+                <a:ea typeface="Poppins SemiBold"/>
+                <a:cs typeface="Poppins SemiBold"/>
+              </a:rPr>
+              <a:t>What it became</a:t>
+            </a:r>
+          </a:p>
+        </p:txBody>
+      </p:sp>
+      <p:sp>
+        <p:nvSpPr>
+          <p:cNvPr id="21" name="TextBox 20"/>
+          <p:cNvSpPr txBox="1"/>
+          <p:nvPr/>
+        </p:nvSpPr>
+        <p:spPr>
+          <a:xfrm>
+            <a:off x="6178550" y="6215463"/>
+            <a:ext cx="5403850" cy="120650"/>
+          </a:xfrm>
+          <a:prstGeom prst="rect">
+            <a:avLst/>
+          </a:prstGeom>
+          <a:noFill/>
+        </p:spPr>
+        <p:txBody>
+          <a:bodyPr wrap="none" lIns="0" rIns="0" tIns="0" bIns="0" anchor="ctr">
+            <a:noAutofit/>
+          </a:bodyPr>
+          <a:lstStyle/>
+          <a:p>
+            <a:pPr algn="l"/>
+            <a:r>
+              <a:rPr sz="800" b="0" i="0">
+                <a:solidFill>
+                  <a:srgbClr val="64707A"/>
+                </a:solidFill>
+                <a:latin typeface="Urbanist"/>
+                <a:ea typeface="Urbanist"/>
+                <a:cs typeface="Urbanist"/>
+              </a:rPr>
+              <a:t>One or two sentences on the state it ended in.</a:t>
+            </a:r>
+          </a:p>
+        </p:txBody>
+      </p:sp>
+      <p:sp>
+        <p:nvSpPr>
+          <p:cNvPr id="22" name="TextBox 21"/>
+          <p:cNvSpPr txBox="1"/>
+          <p:nvPr/>
+        </p:nvSpPr>
+        <p:spPr>
+          <a:xfrm>
+            <a:off x="609600" y="6445250"/>
+            <a:ext cx="135236" cy="76200"/>
+          </a:xfrm>
+          <a:prstGeom prst="rect">
+            <a:avLst/>
+          </a:prstGeom>
+          <a:noFill/>
+        </p:spPr>
+        <p:txBody>
+          <a:bodyPr wrap="none" lIns="0" rIns="0" tIns="0" bIns="0" anchor="ctr">
+            <a:noAutofit/>
+          </a:bodyPr>
+          <a:lstStyle/>
+          <a:p>
+            <a:pPr algn="l"/>
+            <a:r>
+              <a:rPr sz="680" b="0" i="0" spc="148">
+                <a:solidFill>
+                  <a:srgbClr val="64707A"/>
+                </a:solidFill>
+                <a:latin typeface="League Spartan Medium"/>
+                <a:ea typeface="League Spartan Medium"/>
+                <a:cs typeface="League Spartan Medium"/>
+              </a:rPr>
+              <a:t>20</a:t>
+            </a:r>
+          </a:p>
+        </p:txBody>
+      </p:sp>
+      <p:sp>
+        <p:nvSpPr>
+          <p:cNvPr id="23" name="TextBox 22"/>
+          <p:cNvSpPr txBox="1"/>
+          <p:nvPr/>
+        </p:nvSpPr>
+        <p:spPr>
+          <a:xfrm>
+            <a:off x="10569080" y="6429375"/>
+            <a:ext cx="1013320" cy="76200"/>
+          </a:xfrm>
+          <a:prstGeom prst="rect">
+            <a:avLst/>
+          </a:prstGeom>
+          <a:noFill/>
+        </p:spPr>
+        <p:txBody>
+          <a:bodyPr wrap="none" lIns="0" rIns="0" tIns="0" bIns="0" anchor="ctr">
+            <a:noAutofit/>
+          </a:bodyPr>
+          <a:lstStyle/>
+          <a:p>
+            <a:pPr algn="l"/>
+            <a:r>
+              <a:rPr sz="680" b="0" i="0" spc="148">
+                <a:solidFill>
+                  <a:srgbClr val="64707A"/>
+                </a:solidFill>
+                <a:latin typeface="League Spartan"/>
+                <a:ea typeface="League Spartan"/>
+                <a:cs typeface="League Spartan"/>
+              </a:rPr>
+              <a:t>BEFORE AND AFTER</a:t>
             </a:r>
           </a:p>
         </p:txBody>

--- a/iaq-deck/template/IAQ-Master-Template-2026.pptx
+++ b/iaq-deck/template/IAQ-Master-Template-2026.pptx
@@ -3205,8 +3205,6 @@
                   <a:srgbClr val="101A2B"/>
                 </a:solidFill>
                 <a:latin typeface="League Spartan SemiBold"/>
-                <a:ea typeface="League Spartan SemiBold"/>
-                <a:cs typeface="League Spartan SemiBold"/>
               </a:rPr>
               <a:t>IAQ TECHNOLOGY INTERNATIONAL SDN BHD</a:t>
             </a:r>
@@ -3296,8 +3294,6 @@
                   <a:srgbClr val="EC2326"/>
                 </a:solidFill>
                 <a:latin typeface="Poppins SemiBold"/>
-                <a:ea typeface="Poppins SemiBold"/>
-                <a:cs typeface="Poppins SemiBold"/>
               </a:rPr>
               <a:t>Master template</a:t>
             </a:r>
@@ -3333,10 +3329,8 @@
                   <a:srgbClr val="64707A"/>
                 </a:solidFill>
                 <a:latin typeface="Urbanist"/>
-                <a:ea typeface="Urbanist"/>
-                <a:cs typeface="Urbanist"/>
-              </a:rPr>
-              <a:t>Seventeen layouts to build a new slide from. Copy the page you need and type into it.</a:t>
+              </a:rPr>
+              <a:t>Every layout in the set. Copy the page you need and type into it.</a:t>
             </a:r>
           </a:p>
         </p:txBody>
@@ -3370,8 +3364,6 @@
                   <a:srgbClr val="EC2326"/>
                 </a:solidFill>
                 <a:latin typeface="League Spartan SemiBold"/>
-                <a:ea typeface="League Spartan SemiBold"/>
-                <a:cs typeface="League Spartan SemiBold"/>
               </a:rPr>
               <a:t>01</a:t>
             </a:r>
@@ -3407,8 +3399,6 @@
                   <a:srgbClr val="101A2B"/>
                 </a:solidFill>
                 <a:latin typeface="Poppins SemiBold"/>
-                <a:ea typeface="Poppins SemiBold"/>
-                <a:cs typeface="Poppins SemiBold"/>
               </a:rPr>
               <a:t>Title</a:t>
             </a:r>
@@ -3444,8 +3434,6 @@
                   <a:srgbClr val="64707A"/>
                 </a:solidFill>
                 <a:latin typeface="Urbanist"/>
-                <a:ea typeface="Urbanist"/>
-                <a:cs typeface="Urbanist"/>
               </a:rPr>
               <a:t>Open a deck or a chapter of one.</a:t>
             </a:r>
@@ -3481,8 +3469,6 @@
                   <a:srgbClr val="EC2326"/>
                 </a:solidFill>
                 <a:latin typeface="League Spartan SemiBold"/>
-                <a:ea typeface="League Spartan SemiBold"/>
-                <a:cs typeface="League Spartan SemiBold"/>
               </a:rPr>
               <a:t>02</a:t>
             </a:r>
@@ -3518,8 +3504,6 @@
                   <a:srgbClr val="101A2B"/>
                 </a:solidFill>
                 <a:latin typeface="Poppins SemiBold"/>
-                <a:ea typeface="Poppins SemiBold"/>
-                <a:cs typeface="Poppins SemiBold"/>
               </a:rPr>
               <a:t>Section divider</a:t>
             </a:r>
@@ -3555,8 +3539,6 @@
                   <a:srgbClr val="64707A"/>
                 </a:solidFill>
                 <a:latin typeface="Urbanist"/>
-                <a:ea typeface="Urbanist"/>
-                <a:cs typeface="Urbanist"/>
               </a:rPr>
               <a:t>Open a new part of the deck.</a:t>
             </a:r>
@@ -3592,8 +3574,6 @@
                   <a:srgbClr val="EC2326"/>
                 </a:solidFill>
                 <a:latin typeface="League Spartan SemiBold"/>
-                <a:ea typeface="League Spartan SemiBold"/>
-                <a:cs typeface="League Spartan SemiBold"/>
               </a:rPr>
               <a:t>03</a:t>
             </a:r>
@@ -3629,8 +3609,6 @@
                   <a:srgbClr val="101A2B"/>
                 </a:solidFill>
                 <a:latin typeface="Poppins SemiBold"/>
-                <a:ea typeface="Poppins SemiBold"/>
-                <a:cs typeface="Poppins SemiBold"/>
               </a:rPr>
               <a:t>Statement</a:t>
             </a:r>
@@ -3666,8 +3644,6 @@
                   <a:srgbClr val="64707A"/>
                 </a:solidFill>
                 <a:latin typeface="Urbanist"/>
-                <a:ea typeface="Urbanist"/>
-                <a:cs typeface="Urbanist"/>
               </a:rPr>
               <a:t>One argument, said plainly, with a photograph.</a:t>
             </a:r>
@@ -3703,8 +3679,6 @@
                   <a:srgbClr val="EC2326"/>
                 </a:solidFill>
                 <a:latin typeface="League Spartan SemiBold"/>
-                <a:ea typeface="League Spartan SemiBold"/>
-                <a:cs typeface="League Spartan SemiBold"/>
               </a:rPr>
               <a:t>04</a:t>
             </a:r>
@@ -3740,8 +3714,6 @@
                   <a:srgbClr val="101A2B"/>
                 </a:solidFill>
                 <a:latin typeface="Poppins SemiBold"/>
-                <a:ea typeface="Poppins SemiBold"/>
-                <a:cs typeface="Poppins SemiBold"/>
               </a:rPr>
               <a:t>Highlights</a:t>
             </a:r>
@@ -3777,8 +3749,6 @@
                   <a:srgbClr val="64707A"/>
                 </a:solidFill>
                 <a:latin typeface="Urbanist"/>
-                <a:ea typeface="Urbanist"/>
-                <a:cs typeface="Urbanist"/>
               </a:rPr>
               <a:t>Three or four figures that carry the page.</a:t>
             </a:r>
@@ -3814,8 +3784,6 @@
                   <a:srgbClr val="EC2326"/>
                 </a:solidFill>
                 <a:latin typeface="League Spartan SemiBold"/>
-                <a:ea typeface="League Spartan SemiBold"/>
-                <a:cs typeface="League Spartan SemiBold"/>
               </a:rPr>
               <a:t>05</a:t>
             </a:r>
@@ -3851,8 +3819,6 @@
                   <a:srgbClr val="101A2B"/>
                 </a:solidFill>
                 <a:latin typeface="Poppins SemiBold"/>
-                <a:ea typeface="Poppins SemiBold"/>
-                <a:cs typeface="Poppins SemiBold"/>
               </a:rPr>
               <a:t>Icon cards</a:t>
             </a:r>
@@ -3888,8 +3854,6 @@
                   <a:srgbClr val="64707A"/>
                 </a:solidFill>
                 <a:latin typeface="Urbanist"/>
-                <a:ea typeface="Urbanist"/>
-                <a:cs typeface="Urbanist"/>
               </a:rPr>
               <a:t>A set of capabilities, services or principles.</a:t>
             </a:r>
@@ -3925,8 +3889,6 @@
                   <a:srgbClr val="EC2326"/>
                 </a:solidFill>
                 <a:latin typeface="League Spartan SemiBold"/>
-                <a:ea typeface="League Spartan SemiBold"/>
-                <a:cs typeface="League Spartan SemiBold"/>
               </a:rPr>
               <a:t>06</a:t>
             </a:r>
@@ -3962,8 +3924,6 @@
                   <a:srgbClr val="101A2B"/>
                 </a:solidFill>
                 <a:latin typeface="Poppins SemiBold"/>
-                <a:ea typeface="Poppins SemiBold"/>
-                <a:cs typeface="Poppins SemiBold"/>
               </a:rPr>
               <a:t>Comparison</a:t>
             </a:r>
@@ -3999,8 +3959,6 @@
                   <a:srgbClr val="64707A"/>
                 </a:solidFill>
                 <a:latin typeface="Urbanist"/>
-                <a:ea typeface="Urbanist"/>
-                <a:cs typeface="Urbanist"/>
               </a:rPr>
               <a:t>Two or three options read side by side.</a:t>
             </a:r>
@@ -4036,8 +3994,6 @@
                   <a:srgbClr val="EC2326"/>
                 </a:solidFill>
                 <a:latin typeface="League Spartan SemiBold"/>
-                <a:ea typeface="League Spartan SemiBold"/>
-                <a:cs typeface="League Spartan SemiBold"/>
               </a:rPr>
               <a:t>07</a:t>
             </a:r>
@@ -4073,8 +4029,6 @@
                   <a:srgbClr val="101A2B"/>
                 </a:solidFill>
                 <a:latin typeface="Poppins SemiBold"/>
-                <a:ea typeface="Poppins SemiBold"/>
-                <a:cs typeface="Poppins SemiBold"/>
               </a:rPr>
               <a:t>Org chart · reporting tree</a:t>
             </a:r>
@@ -4110,8 +4064,6 @@
                   <a:srgbClr val="64707A"/>
                 </a:solidFill>
                 <a:latin typeface="Urbanist"/>
-                <a:ea typeface="Urbanist"/>
-                <a:cs typeface="Urbanist"/>
               </a:rPr>
               <a:t>Who reports to whom, three levels at most.</a:t>
             </a:r>
@@ -4147,8 +4099,6 @@
                   <a:srgbClr val="EC2326"/>
                 </a:solidFill>
                 <a:latin typeface="League Spartan SemiBold"/>
-                <a:ea typeface="League Spartan SemiBold"/>
-                <a:cs typeface="League Spartan SemiBold"/>
               </a:rPr>
               <a:t>08</a:t>
             </a:r>
@@ -4184,8 +4134,6 @@
                   <a:srgbClr val="101A2B"/>
                 </a:solidFill>
                 <a:latin typeface="Poppins SemiBold"/>
-                <a:ea typeface="Poppins SemiBold"/>
-                <a:cs typeface="Poppins SemiBold"/>
               </a:rPr>
               <a:t>Org chart · flat team band</a:t>
             </a:r>
@@ -4221,8 +4169,6 @@
                   <a:srgbClr val="64707A"/>
                 </a:solidFill>
                 <a:latin typeface="Urbanist"/>
-                <a:ea typeface="Urbanist"/>
-                <a:cs typeface="Urbanist"/>
               </a:rPr>
               <a:t>A team of peers, no hierarchy implied.</a:t>
             </a:r>
@@ -4258,8 +4204,6 @@
                   <a:srgbClr val="EC2326"/>
                 </a:solidFill>
                 <a:latin typeface="League Spartan SemiBold"/>
-                <a:ea typeface="League Spartan SemiBold"/>
-                <a:cs typeface="League Spartan SemiBold"/>
               </a:rPr>
               <a:t>09</a:t>
             </a:r>
@@ -4295,8 +4239,6 @@
                   <a:srgbClr val="101A2B"/>
                 </a:solidFill>
                 <a:latin typeface="Poppins SemiBold"/>
-                <a:ea typeface="Poppins SemiBold"/>
-                <a:cs typeface="Poppins SemiBold"/>
               </a:rPr>
               <a:t>Org chart · group structure</a:t>
             </a:r>
@@ -4332,8 +4274,6 @@
                   <a:srgbClr val="64707A"/>
                 </a:solidFill>
                 <a:latin typeface="Urbanist"/>
-                <a:ea typeface="Urbanist"/>
-                <a:cs typeface="Urbanist"/>
               </a:rPr>
               <a:t>A holding company and the businesses under it.</a:t>
             </a:r>
@@ -4369,8 +4309,6 @@
                   <a:srgbClr val="EC2326"/>
                 </a:solidFill>
                 <a:latin typeface="League Spartan SemiBold"/>
-                <a:ea typeface="League Spartan SemiBold"/>
-                <a:cs typeface="League Spartan SemiBold"/>
               </a:rPr>
               <a:t>10</a:t>
             </a:r>
@@ -4406,8 +4344,6 @@
                   <a:srgbClr val="101A2B"/>
                 </a:solidFill>
                 <a:latin typeface="Poppins SemiBold"/>
-                <a:ea typeface="Poppins SemiBold"/>
-                <a:cs typeface="Poppins SemiBold"/>
               </a:rPr>
               <a:t>Process</a:t>
             </a:r>
@@ -4443,8 +4379,6 @@
                   <a:srgbClr val="64707A"/>
                 </a:solidFill>
                 <a:latin typeface="Urbanist"/>
-                <a:ea typeface="Urbanist"/>
-                <a:cs typeface="Urbanist"/>
               </a:rPr>
               <a:t>Stages that run in order, start to finish.</a:t>
             </a:r>
@@ -4480,8 +4414,6 @@
                   <a:srgbClr val="EC2326"/>
                 </a:solidFill>
                 <a:latin typeface="League Spartan SemiBold"/>
-                <a:ea typeface="League Spartan SemiBold"/>
-                <a:cs typeface="League Spartan SemiBold"/>
               </a:rPr>
               <a:t>11</a:t>
             </a:r>
@@ -4517,8 +4449,6 @@
                   <a:srgbClr val="101A2B"/>
                 </a:solidFill>
                 <a:latin typeface="Poppins SemiBold"/>
-                <a:ea typeface="Poppins SemiBold"/>
-                <a:cs typeface="Poppins SemiBold"/>
               </a:rPr>
               <a:t>Timeline</a:t>
             </a:r>
@@ -4554,8 +4484,6 @@
                   <a:srgbClr val="64707A"/>
                 </a:solidFill>
                 <a:latin typeface="Urbanist"/>
-                <a:ea typeface="Urbanist"/>
-                <a:cs typeface="Urbanist"/>
               </a:rPr>
               <a:t>Dates in order, with what happened at each.</a:t>
             </a:r>
@@ -4591,8 +4519,6 @@
                   <a:srgbClr val="EC2326"/>
                 </a:solidFill>
                 <a:latin typeface="League Spartan SemiBold"/>
-                <a:ea typeface="League Spartan SemiBold"/>
-                <a:cs typeface="League Spartan SemiBold"/>
               </a:rPr>
               <a:t>12</a:t>
             </a:r>
@@ -4628,8 +4554,6 @@
                   <a:srgbClr val="101A2B"/>
                 </a:solidFill>
                 <a:latin typeface="Poppins SemiBold"/>
-                <a:ea typeface="Poppins SemiBold"/>
-                <a:cs typeface="Poppins SemiBold"/>
               </a:rPr>
               <a:t>Infographic</a:t>
             </a:r>
@@ -4665,8 +4589,6 @@
                   <a:srgbClr val="64707A"/>
                 </a:solidFill>
                 <a:latin typeface="Urbanist"/>
-                <a:ea typeface="Urbanist"/>
-                <a:cs typeface="Urbanist"/>
               </a:rPr>
               <a:t>One visual in the middle, the parts around it.</a:t>
             </a:r>
@@ -4702,8 +4624,6 @@
                   <a:srgbClr val="EC2326"/>
                 </a:solidFill>
                 <a:latin typeface="League Spartan SemiBold"/>
-                <a:ea typeface="League Spartan SemiBold"/>
-                <a:cs typeface="League Spartan SemiBold"/>
               </a:rPr>
               <a:t>13</a:t>
             </a:r>
@@ -4739,8 +4659,6 @@
                   <a:srgbClr val="101A2B"/>
                 </a:solidFill>
                 <a:latin typeface="Poppins SemiBold"/>
-                <a:ea typeface="Poppins SemiBold"/>
-                <a:cs typeface="Poppins SemiBold"/>
               </a:rPr>
               <a:t>Image and specs</a:t>
             </a:r>
@@ -4776,8 +4694,6 @@
                   <a:srgbClr val="64707A"/>
                 </a:solidFill>
                 <a:latin typeface="Urbanist"/>
-                <a:ea typeface="Urbanist"/>
-                <a:cs typeface="Urbanist"/>
               </a:rPr>
               <a:t>One project or product, pictured and specified.</a:t>
             </a:r>
@@ -4813,8 +4729,6 @@
                   <a:srgbClr val="EC2326"/>
                 </a:solidFill>
                 <a:latin typeface="League Spartan SemiBold"/>
-                <a:ea typeface="League Spartan SemiBold"/>
-                <a:cs typeface="League Spartan SemiBold"/>
               </a:rPr>
               <a:t>14</a:t>
             </a:r>
@@ -4850,8 +4764,6 @@
                   <a:srgbClr val="101A2B"/>
                 </a:solidFill>
                 <a:latin typeface="Poppins SemiBold"/>
-                <a:ea typeface="Poppins SemiBold"/>
-                <a:cs typeface="Poppins SemiBold"/>
               </a:rPr>
               <a:t>Programme</a:t>
             </a:r>
@@ -4887,8 +4799,6 @@
                   <a:srgbClr val="64707A"/>
                 </a:solidFill>
                 <a:latin typeface="Urbanist"/>
-                <a:ea typeface="Urbanist"/>
-                <a:cs typeface="Urbanist"/>
               </a:rPr>
               <a:t>Work packages against a calendar.</a:t>
             </a:r>
@@ -4924,8 +4834,6 @@
                   <a:srgbClr val="EC2326"/>
                 </a:solidFill>
                 <a:latin typeface="League Spartan SemiBold"/>
-                <a:ea typeface="League Spartan SemiBold"/>
-                <a:cs typeface="League Spartan SemiBold"/>
               </a:rPr>
               <a:t>15</a:t>
             </a:r>
@@ -4961,8 +4869,6 @@
                   <a:srgbClr val="101A2B"/>
                 </a:solidFill>
                 <a:latin typeface="Poppins SemiBold"/>
-                <a:ea typeface="Poppins SemiBold"/>
-                <a:cs typeface="Poppins SemiBold"/>
               </a:rPr>
               <a:t>Table</a:t>
             </a:r>
@@ -4998,8 +4904,6 @@
                   <a:srgbClr val="64707A"/>
                 </a:solidFill>
                 <a:latin typeface="Urbanist"/>
-                <a:ea typeface="Urbanist"/>
-                <a:cs typeface="Urbanist"/>
               </a:rPr>
               <a:t>Rows and columns, where the detail has to be exact.</a:t>
             </a:r>
@@ -5035,8 +4939,6 @@
                   <a:srgbClr val="EC2326"/>
                 </a:solidFill>
                 <a:latin typeface="League Spartan SemiBold"/>
-                <a:ea typeface="League Spartan SemiBold"/>
-                <a:cs typeface="League Spartan SemiBold"/>
               </a:rPr>
               <a:t>16</a:t>
             </a:r>
@@ -5072,8 +4974,6 @@
                   <a:srgbClr val="101A2B"/>
                 </a:solidFill>
                 <a:latin typeface="Poppins SemiBold"/>
-                <a:ea typeface="Poppins SemiBold"/>
-                <a:cs typeface="Poppins SemiBold"/>
               </a:rPr>
               <a:t>Full-bleed image</a:t>
             </a:r>
@@ -5109,8 +5009,6 @@
                   <a:srgbClr val="64707A"/>
                 </a:solidFill>
                 <a:latin typeface="Urbanist"/>
-                <a:ea typeface="Urbanist"/>
-                <a:cs typeface="Urbanist"/>
               </a:rPr>
               <a:t>Let one photograph carry the page.</a:t>
             </a:r>
@@ -5146,8 +5044,6 @@
                   <a:srgbClr val="EC2326"/>
                 </a:solidFill>
                 <a:latin typeface="League Spartan SemiBold"/>
-                <a:ea typeface="League Spartan SemiBold"/>
-                <a:cs typeface="League Spartan SemiBold"/>
               </a:rPr>
               <a:t>17</a:t>
             </a:r>
@@ -5183,8 +5079,6 @@
                   <a:srgbClr val="101A2B"/>
                 </a:solidFill>
                 <a:latin typeface="Poppins SemiBold"/>
-                <a:ea typeface="Poppins SemiBold"/>
-                <a:cs typeface="Poppins SemiBold"/>
               </a:rPr>
               <a:t>Closing</a:t>
             </a:r>
@@ -5220,8 +5114,6 @@
                   <a:srgbClr val="64707A"/>
                 </a:solidFill>
                 <a:latin typeface="Urbanist"/>
-                <a:ea typeface="Urbanist"/>
-                <a:cs typeface="Urbanist"/>
               </a:rPr>
               <a:t>End the deck: the ask, and how to reach you.</a:t>
             </a:r>
@@ -5257,8 +5149,6 @@
                   <a:srgbClr val="EC2326"/>
                 </a:solidFill>
                 <a:latin typeface="League Spartan SemiBold"/>
-                <a:ea typeface="League Spartan SemiBold"/>
-                <a:cs typeface="League Spartan SemiBold"/>
               </a:rPr>
               <a:t>18</a:t>
             </a:r>
@@ -5294,8 +5184,6 @@
                   <a:srgbClr val="101A2B"/>
                 </a:solidFill>
                 <a:latin typeface="Poppins SemiBold"/>
-                <a:ea typeface="Poppins SemiBold"/>
-                <a:cs typeface="Poppins SemiBold"/>
               </a:rPr>
               <a:t>Agenda</a:t>
             </a:r>
@@ -5331,8 +5219,6 @@
                   <a:srgbClr val="64707A"/>
                 </a:solidFill>
                 <a:latin typeface="Urbanist"/>
-                <a:ea typeface="Urbanist"/>
-                <a:cs typeface="Urbanist"/>
               </a:rPr>
               <a:t>What the deck covers, before it covers it.</a:t>
             </a:r>
@@ -5368,8 +5254,6 @@
                   <a:srgbClr val="EC2326"/>
                 </a:solidFill>
                 <a:latin typeface="League Spartan SemiBold"/>
-                <a:ea typeface="League Spartan SemiBold"/>
-                <a:cs typeface="League Spartan SemiBold"/>
               </a:rPr>
               <a:t>19</a:t>
             </a:r>
@@ -5405,8 +5289,6 @@
                   <a:srgbClr val="101A2B"/>
                 </a:solidFill>
                 <a:latin typeface="Poppins SemiBold"/>
-                <a:ea typeface="Poppins SemiBold"/>
-                <a:cs typeface="Poppins SemiBold"/>
               </a:rPr>
               <a:t>Quote</a:t>
             </a:r>
@@ -5442,8 +5324,6 @@
                   <a:srgbClr val="64707A"/>
                 </a:solidFill>
                 <a:latin typeface="Urbanist"/>
-                <a:ea typeface="Urbanist"/>
-                <a:cs typeface="Urbanist"/>
               </a:rPr>
               <a:t>Let a client, or the board, say it instead of you.</a:t>
             </a:r>
@@ -5479,8 +5359,6 @@
                   <a:srgbClr val="EC2326"/>
                 </a:solidFill>
                 <a:latin typeface="League Spartan SemiBold"/>
-                <a:ea typeface="League Spartan SemiBold"/>
-                <a:cs typeface="League Spartan SemiBold"/>
               </a:rPr>
               <a:t>20</a:t>
             </a:r>
@@ -5516,8 +5394,6 @@
                   <a:srgbClr val="101A2B"/>
                 </a:solidFill>
                 <a:latin typeface="Poppins SemiBold"/>
-                <a:ea typeface="Poppins SemiBold"/>
-                <a:cs typeface="Poppins SemiBold"/>
               </a:rPr>
               <a:t>Before and after</a:t>
             </a:r>
@@ -5553,8 +5429,6 @@
                   <a:srgbClr val="64707A"/>
                 </a:solidFill>
                 <a:latin typeface="Urbanist"/>
-                <a:ea typeface="Urbanist"/>
-                <a:cs typeface="Urbanist"/>
               </a:rPr>
               <a:t>Two states of the same thing, side by side.</a:t>
             </a:r>
@@ -5590,8 +5464,6 @@
                   <a:srgbClr val="64707A"/>
                 </a:solidFill>
                 <a:latin typeface="League Spartan Medium"/>
-                <a:ea typeface="League Spartan Medium"/>
-                <a:cs typeface="League Spartan Medium"/>
               </a:rPr>
               <a:t>00</a:t>
             </a:r>
@@ -5627,8 +5499,6 @@
                   <a:srgbClr val="64707A"/>
                 </a:solidFill>
                 <a:latin typeface="League Spartan"/>
-                <a:ea typeface="League Spartan"/>
-                <a:cs typeface="League Spartan"/>
               </a:rPr>
               <a:t>CONTENTS</a:t>
             </a:r>
@@ -5742,8 +5612,6 @@
                   <a:srgbClr val="FFFFFF"/>
                 </a:solidFill>
                 <a:latin typeface="League Spartan SemiBold"/>
-                <a:ea typeface="League Spartan SemiBold"/>
-                <a:cs typeface="League Spartan SemiBold"/>
               </a:rPr>
               <a:t>09</a:t>
             </a:r>
@@ -5779,8 +5647,6 @@
                   <a:srgbClr val="101A2B"/>
                 </a:solidFill>
                 <a:latin typeface="League Spartan SemiBold"/>
-                <a:ea typeface="League Spartan SemiBold"/>
-                <a:cs typeface="League Spartan SemiBold"/>
               </a:rPr>
               <a:t>SECTION NAME</a:t>
             </a:r>
@@ -5870,8 +5736,6 @@
                   <a:srgbClr val="64707A"/>
                 </a:solidFill>
                 <a:latin typeface="Poppins SemiBold"/>
-                <a:ea typeface="Poppins SemiBold"/>
-                <a:cs typeface="Poppins SemiBold"/>
               </a:rPr>
               <a:t>Page title</a:t>
             </a:r>
@@ -5907,8 +5771,6 @@
                   <a:srgbClr val="64707A"/>
                 </a:solidFill>
                 <a:latin typeface="Urbanist"/>
-                <a:ea typeface="Urbanist"/>
-                <a:cs typeface="Urbanist"/>
               </a:rPr>
               <a:t>One line under it saying what the page is for.</a:t>
             </a:r>
@@ -5974,8 +5836,6 @@
                   <a:srgbClr val="64707A"/>
                 </a:solidFill>
                 <a:latin typeface="League Spartan SemiBold"/>
-                <a:ea typeface="League Spartan SemiBold"/>
-                <a:cs typeface="League Spartan SemiBold"/>
               </a:rPr>
               <a:t>HOLDING</a:t>
             </a:r>
@@ -6011,8 +5871,6 @@
                   <a:srgbClr val="64707A"/>
                 </a:solidFill>
                 <a:latin typeface="Poppins SemiBold"/>
-                <a:ea typeface="Poppins SemiBold"/>
-                <a:cs typeface="Poppins SemiBold"/>
               </a:rPr>
               <a:t>Parent company name</a:t>
             </a:r>
@@ -6048,8 +5906,6 @@
                   <a:srgbClr val="64707A"/>
                 </a:solidFill>
                 <a:latin typeface="Urbanist"/>
-                <a:ea typeface="Urbanist"/>
-                <a:cs typeface="Urbanist"/>
               </a:rPr>
               <a:t>Incorporated 0000</a:t>
             </a:r>
@@ -6295,8 +6151,6 @@
                   <a:srgbClr val="64707A"/>
                 </a:solidFill>
                 <a:latin typeface="League Spartan SemiBold"/>
-                <a:ea typeface="League Spartan SemiBold"/>
-                <a:cs typeface="League Spartan SemiBold"/>
               </a:rPr>
               <a:t>COMPANY 00</a:t>
             </a:r>
@@ -6332,8 +6186,6 @@
                   <a:srgbClr val="64707A"/>
                 </a:solidFill>
                 <a:latin typeface="Poppins SemiBold"/>
-                <a:ea typeface="Poppins SemiBold"/>
-                <a:cs typeface="Poppins SemiBold"/>
               </a:rPr>
               <a:t>Business name</a:t>
             </a:r>
@@ -6399,8 +6251,6 @@
                   <a:srgbClr val="64707A"/>
                 </a:solidFill>
                 <a:latin typeface="Urbanist"/>
-                <a:ea typeface="Urbanist"/>
-                <a:cs typeface="Urbanist"/>
               </a:rPr>
               <a:t>What it does</a:t>
             </a:r>
@@ -6466,8 +6316,6 @@
                   <a:srgbClr val="64707A"/>
                 </a:solidFill>
                 <a:latin typeface="Urbanist"/>
-                <a:ea typeface="Urbanist"/>
-                <a:cs typeface="Urbanist"/>
               </a:rPr>
               <a:t>What it does</a:t>
             </a:r>
@@ -6533,8 +6381,6 @@
                   <a:srgbClr val="64707A"/>
                 </a:solidFill>
                 <a:latin typeface="Urbanist"/>
-                <a:ea typeface="Urbanist"/>
-                <a:cs typeface="Urbanist"/>
               </a:rPr>
               <a:t>Where it works</a:t>
             </a:r>
@@ -6600,8 +6446,6 @@
                   <a:srgbClr val="64707A"/>
                 </a:solidFill>
                 <a:latin typeface="League Spartan SemiBold"/>
-                <a:ea typeface="League Spartan SemiBold"/>
-                <a:cs typeface="League Spartan SemiBold"/>
               </a:rPr>
               <a:t>COMPANY 00</a:t>
             </a:r>
@@ -6637,8 +6481,6 @@
                   <a:srgbClr val="64707A"/>
                 </a:solidFill>
                 <a:latin typeface="Poppins SemiBold"/>
-                <a:ea typeface="Poppins SemiBold"/>
-                <a:cs typeface="Poppins SemiBold"/>
               </a:rPr>
               <a:t>Business name</a:t>
             </a:r>
@@ -6704,8 +6546,6 @@
                   <a:srgbClr val="64707A"/>
                 </a:solidFill>
                 <a:latin typeface="Urbanist"/>
-                <a:ea typeface="Urbanist"/>
-                <a:cs typeface="Urbanist"/>
               </a:rPr>
               <a:t>What it does</a:t>
             </a:r>
@@ -6771,8 +6611,6 @@
                   <a:srgbClr val="64707A"/>
                 </a:solidFill>
                 <a:latin typeface="Urbanist"/>
-                <a:ea typeface="Urbanist"/>
-                <a:cs typeface="Urbanist"/>
               </a:rPr>
               <a:t>What it does</a:t>
             </a:r>
@@ -6838,8 +6676,6 @@
                   <a:srgbClr val="64707A"/>
                 </a:solidFill>
                 <a:latin typeface="Urbanist"/>
-                <a:ea typeface="Urbanist"/>
-                <a:cs typeface="Urbanist"/>
               </a:rPr>
               <a:t>Where it works</a:t>
             </a:r>
@@ -6905,8 +6741,6 @@
                   <a:srgbClr val="64707A"/>
                 </a:solidFill>
                 <a:latin typeface="League Spartan SemiBold"/>
-                <a:ea typeface="League Spartan SemiBold"/>
-                <a:cs typeface="League Spartan SemiBold"/>
               </a:rPr>
               <a:t>COMPANY 00</a:t>
             </a:r>
@@ -6942,8 +6776,6 @@
                   <a:srgbClr val="64707A"/>
                 </a:solidFill>
                 <a:latin typeface="Poppins SemiBold"/>
-                <a:ea typeface="Poppins SemiBold"/>
-                <a:cs typeface="Poppins SemiBold"/>
               </a:rPr>
               <a:t>Business name</a:t>
             </a:r>
@@ -7009,8 +6841,6 @@
                   <a:srgbClr val="64707A"/>
                 </a:solidFill>
                 <a:latin typeface="Urbanist"/>
-                <a:ea typeface="Urbanist"/>
-                <a:cs typeface="Urbanist"/>
               </a:rPr>
               <a:t>What it does</a:t>
             </a:r>
@@ -7076,8 +6906,6 @@
                   <a:srgbClr val="64707A"/>
                 </a:solidFill>
                 <a:latin typeface="Urbanist"/>
-                <a:ea typeface="Urbanist"/>
-                <a:cs typeface="Urbanist"/>
               </a:rPr>
               <a:t>What it does</a:t>
             </a:r>
@@ -7143,8 +6971,6 @@
                   <a:srgbClr val="64707A"/>
                 </a:solidFill>
                 <a:latin typeface="Urbanist"/>
-                <a:ea typeface="Urbanist"/>
-                <a:cs typeface="Urbanist"/>
               </a:rPr>
               <a:t>Where it works</a:t>
             </a:r>
@@ -7210,8 +7036,6 @@
                   <a:srgbClr val="64707A"/>
                 </a:solidFill>
                 <a:latin typeface="League Spartan SemiBold"/>
-                <a:ea typeface="League Spartan SemiBold"/>
-                <a:cs typeface="League Spartan SemiBold"/>
               </a:rPr>
               <a:t>COMPANY 00</a:t>
             </a:r>
@@ -7247,8 +7071,6 @@
                   <a:srgbClr val="64707A"/>
                 </a:solidFill>
                 <a:latin typeface="Poppins SemiBold"/>
-                <a:ea typeface="Poppins SemiBold"/>
-                <a:cs typeface="Poppins SemiBold"/>
               </a:rPr>
               <a:t>Business name</a:t>
             </a:r>
@@ -7314,8 +7136,6 @@
                   <a:srgbClr val="64707A"/>
                 </a:solidFill>
                 <a:latin typeface="Urbanist"/>
-                <a:ea typeface="Urbanist"/>
-                <a:cs typeface="Urbanist"/>
               </a:rPr>
               <a:t>What it does</a:t>
             </a:r>
@@ -7381,8 +7201,6 @@
                   <a:srgbClr val="64707A"/>
                 </a:solidFill>
                 <a:latin typeface="Urbanist"/>
-                <a:ea typeface="Urbanist"/>
-                <a:cs typeface="Urbanist"/>
               </a:rPr>
               <a:t>What it does</a:t>
             </a:r>
@@ -7448,8 +7266,6 @@
                   <a:srgbClr val="64707A"/>
                 </a:solidFill>
                 <a:latin typeface="Urbanist"/>
-                <a:ea typeface="Urbanist"/>
-                <a:cs typeface="Urbanist"/>
               </a:rPr>
               <a:t>Where it works</a:t>
             </a:r>
@@ -7485,8 +7301,6 @@
                   <a:srgbClr val="64707A"/>
                 </a:solidFill>
                 <a:latin typeface="League Spartan Medium"/>
-                <a:ea typeface="League Spartan Medium"/>
-                <a:cs typeface="League Spartan Medium"/>
               </a:rPr>
               <a:t>09</a:t>
             </a:r>
@@ -7522,8 +7336,6 @@
                   <a:srgbClr val="64707A"/>
                 </a:solidFill>
                 <a:latin typeface="League Spartan"/>
-                <a:ea typeface="League Spartan"/>
-                <a:cs typeface="League Spartan"/>
               </a:rPr>
               <a:t>ORG CHART · GROUP STRUCTURE</a:t>
             </a:r>
@@ -7637,8 +7449,6 @@
                   <a:srgbClr val="FFFFFF"/>
                 </a:solidFill>
                 <a:latin typeface="League Spartan SemiBold"/>
-                <a:ea typeface="League Spartan SemiBold"/>
-                <a:cs typeface="League Spartan SemiBold"/>
               </a:rPr>
               <a:t>10</a:t>
             </a:r>
@@ -7674,8 +7484,6 @@
                   <a:srgbClr val="101A2B"/>
                 </a:solidFill>
                 <a:latin typeface="League Spartan SemiBold"/>
-                <a:ea typeface="League Spartan SemiBold"/>
-                <a:cs typeface="League Spartan SemiBold"/>
               </a:rPr>
               <a:t>SECTION NAME</a:t>
             </a:r>
@@ -7765,8 +7573,6 @@
                   <a:srgbClr val="64707A"/>
                 </a:solidFill>
                 <a:latin typeface="Poppins SemiBold"/>
-                <a:ea typeface="Poppins SemiBold"/>
-                <a:cs typeface="Poppins SemiBold"/>
               </a:rPr>
               <a:t>Page title</a:t>
             </a:r>
@@ -7802,8 +7608,6 @@
                   <a:srgbClr val="64707A"/>
                 </a:solidFill>
                 <a:latin typeface="Urbanist"/>
-                <a:ea typeface="Urbanist"/>
-                <a:cs typeface="Urbanist"/>
               </a:rPr>
               <a:t>One line under it saying what the page is for.</a:t>
             </a:r>
@@ -7899,8 +7703,6 @@
                   <a:srgbClr val="64707A"/>
                 </a:solidFill>
                 <a:latin typeface="League Spartan SemiBold"/>
-                <a:ea typeface="League Spartan SemiBold"/>
-                <a:cs typeface="League Spartan SemiBold"/>
               </a:rPr>
               <a:t>PROCESS NAME</a:t>
             </a:r>
@@ -7936,8 +7738,6 @@
                   <a:srgbClr val="64707A"/>
                 </a:solidFill>
                 <a:latin typeface="Urbanist"/>
-                <a:ea typeface="Urbanist"/>
-                <a:cs typeface="Urbanist"/>
               </a:rPr>
               <a:t>One sentence saying what the process is and where it starts.</a:t>
             </a:r>
@@ -8091,8 +7891,6 @@
                   <a:srgbClr val="FFFFFF"/>
                 </a:solidFill>
                 <a:latin typeface="League Spartan SemiBold"/>
-                <a:ea typeface="League Spartan SemiBold"/>
-                <a:cs typeface="League Spartan SemiBold"/>
               </a:rPr>
               <a:t>01</a:t>
             </a:r>
@@ -8128,8 +7926,6 @@
                   <a:srgbClr val="64707A"/>
                 </a:solidFill>
                 <a:latin typeface="Poppins SemiBold"/>
-                <a:ea typeface="Poppins SemiBold"/>
-                <a:cs typeface="Poppins SemiBold"/>
               </a:rPr>
               <a:t>Stage name</a:t>
             </a:r>
@@ -8165,8 +7961,6 @@
                   <a:srgbClr val="64707A"/>
                 </a:solidFill>
                 <a:latin typeface="Urbanist"/>
-                <a:ea typeface="Urbanist"/>
-                <a:cs typeface="Urbanist"/>
               </a:rPr>
               <a:t>Three or four words</a:t>
             </a:r>
@@ -8320,8 +8114,6 @@
                   <a:srgbClr val="FFFFFF"/>
                 </a:solidFill>
                 <a:latin typeface="League Spartan SemiBold"/>
-                <a:ea typeface="League Spartan SemiBold"/>
-                <a:cs typeface="League Spartan SemiBold"/>
               </a:rPr>
               <a:t>02</a:t>
             </a:r>
@@ -8357,8 +8149,6 @@
                   <a:srgbClr val="64707A"/>
                 </a:solidFill>
                 <a:latin typeface="Poppins SemiBold"/>
-                <a:ea typeface="Poppins SemiBold"/>
-                <a:cs typeface="Poppins SemiBold"/>
               </a:rPr>
               <a:t>Stage name</a:t>
             </a:r>
@@ -8394,8 +8184,6 @@
                   <a:srgbClr val="64707A"/>
                 </a:solidFill>
                 <a:latin typeface="Urbanist"/>
-                <a:ea typeface="Urbanist"/>
-                <a:cs typeface="Urbanist"/>
               </a:rPr>
               <a:t>Three or four words</a:t>
             </a:r>
@@ -8549,8 +8337,6 @@
                   <a:srgbClr val="FFFFFF"/>
                 </a:solidFill>
                 <a:latin typeface="League Spartan SemiBold"/>
-                <a:ea typeface="League Spartan SemiBold"/>
-                <a:cs typeface="League Spartan SemiBold"/>
               </a:rPr>
               <a:t>03</a:t>
             </a:r>
@@ -8586,8 +8372,6 @@
                   <a:srgbClr val="64707A"/>
                 </a:solidFill>
                 <a:latin typeface="Poppins SemiBold"/>
-                <a:ea typeface="Poppins SemiBold"/>
-                <a:cs typeface="Poppins SemiBold"/>
               </a:rPr>
               <a:t>Stage name</a:t>
             </a:r>
@@ -8623,8 +8407,6 @@
                   <a:srgbClr val="64707A"/>
                 </a:solidFill>
                 <a:latin typeface="Urbanist"/>
-                <a:ea typeface="Urbanist"/>
-                <a:cs typeface="Urbanist"/>
               </a:rPr>
               <a:t>Three or four words</a:t>
             </a:r>
@@ -8778,8 +8560,6 @@
                   <a:srgbClr val="FFFFFF"/>
                 </a:solidFill>
                 <a:latin typeface="League Spartan SemiBold"/>
-                <a:ea typeface="League Spartan SemiBold"/>
-                <a:cs typeface="League Spartan SemiBold"/>
               </a:rPr>
               <a:t>04</a:t>
             </a:r>
@@ -8815,8 +8595,6 @@
                   <a:srgbClr val="64707A"/>
                 </a:solidFill>
                 <a:latin typeface="Poppins SemiBold"/>
-                <a:ea typeface="Poppins SemiBold"/>
-                <a:cs typeface="Poppins SemiBold"/>
               </a:rPr>
               <a:t>Stage name</a:t>
             </a:r>
@@ -8852,8 +8630,6 @@
                   <a:srgbClr val="64707A"/>
                 </a:solidFill>
                 <a:latin typeface="Urbanist"/>
-                <a:ea typeface="Urbanist"/>
-                <a:cs typeface="Urbanist"/>
               </a:rPr>
               <a:t>Three or four words</a:t>
             </a:r>
@@ -8975,8 +8751,6 @@
                   <a:srgbClr val="FFFFFF"/>
                 </a:solidFill>
                 <a:latin typeface="League Spartan SemiBold"/>
-                <a:ea typeface="League Spartan SemiBold"/>
-                <a:cs typeface="League Spartan SemiBold"/>
               </a:rPr>
               <a:t>05</a:t>
             </a:r>
@@ -9012,8 +8786,6 @@
                   <a:srgbClr val="64707A"/>
                 </a:solidFill>
                 <a:latin typeface="Poppins SemiBold"/>
-                <a:ea typeface="Poppins SemiBold"/>
-                <a:cs typeface="Poppins SemiBold"/>
               </a:rPr>
               <a:t>Stage name</a:t>
             </a:r>
@@ -9049,8 +8821,6 @@
                   <a:srgbClr val="64707A"/>
                 </a:solidFill>
                 <a:latin typeface="Urbanist"/>
-                <a:ea typeface="Urbanist"/>
-                <a:cs typeface="Urbanist"/>
               </a:rPr>
               <a:t>Three or four words</a:t>
             </a:r>
@@ -9086,8 +8856,6 @@
                   <a:srgbClr val="64707A"/>
                 </a:solidFill>
                 <a:latin typeface="League Spartan Medium"/>
-                <a:ea typeface="League Spartan Medium"/>
-                <a:cs typeface="League Spartan Medium"/>
               </a:rPr>
               <a:t>10</a:t>
             </a:r>
@@ -9123,8 +8891,6 @@
                   <a:srgbClr val="64707A"/>
                 </a:solidFill>
                 <a:latin typeface="League Spartan"/>
-                <a:ea typeface="League Spartan"/>
-                <a:cs typeface="League Spartan"/>
               </a:rPr>
               <a:t>PROCESS</a:t>
             </a:r>
@@ -9238,8 +9004,6 @@
                   <a:srgbClr val="FFFFFF"/>
                 </a:solidFill>
                 <a:latin typeface="League Spartan SemiBold"/>
-                <a:ea typeface="League Spartan SemiBold"/>
-                <a:cs typeface="League Spartan SemiBold"/>
               </a:rPr>
               <a:t>11</a:t>
             </a:r>
@@ -9275,8 +9039,6 @@
                   <a:srgbClr val="101A2B"/>
                 </a:solidFill>
                 <a:latin typeface="League Spartan SemiBold"/>
-                <a:ea typeface="League Spartan SemiBold"/>
-                <a:cs typeface="League Spartan SemiBold"/>
               </a:rPr>
               <a:t>SECTION NAME</a:t>
             </a:r>
@@ -9366,8 +9128,6 @@
                   <a:srgbClr val="64707A"/>
                 </a:solidFill>
                 <a:latin typeface="Poppins SemiBold"/>
-                <a:ea typeface="Poppins SemiBold"/>
-                <a:cs typeface="Poppins SemiBold"/>
               </a:rPr>
               <a:t>Page title</a:t>
             </a:r>
@@ -9403,8 +9163,6 @@
                   <a:srgbClr val="64707A"/>
                 </a:solidFill>
                 <a:latin typeface="Urbanist"/>
-                <a:ea typeface="Urbanist"/>
-                <a:cs typeface="Urbanist"/>
               </a:rPr>
               <a:t>One line under it saying what the page is for.</a:t>
             </a:r>
@@ -9440,8 +9198,6 @@
                   <a:srgbClr val="64707A"/>
                 </a:solidFill>
                 <a:latin typeface="Poppins SemiBold"/>
-                <a:ea typeface="Poppins SemiBold"/>
-                <a:cs typeface="Poppins SemiBold"/>
               </a:rPr>
               <a:t>Event</a:t>
             </a:r>
@@ -9477,8 +9233,6 @@
                   <a:srgbClr val="64707A"/>
                 </a:solidFill>
                 <a:latin typeface="Urbanist"/>
-                <a:ea typeface="Urbanist"/>
-                <a:cs typeface="Urbanist"/>
               </a:rPr>
               <a:t>One line on what happened</a:t>
             </a:r>
@@ -9514,8 +9268,6 @@
                   <a:srgbClr val="64707A"/>
                 </a:solidFill>
                 <a:latin typeface="Poppins SemiBold"/>
-                <a:ea typeface="Poppins SemiBold"/>
-                <a:cs typeface="Poppins SemiBold"/>
               </a:rPr>
               <a:t>Event</a:t>
             </a:r>
@@ -9551,8 +9303,6 @@
                   <a:srgbClr val="64707A"/>
                 </a:solidFill>
                 <a:latin typeface="Urbanist"/>
-                <a:ea typeface="Urbanist"/>
-                <a:cs typeface="Urbanist"/>
               </a:rPr>
               <a:t>One line on what happened</a:t>
             </a:r>
@@ -9588,8 +9338,6 @@
                   <a:srgbClr val="64707A"/>
                 </a:solidFill>
                 <a:latin typeface="Poppins SemiBold"/>
-                <a:ea typeface="Poppins SemiBold"/>
-                <a:cs typeface="Poppins SemiBold"/>
               </a:rPr>
               <a:t>Event</a:t>
             </a:r>
@@ -9625,8 +9373,6 @@
                   <a:srgbClr val="64707A"/>
                 </a:solidFill>
                 <a:latin typeface="Urbanist"/>
-                <a:ea typeface="Urbanist"/>
-                <a:cs typeface="Urbanist"/>
               </a:rPr>
               <a:t>One line on what happened</a:t>
             </a:r>
@@ -9726,8 +9472,6 @@
                   <a:srgbClr val="64707A"/>
                 </a:solidFill>
                 <a:latin typeface="League Spartan SemiBold"/>
-                <a:ea typeface="League Spartan SemiBold"/>
-                <a:cs typeface="League Spartan SemiBold"/>
               </a:rPr>
               <a:t>0000</a:t>
             </a:r>
@@ -9795,8 +9539,6 @@
                   <a:srgbClr val="64707A"/>
                 </a:solidFill>
                 <a:latin typeface="League Spartan SemiBold"/>
-                <a:ea typeface="League Spartan SemiBold"/>
-                <a:cs typeface="League Spartan SemiBold"/>
               </a:rPr>
               <a:t>0000</a:t>
             </a:r>
@@ -9864,8 +9606,6 @@
                   <a:srgbClr val="64707A"/>
                 </a:solidFill>
                 <a:latin typeface="League Spartan SemiBold"/>
-                <a:ea typeface="League Spartan SemiBold"/>
-                <a:cs typeface="League Spartan SemiBold"/>
               </a:rPr>
               <a:t>0000</a:t>
             </a:r>
@@ -9933,8 +9673,6 @@
                   <a:srgbClr val="64707A"/>
                 </a:solidFill>
                 <a:latin typeface="League Spartan SemiBold"/>
-                <a:ea typeface="League Spartan SemiBold"/>
-                <a:cs typeface="League Spartan SemiBold"/>
               </a:rPr>
               <a:t>0000</a:t>
             </a:r>
@@ -10002,8 +9740,6 @@
                   <a:srgbClr val="64707A"/>
                 </a:solidFill>
                 <a:latin typeface="League Spartan SemiBold"/>
-                <a:ea typeface="League Spartan SemiBold"/>
-                <a:cs typeface="League Spartan SemiBold"/>
               </a:rPr>
               <a:t>0000</a:t>
             </a:r>
@@ -10039,8 +9775,6 @@
                   <a:srgbClr val="64707A"/>
                 </a:solidFill>
                 <a:latin typeface="Poppins SemiBold"/>
-                <a:ea typeface="Poppins SemiBold"/>
-                <a:cs typeface="Poppins SemiBold"/>
               </a:rPr>
               <a:t>Event</a:t>
             </a:r>
@@ -10076,8 +9810,6 @@
                   <a:srgbClr val="64707A"/>
                 </a:solidFill>
                 <a:latin typeface="Urbanist"/>
-                <a:ea typeface="Urbanist"/>
-                <a:cs typeface="Urbanist"/>
               </a:rPr>
               <a:t>One line on what happened</a:t>
             </a:r>
@@ -10113,8 +9845,6 @@
                   <a:srgbClr val="64707A"/>
                 </a:solidFill>
                 <a:latin typeface="Poppins SemiBold"/>
-                <a:ea typeface="Poppins SemiBold"/>
-                <a:cs typeface="Poppins SemiBold"/>
               </a:rPr>
               <a:t>Event</a:t>
             </a:r>
@@ -10150,8 +9880,6 @@
                   <a:srgbClr val="64707A"/>
                 </a:solidFill>
                 <a:latin typeface="Urbanist"/>
-                <a:ea typeface="Urbanist"/>
-                <a:cs typeface="Urbanist"/>
               </a:rPr>
               <a:t>One line on what happened</a:t>
             </a:r>
@@ -10187,8 +9915,6 @@
                   <a:srgbClr val="64707A"/>
                 </a:solidFill>
                 <a:latin typeface="League Spartan Medium"/>
-                <a:ea typeface="League Spartan Medium"/>
-                <a:cs typeface="League Spartan Medium"/>
               </a:rPr>
               <a:t>11</a:t>
             </a:r>
@@ -10224,8 +9950,6 @@
                   <a:srgbClr val="64707A"/>
                 </a:solidFill>
                 <a:latin typeface="League Spartan"/>
-                <a:ea typeface="League Spartan"/>
-                <a:cs typeface="League Spartan"/>
               </a:rPr>
               <a:t>TIMELINE</a:t>
             </a:r>
@@ -10339,8 +10063,6 @@
                   <a:srgbClr val="FFFFFF"/>
                 </a:solidFill>
                 <a:latin typeface="League Spartan SemiBold"/>
-                <a:ea typeface="League Spartan SemiBold"/>
-                <a:cs typeface="League Spartan SemiBold"/>
               </a:rPr>
               <a:t>12</a:t>
             </a:r>
@@ -10376,8 +10098,6 @@
                   <a:srgbClr val="101A2B"/>
                 </a:solidFill>
                 <a:latin typeface="League Spartan SemiBold"/>
-                <a:ea typeface="League Spartan SemiBold"/>
-                <a:cs typeface="League Spartan SemiBold"/>
               </a:rPr>
               <a:t>SECTION NAME</a:t>
             </a:r>
@@ -10467,8 +10187,6 @@
                   <a:srgbClr val="64707A"/>
                 </a:solidFill>
                 <a:latin typeface="Poppins SemiBold"/>
-                <a:ea typeface="Poppins SemiBold"/>
-                <a:cs typeface="Poppins SemiBold"/>
               </a:rPr>
               <a:t>Page title</a:t>
             </a:r>
@@ -10504,8 +10222,6 @@
                   <a:srgbClr val="64707A"/>
                 </a:solidFill>
                 <a:latin typeface="Urbanist"/>
-                <a:ea typeface="Urbanist"/>
-                <a:cs typeface="Urbanist"/>
               </a:rPr>
               <a:t>One line under it saying what the page is for.</a:t>
             </a:r>
@@ -10627,8 +10343,6 @@
                   <a:srgbClr val="64707A"/>
                 </a:solidFill>
                 <a:latin typeface="League Spartan SemiBold"/>
-                <a:ea typeface="League Spartan SemiBold"/>
-                <a:cs typeface="League Spartan SemiBold"/>
               </a:rPr>
               <a:t>01</a:t>
             </a:r>
@@ -10664,8 +10378,6 @@
                   <a:srgbClr val="64707A"/>
                 </a:solidFill>
                 <a:latin typeface="Poppins SemiBold"/>
-                <a:ea typeface="Poppins SemiBold"/>
-                <a:cs typeface="Poppins SemiBold"/>
               </a:rPr>
               <a:t>Part name</a:t>
             </a:r>
@@ -10701,8 +10413,6 @@
                   <a:srgbClr val="64707A"/>
                 </a:solidFill>
                 <a:latin typeface="Urbanist"/>
-                <a:ea typeface="Urbanist"/>
-                <a:cs typeface="Urbanist"/>
               </a:rPr>
               <a:t>What it covers, four words</a:t>
             </a:r>
@@ -10824,8 +10534,6 @@
                   <a:srgbClr val="64707A"/>
                 </a:solidFill>
                 <a:latin typeface="League Spartan SemiBold"/>
-                <a:ea typeface="League Spartan SemiBold"/>
-                <a:cs typeface="League Spartan SemiBold"/>
               </a:rPr>
               <a:t>02</a:t>
             </a:r>
@@ -10861,8 +10569,6 @@
                   <a:srgbClr val="64707A"/>
                 </a:solidFill>
                 <a:latin typeface="Poppins SemiBold"/>
-                <a:ea typeface="Poppins SemiBold"/>
-                <a:cs typeface="Poppins SemiBold"/>
               </a:rPr>
               <a:t>Part name</a:t>
             </a:r>
@@ -10898,8 +10604,6 @@
                   <a:srgbClr val="64707A"/>
                 </a:solidFill>
                 <a:latin typeface="Urbanist"/>
-                <a:ea typeface="Urbanist"/>
-                <a:cs typeface="Urbanist"/>
               </a:rPr>
               <a:t>What it covers, four words</a:t>
             </a:r>
@@ -11021,8 +10725,6 @@
                   <a:srgbClr val="64707A"/>
                 </a:solidFill>
                 <a:latin typeface="League Spartan SemiBold"/>
-                <a:ea typeface="League Spartan SemiBold"/>
-                <a:cs typeface="League Spartan SemiBold"/>
               </a:rPr>
               <a:t>03</a:t>
             </a:r>
@@ -11058,8 +10760,6 @@
                   <a:srgbClr val="64707A"/>
                 </a:solidFill>
                 <a:latin typeface="Poppins SemiBold"/>
-                <a:ea typeface="Poppins SemiBold"/>
-                <a:cs typeface="Poppins SemiBold"/>
               </a:rPr>
               <a:t>Part name</a:t>
             </a:r>
@@ -11095,8 +10795,6 @@
                   <a:srgbClr val="64707A"/>
                 </a:solidFill>
                 <a:latin typeface="Urbanist"/>
-                <a:ea typeface="Urbanist"/>
-                <a:cs typeface="Urbanist"/>
               </a:rPr>
               <a:t>What it covers, four words</a:t>
             </a:r>
@@ -11162,8 +10860,6 @@
                   <a:srgbClr val="64707A"/>
                 </a:solidFill>
                 <a:latin typeface="League Spartan SemiBold"/>
-                <a:ea typeface="League Spartan SemiBold"/>
-                <a:cs typeface="League Spartan SemiBold"/>
               </a:rPr>
               <a:t>CAPTION OVER THE VISUAL</a:t>
             </a:r>
@@ -11223,8 +10919,6 @@
                   <a:srgbClr val="64707A"/>
                 </a:solidFill>
                 <a:latin typeface="Urbanist"/>
-                <a:ea typeface="Urbanist"/>
-                <a:cs typeface="Urbanist"/>
               </a:rPr>
               <a:t>One sentence under the visual saying what the whole thing adds up to.</a:t>
             </a:r>
@@ -11346,8 +11040,6 @@
                   <a:srgbClr val="64707A"/>
                 </a:solidFill>
                 <a:latin typeface="League Spartan SemiBold"/>
-                <a:ea typeface="League Spartan SemiBold"/>
-                <a:cs typeface="League Spartan SemiBold"/>
               </a:rPr>
               <a:t>04</a:t>
             </a:r>
@@ -11383,8 +11075,6 @@
                   <a:srgbClr val="64707A"/>
                 </a:solidFill>
                 <a:latin typeface="Poppins SemiBold"/>
-                <a:ea typeface="Poppins SemiBold"/>
-                <a:cs typeface="Poppins SemiBold"/>
               </a:rPr>
               <a:t>Part name</a:t>
             </a:r>
@@ -11420,8 +11110,6 @@
                   <a:srgbClr val="64707A"/>
                 </a:solidFill>
                 <a:latin typeface="Urbanist"/>
-                <a:ea typeface="Urbanist"/>
-                <a:cs typeface="Urbanist"/>
               </a:rPr>
               <a:t>What it covers, four words</a:t>
             </a:r>
@@ -11543,8 +11231,6 @@
                   <a:srgbClr val="64707A"/>
                 </a:solidFill>
                 <a:latin typeface="League Spartan SemiBold"/>
-                <a:ea typeface="League Spartan SemiBold"/>
-                <a:cs typeface="League Spartan SemiBold"/>
               </a:rPr>
               <a:t>05</a:t>
             </a:r>
@@ -11580,8 +11266,6 @@
                   <a:srgbClr val="64707A"/>
                 </a:solidFill>
                 <a:latin typeface="Poppins SemiBold"/>
-                <a:ea typeface="Poppins SemiBold"/>
-                <a:cs typeface="Poppins SemiBold"/>
               </a:rPr>
               <a:t>Part name</a:t>
             </a:r>
@@ -11617,8 +11301,6 @@
                   <a:srgbClr val="64707A"/>
                 </a:solidFill>
                 <a:latin typeface="Urbanist"/>
-                <a:ea typeface="Urbanist"/>
-                <a:cs typeface="Urbanist"/>
               </a:rPr>
               <a:t>What it covers, four words</a:t>
             </a:r>
@@ -11740,8 +11422,6 @@
                   <a:srgbClr val="64707A"/>
                 </a:solidFill>
                 <a:latin typeface="League Spartan SemiBold"/>
-                <a:ea typeface="League Spartan SemiBold"/>
-                <a:cs typeface="League Spartan SemiBold"/>
               </a:rPr>
               <a:t>06</a:t>
             </a:r>
@@ -11777,8 +11457,6 @@
                   <a:srgbClr val="64707A"/>
                 </a:solidFill>
                 <a:latin typeface="Poppins SemiBold"/>
-                <a:ea typeface="Poppins SemiBold"/>
-                <a:cs typeface="Poppins SemiBold"/>
               </a:rPr>
               <a:t>Part name</a:t>
             </a:r>
@@ -11814,8 +11492,6 @@
                   <a:srgbClr val="64707A"/>
                 </a:solidFill>
                 <a:latin typeface="Urbanist"/>
-                <a:ea typeface="Urbanist"/>
-                <a:cs typeface="Urbanist"/>
               </a:rPr>
               <a:t>What it covers, four words</a:t>
             </a:r>
@@ -11851,8 +11527,6 @@
                   <a:srgbClr val="64707A"/>
                 </a:solidFill>
                 <a:latin typeface="League Spartan Medium"/>
-                <a:ea typeface="League Spartan Medium"/>
-                <a:cs typeface="League Spartan Medium"/>
               </a:rPr>
               <a:t>12</a:t>
             </a:r>
@@ -11888,8 +11562,6 @@
                   <a:srgbClr val="64707A"/>
                 </a:solidFill>
                 <a:latin typeface="League Spartan"/>
-                <a:ea typeface="League Spartan"/>
-                <a:cs typeface="League Spartan"/>
               </a:rPr>
               <a:t>INFOGRAPHIC</a:t>
             </a:r>
@@ -12003,8 +11675,6 @@
                   <a:srgbClr val="FFFFFF"/>
                 </a:solidFill>
                 <a:latin typeface="League Spartan SemiBold"/>
-                <a:ea typeface="League Spartan SemiBold"/>
-                <a:cs typeface="League Spartan SemiBold"/>
               </a:rPr>
               <a:t>13</a:t>
             </a:r>
@@ -12040,8 +11710,6 @@
                   <a:srgbClr val="101A2B"/>
                 </a:solidFill>
                 <a:latin typeface="League Spartan SemiBold"/>
-                <a:ea typeface="League Spartan SemiBold"/>
-                <a:cs typeface="League Spartan SemiBold"/>
               </a:rPr>
               <a:t>SECTION NAME</a:t>
             </a:r>
@@ -12131,8 +11799,6 @@
                   <a:srgbClr val="64707A"/>
                 </a:solidFill>
                 <a:latin typeface="Poppins SemiBold"/>
-                <a:ea typeface="Poppins SemiBold"/>
-                <a:cs typeface="Poppins SemiBold"/>
               </a:rPr>
               <a:t>Page title</a:t>
             </a:r>
@@ -12168,8 +11834,6 @@
                   <a:srgbClr val="64707A"/>
                 </a:solidFill>
                 <a:latin typeface="Urbanist"/>
-                <a:ea typeface="Urbanist"/>
-                <a:cs typeface="Urbanist"/>
               </a:rPr>
               <a:t>One line under it saying what the page is for.</a:t>
             </a:r>
@@ -12260,8 +11924,6 @@
                   <a:srgbClr val="64707A"/>
                 </a:solidFill>
                 <a:latin typeface="League Spartan SemiBold"/>
-                <a:ea typeface="League Spartan SemiBold"/>
-                <a:cs typeface="League Spartan SemiBold"/>
               </a:rPr>
               <a:t>LOCATION · WHAT KIND OF FACILITY</a:t>
             </a:r>
@@ -12297,8 +11959,6 @@
                   <a:srgbClr val="64707A"/>
                 </a:solidFill>
                 <a:latin typeface="Poppins SemiBold"/>
-                <a:ea typeface="Poppins SemiBold"/>
-                <a:cs typeface="Poppins SemiBold"/>
               </a:rPr>
               <a:t>Project or product name</a:t>
             </a:r>
@@ -12364,8 +12024,6 @@
                   <a:srgbClr val="64707A"/>
                 </a:solidFill>
                 <a:latin typeface="League Spartan SemiBold"/>
-                <a:ea typeface="League Spartan SemiBold"/>
-                <a:cs typeface="League Spartan SemiBold"/>
               </a:rPr>
               <a:t>SERVICE LINE</a:t>
             </a:r>
@@ -12431,8 +12089,6 @@
                   <a:srgbClr val="64707A"/>
                 </a:solidFill>
                 <a:latin typeface="League Spartan SemiBold"/>
-                <a:ea typeface="League Spartan SemiBold"/>
-                <a:cs typeface="League Spartan SemiBold"/>
               </a:rPr>
               <a:t>SERVICE LINE</a:t>
             </a:r>
@@ -12498,8 +12154,6 @@
                   <a:srgbClr val="64707A"/>
                 </a:solidFill>
                 <a:latin typeface="League Spartan SemiBold"/>
-                <a:ea typeface="League Spartan SemiBold"/>
-                <a:cs typeface="League Spartan SemiBold"/>
               </a:rPr>
               <a:t>SERVICE LINE</a:t>
             </a:r>
@@ -12535,8 +12189,6 @@
                   <a:srgbClr val="64707A"/>
                 </a:solidFill>
                 <a:latin typeface="League Spartan SemiBold"/>
-                <a:ea typeface="League Spartan SemiBold"/>
-                <a:cs typeface="League Spartan SemiBold"/>
               </a:rPr>
               <a:t>DESCRIPTION</a:t>
             </a:r>
@@ -12572,8 +12224,6 @@
                   <a:srgbClr val="64707A"/>
                 </a:solidFill>
                 <a:latin typeface="Urbanist"/>
-                <a:ea typeface="Urbanist"/>
-                <a:cs typeface="Urbanist"/>
               </a:rPr>
               <a:t>One sentence on what the job was</a:t>
             </a:r>
@@ -12609,8 +12259,6 @@
                   <a:srgbClr val="64707A"/>
                 </a:solidFill>
                 <a:latin typeface="League Spartan SemiBold"/>
-                <a:ea typeface="League Spartan SemiBold"/>
-                <a:cs typeface="League Spartan SemiBold"/>
               </a:rPr>
               <a:t>SCOPE</a:t>
             </a:r>
@@ -12646,8 +12294,6 @@
                   <a:srgbClr val="64707A"/>
                 </a:solidFill>
                 <a:latin typeface="Urbanist"/>
-                <a:ea typeface="Urbanist"/>
-                <a:cs typeface="Urbanist"/>
               </a:rPr>
               <a:t>What was in the contract</a:t>
             </a:r>
@@ -12683,8 +12329,6 @@
                   <a:srgbClr val="64707A"/>
                 </a:solidFill>
                 <a:latin typeface="League Spartan SemiBold"/>
-                <a:ea typeface="League Spartan SemiBold"/>
-                <a:cs typeface="League Spartan SemiBold"/>
               </a:rPr>
               <a:t>CLEANROOM</a:t>
             </a:r>
@@ -12720,8 +12364,6 @@
                   <a:srgbClr val="64707A"/>
                 </a:solidFill>
                 <a:latin typeface="Urbanist"/>
-                <a:ea typeface="Urbanist"/>
-                <a:cs typeface="Urbanist"/>
               </a:rPr>
               <a:t>Class or grade, if it applies</a:t>
             </a:r>
@@ -12757,8 +12399,6 @@
                   <a:srgbClr val="64707A"/>
                 </a:solidFill>
                 <a:latin typeface="League Spartan SemiBold"/>
-                <a:ea typeface="League Spartan SemiBold"/>
-                <a:cs typeface="League Spartan SemiBold"/>
               </a:rPr>
               <a:t>COMPLETED</a:t>
             </a:r>
@@ -12794,8 +12434,6 @@
                   <a:srgbClr val="64707A"/>
                 </a:solidFill>
                 <a:latin typeface="Urbanist"/>
-                <a:ea typeface="Urbanist"/>
-                <a:cs typeface="Urbanist"/>
               </a:rPr>
               <a:t>Year</a:t>
             </a:r>
@@ -12831,8 +12469,6 @@
                   <a:srgbClr val="64707A"/>
                 </a:solidFill>
                 <a:latin typeface="League Spartan Medium"/>
-                <a:ea typeface="League Spartan Medium"/>
-                <a:cs typeface="League Spartan Medium"/>
               </a:rPr>
               <a:t>13</a:t>
             </a:r>
@@ -12868,8 +12504,6 @@
                   <a:srgbClr val="64707A"/>
                 </a:solidFill>
                 <a:latin typeface="League Spartan"/>
-                <a:ea typeface="League Spartan"/>
-                <a:cs typeface="League Spartan"/>
               </a:rPr>
               <a:t>IMAGE AND SPECS</a:t>
             </a:r>
@@ -12983,8 +12617,6 @@
                   <a:srgbClr val="FFFFFF"/>
                 </a:solidFill>
                 <a:latin typeface="League Spartan SemiBold"/>
-                <a:ea typeface="League Spartan SemiBold"/>
-                <a:cs typeface="League Spartan SemiBold"/>
               </a:rPr>
               <a:t>14</a:t>
             </a:r>
@@ -13020,8 +12652,6 @@
                   <a:srgbClr val="101A2B"/>
                 </a:solidFill>
                 <a:latin typeface="League Spartan SemiBold"/>
-                <a:ea typeface="League Spartan SemiBold"/>
-                <a:cs typeface="League Spartan SemiBold"/>
               </a:rPr>
               <a:t>SECTION NAME</a:t>
             </a:r>
@@ -13111,8 +12741,6 @@
                   <a:srgbClr val="64707A"/>
                 </a:solidFill>
                 <a:latin typeface="Poppins SemiBold"/>
-                <a:ea typeface="Poppins SemiBold"/>
-                <a:cs typeface="Poppins SemiBold"/>
               </a:rPr>
               <a:t>Page title</a:t>
             </a:r>
@@ -13148,8 +12776,6 @@
                   <a:srgbClr val="64707A"/>
                 </a:solidFill>
                 <a:latin typeface="Urbanist"/>
-                <a:ea typeface="Urbanist"/>
-                <a:cs typeface="Urbanist"/>
               </a:rPr>
               <a:t>One line under it saying what the page is for.</a:t>
             </a:r>
@@ -13185,8 +12811,6 @@
                   <a:srgbClr val="64707A"/>
                 </a:solidFill>
                 <a:latin typeface="League Spartan SemiBold"/>
-                <a:ea typeface="League Spartan SemiBold"/>
-                <a:cs typeface="League Spartan SemiBold"/>
               </a:rPr>
               <a:t>PERIOD</a:t>
             </a:r>
@@ -13222,8 +12846,6 @@
                   <a:srgbClr val="64707A"/>
                 </a:solidFill>
                 <a:latin typeface="League Spartan SemiBold"/>
-                <a:ea typeface="League Spartan SemiBold"/>
-                <a:cs typeface="League Spartan SemiBold"/>
               </a:rPr>
               <a:t>PERIOD</a:t>
             </a:r>
@@ -13259,8 +12881,6 @@
                   <a:srgbClr val="64707A"/>
                 </a:solidFill>
                 <a:latin typeface="League Spartan SemiBold"/>
-                <a:ea typeface="League Spartan SemiBold"/>
-                <a:cs typeface="League Spartan SemiBold"/>
               </a:rPr>
               <a:t>PERIOD</a:t>
             </a:r>
@@ -13296,8 +12916,6 @@
                   <a:srgbClr val="64707A"/>
                 </a:solidFill>
                 <a:latin typeface="League Spartan SemiBold"/>
-                <a:ea typeface="League Spartan SemiBold"/>
-                <a:cs typeface="League Spartan SemiBold"/>
               </a:rPr>
               <a:t>PERIOD</a:t>
             </a:r>
@@ -13333,8 +12951,6 @@
                   <a:srgbClr val="64707A"/>
                 </a:solidFill>
                 <a:latin typeface="League Spartan SemiBold"/>
-                <a:ea typeface="League Spartan SemiBold"/>
-                <a:cs typeface="League Spartan SemiBold"/>
               </a:rPr>
               <a:t>PERIOD</a:t>
             </a:r>
@@ -13370,8 +12986,6 @@
                   <a:srgbClr val="64707A"/>
                 </a:solidFill>
                 <a:latin typeface="League Spartan SemiBold"/>
-                <a:ea typeface="League Spartan SemiBold"/>
-                <a:cs typeface="League Spartan SemiBold"/>
               </a:rPr>
               <a:t>PERIOD</a:t>
             </a:r>
@@ -13407,8 +13021,6 @@
                   <a:srgbClr val="101A2B"/>
                 </a:solidFill>
                 <a:latin typeface="Urbanist SemiBold"/>
-                <a:ea typeface="Urbanist SemiBold"/>
-                <a:cs typeface="Urbanist SemiBold"/>
               </a:rPr>
               <a:t>Work package</a:t>
             </a:r>
@@ -13444,8 +13056,6 @@
                   <a:srgbClr val="64707A"/>
                 </a:solidFill>
                 <a:latin typeface="Urbanist"/>
-                <a:ea typeface="Urbanist"/>
-                <a:cs typeface="Urbanist"/>
               </a:rPr>
               <a:t>What is in it</a:t>
             </a:r>
@@ -13541,8 +13151,6 @@
                   <a:srgbClr val="FFFFFF"/>
                 </a:solidFill>
                 <a:latin typeface="League Spartan SemiBold"/>
-                <a:ea typeface="League Spartan SemiBold"/>
-                <a:cs typeface="League Spartan SemiBold"/>
               </a:rPr>
               <a:t>Milestone</a:t>
             </a:r>
@@ -13578,8 +13186,6 @@
                   <a:srgbClr val="101A2B"/>
                 </a:solidFill>
                 <a:latin typeface="Urbanist SemiBold"/>
-                <a:ea typeface="Urbanist SemiBold"/>
-                <a:cs typeface="Urbanist SemiBold"/>
               </a:rPr>
               <a:t>Work package</a:t>
             </a:r>
@@ -13615,8 +13221,6 @@
                   <a:srgbClr val="64707A"/>
                 </a:solidFill>
                 <a:latin typeface="Urbanist"/>
-                <a:ea typeface="Urbanist"/>
-                <a:cs typeface="Urbanist"/>
               </a:rPr>
               <a:t>What is in it</a:t>
             </a:r>
@@ -13714,8 +13318,6 @@
                   <a:srgbClr val="101A2B"/>
                 </a:solidFill>
                 <a:latin typeface="Urbanist SemiBold"/>
-                <a:ea typeface="Urbanist SemiBold"/>
-                <a:cs typeface="Urbanist SemiBold"/>
               </a:rPr>
               <a:t>Work package</a:t>
             </a:r>
@@ -13751,8 +13353,6 @@
                   <a:srgbClr val="64707A"/>
                 </a:solidFill>
                 <a:latin typeface="Urbanist"/>
-                <a:ea typeface="Urbanist"/>
-                <a:cs typeface="Urbanist"/>
               </a:rPr>
               <a:t>What is in it</a:t>
             </a:r>
@@ -13848,8 +13448,6 @@
                   <a:srgbClr val="101A2B"/>
                 </a:solidFill>
                 <a:latin typeface="Urbanist SemiBold"/>
-                <a:ea typeface="Urbanist SemiBold"/>
-                <a:cs typeface="Urbanist SemiBold"/>
               </a:rPr>
               <a:t>Work package</a:t>
             </a:r>
@@ -13885,8 +13483,6 @@
                   <a:srgbClr val="64707A"/>
                 </a:solidFill>
                 <a:latin typeface="Urbanist"/>
-                <a:ea typeface="Urbanist"/>
-                <a:cs typeface="Urbanist"/>
               </a:rPr>
               <a:t>What is in it</a:t>
             </a:r>
@@ -13982,8 +13578,6 @@
                   <a:srgbClr val="101A2B"/>
                 </a:solidFill>
                 <a:latin typeface="Urbanist SemiBold"/>
-                <a:ea typeface="Urbanist SemiBold"/>
-                <a:cs typeface="Urbanist SemiBold"/>
               </a:rPr>
               <a:t>Work package</a:t>
             </a:r>
@@ -14019,8 +13613,6 @@
                   <a:srgbClr val="64707A"/>
                 </a:solidFill>
                 <a:latin typeface="Urbanist"/>
-                <a:ea typeface="Urbanist"/>
-                <a:cs typeface="Urbanist"/>
               </a:rPr>
               <a:t>What is in it</a:t>
             </a:r>
@@ -14116,8 +13708,6 @@
                   <a:srgbClr val="101A2B"/>
                 </a:solidFill>
                 <a:latin typeface="Urbanist SemiBold"/>
-                <a:ea typeface="Urbanist SemiBold"/>
-                <a:cs typeface="Urbanist SemiBold"/>
               </a:rPr>
               <a:t>Work package</a:t>
             </a:r>
@@ -14153,8 +13743,6 @@
                   <a:srgbClr val="64707A"/>
                 </a:solidFill>
                 <a:latin typeface="Urbanist"/>
-                <a:ea typeface="Urbanist"/>
-                <a:cs typeface="Urbanist"/>
               </a:rPr>
               <a:t>What is in it</a:t>
             </a:r>
@@ -14250,8 +13838,6 @@
                   <a:srgbClr val="FFFFFF"/>
                 </a:solidFill>
                 <a:latin typeface="League Spartan SemiBold"/>
-                <a:ea typeface="League Spartan SemiBold"/>
-                <a:cs typeface="League Spartan SemiBold"/>
               </a:rPr>
               <a:t>Milestone</a:t>
             </a:r>
@@ -14287,8 +13873,6 @@
                   <a:srgbClr val="64707A"/>
                 </a:solidFill>
                 <a:latin typeface="League Spartan Medium"/>
-                <a:ea typeface="League Spartan Medium"/>
-                <a:cs typeface="League Spartan Medium"/>
               </a:rPr>
               <a:t>14</a:t>
             </a:r>
@@ -14324,8 +13908,6 @@
                   <a:srgbClr val="64707A"/>
                 </a:solidFill>
                 <a:latin typeface="League Spartan"/>
-                <a:ea typeface="League Spartan"/>
-                <a:cs typeface="League Spartan"/>
               </a:rPr>
               <a:t>PROGRAMME</a:t>
             </a:r>
@@ -14439,8 +14021,6 @@
                   <a:srgbClr val="FFFFFF"/>
                 </a:solidFill>
                 <a:latin typeface="League Spartan SemiBold"/>
-                <a:ea typeface="League Spartan SemiBold"/>
-                <a:cs typeface="League Spartan SemiBold"/>
               </a:rPr>
               <a:t>15</a:t>
             </a:r>
@@ -14476,8 +14056,6 @@
                   <a:srgbClr val="101A2B"/>
                 </a:solidFill>
                 <a:latin typeface="League Spartan SemiBold"/>
-                <a:ea typeface="League Spartan SemiBold"/>
-                <a:cs typeface="League Spartan SemiBold"/>
               </a:rPr>
               <a:t>SECTION NAME</a:t>
             </a:r>
@@ -14567,8 +14145,6 @@
                   <a:srgbClr val="64707A"/>
                 </a:solidFill>
                 <a:latin typeface="Poppins SemiBold"/>
-                <a:ea typeface="Poppins SemiBold"/>
-                <a:cs typeface="Poppins SemiBold"/>
               </a:rPr>
               <a:t>Page title</a:t>
             </a:r>
@@ -14604,8 +14180,6 @@
                   <a:srgbClr val="64707A"/>
                 </a:solidFill>
                 <a:latin typeface="Urbanist"/>
-                <a:ea typeface="Urbanist"/>
-                <a:cs typeface="Urbanist"/>
               </a:rPr>
               <a:t>One line under it saying what the page is for.</a:t>
             </a:r>
@@ -14671,8 +14245,6 @@
                   <a:srgbClr val="FFFFFF"/>
                 </a:solidFill>
                 <a:latin typeface="League Spartan SemiBold"/>
-                <a:ea typeface="League Spartan SemiBold"/>
-                <a:cs typeface="League Spartan SemiBold"/>
               </a:rPr>
               <a:t>COLUMN</a:t>
             </a:r>
@@ -14738,8 +14310,6 @@
                   <a:srgbClr val="FFFFFF"/>
                 </a:solidFill>
                 <a:latin typeface="League Spartan SemiBold"/>
-                <a:ea typeface="League Spartan SemiBold"/>
-                <a:cs typeface="League Spartan SemiBold"/>
               </a:rPr>
               <a:t>COLUMN</a:t>
             </a:r>
@@ -14805,8 +14375,6 @@
                   <a:srgbClr val="FFFFFF"/>
                 </a:solidFill>
                 <a:latin typeface="League Spartan SemiBold"/>
-                <a:ea typeface="League Spartan SemiBold"/>
-                <a:cs typeface="League Spartan SemiBold"/>
               </a:rPr>
               <a:t>COLUMN</a:t>
             </a:r>
@@ -14872,8 +14440,6 @@
                   <a:srgbClr val="FFFFFF"/>
                 </a:solidFill>
                 <a:latin typeface="League Spartan SemiBold"/>
-                <a:ea typeface="League Spartan SemiBold"/>
-                <a:cs typeface="League Spartan SemiBold"/>
               </a:rPr>
               <a:t>COLUMN</a:t>
             </a:r>
@@ -14939,8 +14505,6 @@
                   <a:srgbClr val="FFFFFF"/>
                 </a:solidFill>
                 <a:latin typeface="League Spartan SemiBold"/>
-                <a:ea typeface="League Spartan SemiBold"/>
-                <a:cs typeface="League Spartan SemiBold"/>
               </a:rPr>
               <a:t>COLUMN</a:t>
             </a:r>
@@ -15006,8 +14570,6 @@
                   <a:srgbClr val="64707A"/>
                 </a:solidFill>
                 <a:latin typeface="Urbanist SemiBold"/>
-                <a:ea typeface="Urbanist SemiBold"/>
-                <a:cs typeface="Urbanist SemiBold"/>
               </a:rPr>
               <a:t>Row label</a:t>
             </a:r>
@@ -15073,8 +14635,6 @@
                   <a:srgbClr val="64707A"/>
                 </a:solidFill>
                 <a:latin typeface="Urbanist"/>
-                <a:ea typeface="Urbanist"/>
-                <a:cs typeface="Urbanist"/>
               </a:rPr>
               <a:t>Value</a:t>
             </a:r>
@@ -15140,8 +14700,6 @@
                   <a:srgbClr val="64707A"/>
                 </a:solidFill>
                 <a:latin typeface="Urbanist"/>
-                <a:ea typeface="Urbanist"/>
-                <a:cs typeface="Urbanist"/>
               </a:rPr>
               <a:t>Value</a:t>
             </a:r>
@@ -15207,8 +14765,6 @@
                   <a:srgbClr val="64707A"/>
                 </a:solidFill>
                 <a:latin typeface="Urbanist"/>
-                <a:ea typeface="Urbanist"/>
-                <a:cs typeface="Urbanist"/>
               </a:rPr>
               <a:t>Value</a:t>
             </a:r>
@@ -15274,8 +14830,6 @@
                   <a:srgbClr val="64707A"/>
                 </a:solidFill>
                 <a:latin typeface="Urbanist SemiBold"/>
-                <a:ea typeface="Urbanist SemiBold"/>
-                <a:cs typeface="Urbanist SemiBold"/>
               </a:rPr>
               <a:t>Called out</a:t>
             </a:r>
@@ -15341,8 +14895,6 @@
                   <a:srgbClr val="64707A"/>
                 </a:solidFill>
                 <a:latin typeface="Urbanist SemiBold"/>
-                <a:ea typeface="Urbanist SemiBold"/>
-                <a:cs typeface="Urbanist SemiBold"/>
               </a:rPr>
               <a:t>Row label</a:t>
             </a:r>
@@ -15408,8 +14960,6 @@
                   <a:srgbClr val="64707A"/>
                 </a:solidFill>
                 <a:latin typeface="Urbanist"/>
-                <a:ea typeface="Urbanist"/>
-                <a:cs typeface="Urbanist"/>
               </a:rPr>
               <a:t>Value</a:t>
             </a:r>
@@ -15475,8 +15025,6 @@
                   <a:srgbClr val="64707A"/>
                 </a:solidFill>
                 <a:latin typeface="Urbanist"/>
-                <a:ea typeface="Urbanist"/>
-                <a:cs typeface="Urbanist"/>
               </a:rPr>
               <a:t>Value</a:t>
             </a:r>
@@ -15542,8 +15090,6 @@
                   <a:srgbClr val="64707A"/>
                 </a:solidFill>
                 <a:latin typeface="Urbanist"/>
-                <a:ea typeface="Urbanist"/>
-                <a:cs typeface="Urbanist"/>
               </a:rPr>
               <a:t>Value</a:t>
             </a:r>
@@ -15609,8 +15155,6 @@
                   <a:srgbClr val="64707A"/>
                 </a:solidFill>
                 <a:latin typeface="Urbanist SemiBold"/>
-                <a:ea typeface="Urbanist SemiBold"/>
-                <a:cs typeface="Urbanist SemiBold"/>
               </a:rPr>
               <a:t>Called out</a:t>
             </a:r>
@@ -15676,8 +15220,6 @@
                   <a:srgbClr val="64707A"/>
                 </a:solidFill>
                 <a:latin typeface="Urbanist SemiBold"/>
-                <a:ea typeface="Urbanist SemiBold"/>
-                <a:cs typeface="Urbanist SemiBold"/>
               </a:rPr>
               <a:t>Row label</a:t>
             </a:r>
@@ -15743,8 +15285,6 @@
                   <a:srgbClr val="64707A"/>
                 </a:solidFill>
                 <a:latin typeface="Urbanist"/>
-                <a:ea typeface="Urbanist"/>
-                <a:cs typeface="Urbanist"/>
               </a:rPr>
               <a:t>Value</a:t>
             </a:r>
@@ -15810,8 +15350,6 @@
                   <a:srgbClr val="64707A"/>
                 </a:solidFill>
                 <a:latin typeface="Urbanist"/>
-                <a:ea typeface="Urbanist"/>
-                <a:cs typeface="Urbanist"/>
               </a:rPr>
               <a:t>Value</a:t>
             </a:r>
@@ -15877,8 +15415,6 @@
                   <a:srgbClr val="64707A"/>
                 </a:solidFill>
                 <a:latin typeface="Urbanist"/>
-                <a:ea typeface="Urbanist"/>
-                <a:cs typeface="Urbanist"/>
               </a:rPr>
               <a:t>Value</a:t>
             </a:r>
@@ -15944,8 +15480,6 @@
                   <a:srgbClr val="64707A"/>
                 </a:solidFill>
                 <a:latin typeface="Urbanist SemiBold"/>
-                <a:ea typeface="Urbanist SemiBold"/>
-                <a:cs typeface="Urbanist SemiBold"/>
               </a:rPr>
               <a:t>Called out</a:t>
             </a:r>
@@ -16011,8 +15545,6 @@
                   <a:srgbClr val="64707A"/>
                 </a:solidFill>
                 <a:latin typeface="Urbanist SemiBold"/>
-                <a:ea typeface="Urbanist SemiBold"/>
-                <a:cs typeface="Urbanist SemiBold"/>
               </a:rPr>
               <a:t>Row label</a:t>
             </a:r>
@@ -16078,8 +15610,6 @@
                   <a:srgbClr val="64707A"/>
                 </a:solidFill>
                 <a:latin typeface="Urbanist"/>
-                <a:ea typeface="Urbanist"/>
-                <a:cs typeface="Urbanist"/>
               </a:rPr>
               <a:t>Value</a:t>
             </a:r>
@@ -16145,8 +15675,6 @@
                   <a:srgbClr val="64707A"/>
                 </a:solidFill>
                 <a:latin typeface="Urbanist"/>
-                <a:ea typeface="Urbanist"/>
-                <a:cs typeface="Urbanist"/>
               </a:rPr>
               <a:t>Value</a:t>
             </a:r>
@@ -16212,8 +15740,6 @@
                   <a:srgbClr val="64707A"/>
                 </a:solidFill>
                 <a:latin typeface="Urbanist"/>
-                <a:ea typeface="Urbanist"/>
-                <a:cs typeface="Urbanist"/>
               </a:rPr>
               <a:t>Value</a:t>
             </a:r>
@@ -16279,8 +15805,6 @@
                   <a:srgbClr val="64707A"/>
                 </a:solidFill>
                 <a:latin typeface="Urbanist SemiBold"/>
-                <a:ea typeface="Urbanist SemiBold"/>
-                <a:cs typeface="Urbanist SemiBold"/>
               </a:rPr>
               <a:t>Called out</a:t>
             </a:r>
@@ -16346,8 +15870,6 @@
                   <a:srgbClr val="64707A"/>
                 </a:solidFill>
                 <a:latin typeface="Urbanist SemiBold"/>
-                <a:ea typeface="Urbanist SemiBold"/>
-                <a:cs typeface="Urbanist SemiBold"/>
               </a:rPr>
               <a:t>Row label</a:t>
             </a:r>
@@ -16413,8 +15935,6 @@
                   <a:srgbClr val="64707A"/>
                 </a:solidFill>
                 <a:latin typeface="Urbanist"/>
-                <a:ea typeface="Urbanist"/>
-                <a:cs typeface="Urbanist"/>
               </a:rPr>
               <a:t>Value</a:t>
             </a:r>
@@ -16480,8 +16000,6 @@
                   <a:srgbClr val="64707A"/>
                 </a:solidFill>
                 <a:latin typeface="Urbanist"/>
-                <a:ea typeface="Urbanist"/>
-                <a:cs typeface="Urbanist"/>
               </a:rPr>
               <a:t>Value</a:t>
             </a:r>
@@ -16547,8 +16065,6 @@
                   <a:srgbClr val="64707A"/>
                 </a:solidFill>
                 <a:latin typeface="Urbanist"/>
-                <a:ea typeface="Urbanist"/>
-                <a:cs typeface="Urbanist"/>
               </a:rPr>
               <a:t>Value</a:t>
             </a:r>
@@ -16614,8 +16130,6 @@
                   <a:srgbClr val="64707A"/>
                 </a:solidFill>
                 <a:latin typeface="Urbanist SemiBold"/>
-                <a:ea typeface="Urbanist SemiBold"/>
-                <a:cs typeface="Urbanist SemiBold"/>
               </a:rPr>
               <a:t>Called out</a:t>
             </a:r>
@@ -16681,8 +16195,6 @@
                   <a:srgbClr val="64707A"/>
                 </a:solidFill>
                 <a:latin typeface="Urbanist SemiBold"/>
-                <a:ea typeface="Urbanist SemiBold"/>
-                <a:cs typeface="Urbanist SemiBold"/>
               </a:rPr>
               <a:t>Row label</a:t>
             </a:r>
@@ -16748,8 +16260,6 @@
                   <a:srgbClr val="64707A"/>
                 </a:solidFill>
                 <a:latin typeface="Urbanist"/>
-                <a:ea typeface="Urbanist"/>
-                <a:cs typeface="Urbanist"/>
               </a:rPr>
               <a:t>Value</a:t>
             </a:r>
@@ -16815,8 +16325,6 @@
                   <a:srgbClr val="64707A"/>
                 </a:solidFill>
                 <a:latin typeface="Urbanist"/>
-                <a:ea typeface="Urbanist"/>
-                <a:cs typeface="Urbanist"/>
               </a:rPr>
               <a:t>Value</a:t>
             </a:r>
@@ -16882,8 +16390,6 @@
                   <a:srgbClr val="64707A"/>
                 </a:solidFill>
                 <a:latin typeface="Urbanist"/>
-                <a:ea typeface="Urbanist"/>
-                <a:cs typeface="Urbanist"/>
               </a:rPr>
               <a:t>Value</a:t>
             </a:r>
@@ -16949,8 +16455,6 @@
                   <a:srgbClr val="64707A"/>
                 </a:solidFill>
                 <a:latin typeface="Urbanist SemiBold"/>
-                <a:ea typeface="Urbanist SemiBold"/>
-                <a:cs typeface="Urbanist SemiBold"/>
               </a:rPr>
               <a:t>Called out</a:t>
             </a:r>
@@ -16986,8 +16490,6 @@
                   <a:srgbClr val="64707A"/>
                 </a:solidFill>
                 <a:latin typeface="League Spartan Medium"/>
-                <a:ea typeface="League Spartan Medium"/>
-                <a:cs typeface="League Spartan Medium"/>
               </a:rPr>
               <a:t>15</a:t>
             </a:r>
@@ -17023,8 +16525,6 @@
                   <a:srgbClr val="64707A"/>
                 </a:solidFill>
                 <a:latin typeface="League Spartan"/>
-                <a:ea typeface="League Spartan"/>
-                <a:cs typeface="League Spartan"/>
               </a:rPr>
               <a:t>TABLE</a:t>
             </a:r>
@@ -17258,8 +16758,6 @@
                   <a:srgbClr val="FFFFFF"/>
                 </a:solidFill>
                 <a:latin typeface="League Spartan SemiBold"/>
-                <a:ea typeface="League Spartan SemiBold"/>
-                <a:cs typeface="League Spartan SemiBold"/>
               </a:rPr>
               <a:t>16</a:t>
             </a:r>
@@ -17295,8 +16793,6 @@
                   <a:srgbClr val="E7EBF0"/>
                 </a:solidFill>
                 <a:latin typeface="League Spartan SemiBold"/>
-                <a:ea typeface="League Spartan SemiBold"/>
-                <a:cs typeface="League Spartan SemiBold"/>
               </a:rPr>
               <a:t>IAQ TECHNOLOGY INTERNATIONAL SDN BHD</a:t>
             </a:r>
@@ -17415,8 +16911,6 @@
                   <a:srgbClr val="FFFFFF"/>
                 </a:solidFill>
                 <a:latin typeface="Poppins SemiBold"/>
-                <a:ea typeface="Poppins SemiBold"/>
-                <a:cs typeface="Poppins SemiBold"/>
               </a:rPr>
               <a:t>One line over the photograph.</a:t>
             </a:r>
@@ -17452,8 +16946,6 @@
                   <a:srgbClr val="E7EBF0"/>
                 </a:solidFill>
                 <a:latin typeface="Urbanist"/>
-                <a:ea typeface="Urbanist"/>
-                <a:cs typeface="Urbanist"/>
               </a:rPr>
               <a:t>A sentence under it, if the line needs support. Otherwise leave it out.</a:t>
             </a:r>
@@ -17489,8 +16981,6 @@
                   <a:srgbClr val="96A2B2"/>
                 </a:solidFill>
                 <a:latin typeface="League Spartan Medium"/>
-                <a:ea typeface="League Spartan Medium"/>
-                <a:cs typeface="League Spartan Medium"/>
               </a:rPr>
               <a:t>16</a:t>
             </a:r>
@@ -17526,8 +17016,6 @@
                   <a:srgbClr val="96A2B2"/>
                 </a:solidFill>
                 <a:latin typeface="League Spartan"/>
-                <a:ea typeface="League Spartan"/>
-                <a:cs typeface="League Spartan"/>
               </a:rPr>
               <a:t>FULL-BLEED IMAGE</a:t>
             </a:r>
@@ -17761,8 +17249,6 @@
                   <a:srgbClr val="FFFFFF"/>
                 </a:solidFill>
                 <a:latin typeface="League Spartan SemiBold"/>
-                <a:ea typeface="League Spartan SemiBold"/>
-                <a:cs typeface="League Spartan SemiBold"/>
               </a:rPr>
               <a:t>17</a:t>
             </a:r>
@@ -17798,8 +17284,6 @@
                   <a:srgbClr val="E7EBF0"/>
                 </a:solidFill>
                 <a:latin typeface="League Spartan SemiBold"/>
-                <a:ea typeface="League Spartan SemiBold"/>
-                <a:cs typeface="League Spartan SemiBold"/>
               </a:rPr>
               <a:t>IAQ TECHNOLOGY INTERNATIONAL SDN BHD</a:t>
             </a:r>
@@ -17859,8 +17343,6 @@
                   <a:srgbClr val="FFFFFF"/>
                 </a:solidFill>
                 <a:latin typeface="Poppins SemiBold"/>
-                <a:ea typeface="Poppins SemiBold"/>
-                <a:cs typeface="Poppins SemiBold"/>
               </a:rPr>
               <a:t>The closing line, six words or fewer.</a:t>
             </a:r>
@@ -17896,8 +17378,6 @@
                   <a:srgbClr val="64707A"/>
                 </a:solidFill>
                 <a:latin typeface="Urbanist"/>
-                <a:ea typeface="Urbanist"/>
-                <a:cs typeface="Urbanist"/>
               </a:rPr>
               <a:t>A sentence saying what you want to happen next.</a:t>
             </a:r>
@@ -17933,8 +17413,6 @@
                   <a:srgbClr val="96A2B2"/>
                 </a:solidFill>
                 <a:latin typeface="League Spartan SemiBold"/>
-                <a:ea typeface="League Spartan SemiBold"/>
-                <a:cs typeface="League Spartan SemiBold"/>
               </a:rPr>
               <a:t>LABEL</a:t>
             </a:r>
@@ -17970,8 +17448,6 @@
                   <a:srgbClr val="E7EBF0"/>
                 </a:solidFill>
                 <a:latin typeface="Urbanist"/>
-                <a:ea typeface="Urbanist"/>
-                <a:cs typeface="Urbanist"/>
               </a:rPr>
               <a:t>The detail</a:t>
             </a:r>
@@ -18007,8 +17483,6 @@
                   <a:srgbClr val="96A2B2"/>
                 </a:solidFill>
                 <a:latin typeface="League Spartan SemiBold"/>
-                <a:ea typeface="League Spartan SemiBold"/>
-                <a:cs typeface="League Spartan SemiBold"/>
               </a:rPr>
               <a:t>LABEL</a:t>
             </a:r>
@@ -18044,8 +17518,6 @@
                   <a:srgbClr val="E7EBF0"/>
                 </a:solidFill>
                 <a:latin typeface="Urbanist"/>
-                <a:ea typeface="Urbanist"/>
-                <a:cs typeface="Urbanist"/>
               </a:rPr>
               <a:t>The detail</a:t>
             </a:r>
@@ -18081,8 +17553,6 @@
                   <a:srgbClr val="96A2B2"/>
                 </a:solidFill>
                 <a:latin typeface="League Spartan SemiBold"/>
-                <a:ea typeface="League Spartan SemiBold"/>
-                <a:cs typeface="League Spartan SemiBold"/>
               </a:rPr>
               <a:t>LABEL</a:t>
             </a:r>
@@ -18118,8 +17588,6 @@
                   <a:srgbClr val="E7EBF0"/>
                 </a:solidFill>
                 <a:latin typeface="Urbanist"/>
-                <a:ea typeface="Urbanist"/>
-                <a:cs typeface="Urbanist"/>
               </a:rPr>
               <a:t>The detail</a:t>
             </a:r>
@@ -18155,8 +17623,6 @@
                   <a:srgbClr val="96A2B2"/>
                 </a:solidFill>
                 <a:latin typeface="League Spartan SemiBold"/>
-                <a:ea typeface="League Spartan SemiBold"/>
-                <a:cs typeface="League Spartan SemiBold"/>
               </a:rPr>
               <a:t>LABEL</a:t>
             </a:r>
@@ -18192,8 +17658,6 @@
                   <a:srgbClr val="E7EBF0"/>
                 </a:solidFill>
                 <a:latin typeface="Urbanist"/>
-                <a:ea typeface="Urbanist"/>
-                <a:cs typeface="Urbanist"/>
               </a:rPr>
               <a:t>The detail</a:t>
             </a:r>
@@ -18229,8 +17693,6 @@
                   <a:srgbClr val="96A2B2"/>
                 </a:solidFill>
                 <a:latin typeface="League Spartan Medium"/>
-                <a:ea typeface="League Spartan Medium"/>
-                <a:cs typeface="League Spartan Medium"/>
               </a:rPr>
               <a:t>17</a:t>
             </a:r>
@@ -18266,8 +17728,6 @@
                   <a:srgbClr val="96A2B2"/>
                 </a:solidFill>
                 <a:latin typeface="League Spartan"/>
-                <a:ea typeface="League Spartan"/>
-                <a:cs typeface="League Spartan"/>
               </a:rPr>
               <a:t>CLOSING</a:t>
             </a:r>
@@ -18381,8 +17841,6 @@
                   <a:srgbClr val="FFFFFF"/>
                 </a:solidFill>
                 <a:latin typeface="League Spartan SemiBold"/>
-                <a:ea typeface="League Spartan SemiBold"/>
-                <a:cs typeface="League Spartan SemiBold"/>
               </a:rPr>
               <a:t>18</a:t>
             </a:r>
@@ -18418,8 +17876,6 @@
                   <a:srgbClr val="101A2B"/>
                 </a:solidFill>
                 <a:latin typeface="League Spartan SemiBold"/>
-                <a:ea typeface="League Spartan SemiBold"/>
-                <a:cs typeface="League Spartan SemiBold"/>
               </a:rPr>
               <a:t>SECTION NAME</a:t>
             </a:r>
@@ -18509,8 +17965,6 @@
                   <a:srgbClr val="64707A"/>
                 </a:solidFill>
                 <a:latin typeface="Poppins SemiBold"/>
-                <a:ea typeface="Poppins SemiBold"/>
-                <a:cs typeface="Poppins SemiBold"/>
               </a:rPr>
               <a:t>Page title</a:t>
             </a:r>
@@ -18546,8 +18000,6 @@
                   <a:srgbClr val="64707A"/>
                 </a:solidFill>
                 <a:latin typeface="Urbanist"/>
-                <a:ea typeface="Urbanist"/>
-                <a:cs typeface="Urbanist"/>
               </a:rPr>
               <a:t>One line under it saying what the page is for.</a:t>
             </a:r>
@@ -18583,8 +18035,6 @@
                   <a:srgbClr val="64707A"/>
                 </a:solidFill>
                 <a:latin typeface="Poppins"/>
-                <a:ea typeface="Poppins"/>
-                <a:cs typeface="Poppins"/>
               </a:rPr>
               <a:t>01</a:t>
             </a:r>
@@ -18650,8 +18100,6 @@
                   <a:srgbClr val="64707A"/>
                 </a:solidFill>
                 <a:latin typeface="Poppins SemiBold"/>
-                <a:ea typeface="Poppins SemiBold"/>
-                <a:cs typeface="Poppins SemiBold"/>
               </a:rPr>
               <a:t>Part name</a:t>
             </a:r>
@@ -18687,8 +18135,6 @@
                   <a:srgbClr val="64707A"/>
                 </a:solidFill>
                 <a:latin typeface="League Spartan SemiBold"/>
-                <a:ea typeface="League Spartan SemiBold"/>
-                <a:cs typeface="League Spartan SemiBold"/>
               </a:rPr>
               <a:t>01.1</a:t>
             </a:r>
@@ -18724,8 +18170,6 @@
                   <a:srgbClr val="64707A"/>
                 </a:solidFill>
                 <a:latin typeface="Urbanist Medium"/>
-                <a:ea typeface="Urbanist Medium"/>
-                <a:cs typeface="Urbanist Medium"/>
               </a:rPr>
               <a:t>What this section answers</a:t>
             </a:r>
@@ -18761,8 +18205,6 @@
                   <a:srgbClr val="64707A"/>
                 </a:solidFill>
                 <a:latin typeface="League Spartan SemiBold"/>
-                <a:ea typeface="League Spartan SemiBold"/>
-                <a:cs typeface="League Spartan SemiBold"/>
               </a:rPr>
               <a:t>01.2</a:t>
             </a:r>
@@ -18798,8 +18240,6 @@
                   <a:srgbClr val="64707A"/>
                 </a:solidFill>
                 <a:latin typeface="Urbanist Medium"/>
-                <a:ea typeface="Urbanist Medium"/>
-                <a:cs typeface="Urbanist Medium"/>
               </a:rPr>
               <a:t>What this section answers</a:t>
             </a:r>
@@ -18835,8 +18275,6 @@
                   <a:srgbClr val="64707A"/>
                 </a:solidFill>
                 <a:latin typeface="League Spartan SemiBold"/>
-                <a:ea typeface="League Spartan SemiBold"/>
-                <a:cs typeface="League Spartan SemiBold"/>
               </a:rPr>
               <a:t>01.3</a:t>
             </a:r>
@@ -18872,8 +18310,6 @@
                   <a:srgbClr val="64707A"/>
                 </a:solidFill>
                 <a:latin typeface="Urbanist Medium"/>
-                <a:ea typeface="Urbanist Medium"/>
-                <a:cs typeface="Urbanist Medium"/>
               </a:rPr>
               <a:t>What this section answers</a:t>
             </a:r>
@@ -18909,8 +18345,6 @@
                   <a:srgbClr val="64707A"/>
                 </a:solidFill>
                 <a:latin typeface="League Spartan SemiBold"/>
-                <a:ea typeface="League Spartan SemiBold"/>
-                <a:cs typeface="League Spartan SemiBold"/>
               </a:rPr>
               <a:t>01.4</a:t>
             </a:r>
@@ -18946,8 +18380,6 @@
                   <a:srgbClr val="64707A"/>
                 </a:solidFill>
                 <a:latin typeface="Urbanist Medium"/>
-                <a:ea typeface="Urbanist Medium"/>
-                <a:cs typeface="Urbanist Medium"/>
               </a:rPr>
               <a:t>What this section answers</a:t>
             </a:r>
@@ -18983,8 +18415,6 @@
                   <a:srgbClr val="64707A"/>
                 </a:solidFill>
                 <a:latin typeface="Poppins"/>
-                <a:ea typeface="Poppins"/>
-                <a:cs typeface="Poppins"/>
               </a:rPr>
               <a:t>02</a:t>
             </a:r>
@@ -19050,8 +18480,6 @@
                   <a:srgbClr val="64707A"/>
                 </a:solidFill>
                 <a:latin typeface="Poppins SemiBold"/>
-                <a:ea typeface="Poppins SemiBold"/>
-                <a:cs typeface="Poppins SemiBold"/>
               </a:rPr>
               <a:t>Part name</a:t>
             </a:r>
@@ -19087,8 +18515,6 @@
                   <a:srgbClr val="64707A"/>
                 </a:solidFill>
                 <a:latin typeface="League Spartan SemiBold"/>
-                <a:ea typeface="League Spartan SemiBold"/>
-                <a:cs typeface="League Spartan SemiBold"/>
               </a:rPr>
               <a:t>02.1</a:t>
             </a:r>
@@ -19124,8 +18550,6 @@
                   <a:srgbClr val="64707A"/>
                 </a:solidFill>
                 <a:latin typeface="Urbanist Medium"/>
-                <a:ea typeface="Urbanist Medium"/>
-                <a:cs typeface="Urbanist Medium"/>
               </a:rPr>
               <a:t>What this section answers</a:t>
             </a:r>
@@ -19161,8 +18585,6 @@
                   <a:srgbClr val="64707A"/>
                 </a:solidFill>
                 <a:latin typeface="League Spartan SemiBold"/>
-                <a:ea typeface="League Spartan SemiBold"/>
-                <a:cs typeface="League Spartan SemiBold"/>
               </a:rPr>
               <a:t>02.2</a:t>
             </a:r>
@@ -19198,8 +18620,6 @@
                   <a:srgbClr val="64707A"/>
                 </a:solidFill>
                 <a:latin typeface="Urbanist Medium"/>
-                <a:ea typeface="Urbanist Medium"/>
-                <a:cs typeface="Urbanist Medium"/>
               </a:rPr>
               <a:t>What this section answers</a:t>
             </a:r>
@@ -19235,8 +18655,6 @@
                   <a:srgbClr val="64707A"/>
                 </a:solidFill>
                 <a:latin typeface="League Spartan SemiBold"/>
-                <a:ea typeface="League Spartan SemiBold"/>
-                <a:cs typeface="League Spartan SemiBold"/>
               </a:rPr>
               <a:t>02.3</a:t>
             </a:r>
@@ -19272,8 +18690,6 @@
                   <a:srgbClr val="64707A"/>
                 </a:solidFill>
                 <a:latin typeface="Urbanist Medium"/>
-                <a:ea typeface="Urbanist Medium"/>
-                <a:cs typeface="Urbanist Medium"/>
               </a:rPr>
               <a:t>What this section answers</a:t>
             </a:r>
@@ -19309,8 +18725,6 @@
                   <a:srgbClr val="64707A"/>
                 </a:solidFill>
                 <a:latin typeface="League Spartan SemiBold"/>
-                <a:ea typeface="League Spartan SemiBold"/>
-                <a:cs typeface="League Spartan SemiBold"/>
               </a:rPr>
               <a:t>02.4</a:t>
             </a:r>
@@ -19346,8 +18760,6 @@
                   <a:srgbClr val="64707A"/>
                 </a:solidFill>
                 <a:latin typeface="Urbanist Medium"/>
-                <a:ea typeface="Urbanist Medium"/>
-                <a:cs typeface="Urbanist Medium"/>
               </a:rPr>
               <a:t>What this section answers</a:t>
             </a:r>
@@ -19383,8 +18795,6 @@
                   <a:srgbClr val="64707A"/>
                 </a:solidFill>
                 <a:latin typeface="Poppins"/>
-                <a:ea typeface="Poppins"/>
-                <a:cs typeface="Poppins"/>
               </a:rPr>
               <a:t>03</a:t>
             </a:r>
@@ -19450,8 +18860,6 @@
                   <a:srgbClr val="64707A"/>
                 </a:solidFill>
                 <a:latin typeface="Poppins SemiBold"/>
-                <a:ea typeface="Poppins SemiBold"/>
-                <a:cs typeface="Poppins SemiBold"/>
               </a:rPr>
               <a:t>Part name</a:t>
             </a:r>
@@ -19487,8 +18895,6 @@
                   <a:srgbClr val="64707A"/>
                 </a:solidFill>
                 <a:latin typeface="League Spartan SemiBold"/>
-                <a:ea typeface="League Spartan SemiBold"/>
-                <a:cs typeface="League Spartan SemiBold"/>
               </a:rPr>
               <a:t>03.1</a:t>
             </a:r>
@@ -19524,8 +18930,6 @@
                   <a:srgbClr val="64707A"/>
                 </a:solidFill>
                 <a:latin typeface="Urbanist Medium"/>
-                <a:ea typeface="Urbanist Medium"/>
-                <a:cs typeface="Urbanist Medium"/>
               </a:rPr>
               <a:t>What this section answers</a:t>
             </a:r>
@@ -19561,8 +18965,6 @@
                   <a:srgbClr val="64707A"/>
                 </a:solidFill>
                 <a:latin typeface="League Spartan SemiBold"/>
-                <a:ea typeface="League Spartan SemiBold"/>
-                <a:cs typeface="League Spartan SemiBold"/>
               </a:rPr>
               <a:t>03.2</a:t>
             </a:r>
@@ -19598,8 +19000,6 @@
                   <a:srgbClr val="64707A"/>
                 </a:solidFill>
                 <a:latin typeface="Urbanist Medium"/>
-                <a:ea typeface="Urbanist Medium"/>
-                <a:cs typeface="Urbanist Medium"/>
               </a:rPr>
               <a:t>What this section answers</a:t>
             </a:r>
@@ -19635,8 +19035,6 @@
                   <a:srgbClr val="64707A"/>
                 </a:solidFill>
                 <a:latin typeface="League Spartan SemiBold"/>
-                <a:ea typeface="League Spartan SemiBold"/>
-                <a:cs typeface="League Spartan SemiBold"/>
               </a:rPr>
               <a:t>03.3</a:t>
             </a:r>
@@ -19672,8 +19070,6 @@
                   <a:srgbClr val="64707A"/>
                 </a:solidFill>
                 <a:latin typeface="Urbanist Medium"/>
-                <a:ea typeface="Urbanist Medium"/>
-                <a:cs typeface="Urbanist Medium"/>
               </a:rPr>
               <a:t>What this section answers</a:t>
             </a:r>
@@ -19709,8 +19105,6 @@
                   <a:srgbClr val="64707A"/>
                 </a:solidFill>
                 <a:latin typeface="League Spartan SemiBold"/>
-                <a:ea typeface="League Spartan SemiBold"/>
-                <a:cs typeface="League Spartan SemiBold"/>
               </a:rPr>
               <a:t>03.4</a:t>
             </a:r>
@@ -19746,8 +19140,6 @@
                   <a:srgbClr val="64707A"/>
                 </a:solidFill>
                 <a:latin typeface="Urbanist Medium"/>
-                <a:ea typeface="Urbanist Medium"/>
-                <a:cs typeface="Urbanist Medium"/>
               </a:rPr>
               <a:t>What this section answers</a:t>
             </a:r>
@@ -19783,8 +19175,6 @@
                   <a:srgbClr val="64707A"/>
                 </a:solidFill>
                 <a:latin typeface="League Spartan Medium"/>
-                <a:ea typeface="League Spartan Medium"/>
-                <a:cs typeface="League Spartan Medium"/>
               </a:rPr>
               <a:t>18</a:t>
             </a:r>
@@ -19820,8 +19210,6 @@
                   <a:srgbClr val="64707A"/>
                 </a:solidFill>
                 <a:latin typeface="League Spartan"/>
-                <a:ea typeface="League Spartan"/>
-                <a:cs typeface="League Spartan"/>
               </a:rPr>
               <a:t>AGENDA</a:t>
             </a:r>
@@ -20055,8 +19443,6 @@
                   <a:srgbClr val="FFFFFF"/>
                 </a:solidFill>
                 <a:latin typeface="League Spartan SemiBold"/>
-                <a:ea typeface="League Spartan SemiBold"/>
-                <a:cs typeface="League Spartan SemiBold"/>
               </a:rPr>
               <a:t>01</a:t>
             </a:r>
@@ -20092,8 +19478,6 @@
                   <a:srgbClr val="E7EBF0"/>
                 </a:solidFill>
                 <a:latin typeface="League Spartan SemiBold"/>
-                <a:ea typeface="League Spartan SemiBold"/>
-                <a:cs typeface="League Spartan SemiBold"/>
               </a:rPr>
               <a:t>IAQ TECHNOLOGY INTERNATIONAL SDN BHD</a:t>
             </a:r>
@@ -20153,8 +19537,6 @@
                   <a:srgbClr val="64707A"/>
                 </a:solidFill>
                 <a:latin typeface="League Spartan SemiBold"/>
-                <a:ea typeface="League Spartan SemiBold"/>
-                <a:cs typeface="League Spartan SemiBold"/>
               </a:rPr>
               <a:t>KICKER · TWO OR THREE WORDS</a:t>
             </a:r>
@@ -20194,8 +19576,6 @@
                   <a:srgbClr val="FFFFFF"/>
                 </a:solidFill>
                 <a:latin typeface="Poppins SemiBold"/>
-                <a:ea typeface="Poppins SemiBold"/>
-                <a:cs typeface="Poppins SemiBold"/>
               </a:rPr>
               <a:t>The one line this deck is about, eight words or fewer.</a:t>
             </a:r>
@@ -20231,8 +19611,6 @@
                   <a:srgbClr val="64707A"/>
                 </a:solidFill>
                 <a:latin typeface="Urbanist"/>
-                <a:ea typeface="Urbanist"/>
-                <a:cs typeface="Urbanist"/>
               </a:rPr>
               <a:t>A sentence under it saying who it is for and what it covers.</a:t>
             </a:r>
@@ -20268,8 +19646,6 @@
                   <a:srgbClr val="64707A"/>
                 </a:solidFill>
                 <a:latin typeface="League Spartan"/>
-                <a:ea typeface="League Spartan"/>
-                <a:cs typeface="League Spartan"/>
               </a:rPr>
               <a:t>PREPARED FOR · CLIENT · DATE</a:t>
             </a:r>
@@ -20305,8 +19681,6 @@
                   <a:srgbClr val="96A2B2"/>
                 </a:solidFill>
                 <a:latin typeface="League Spartan Medium"/>
-                <a:ea typeface="League Spartan Medium"/>
-                <a:cs typeface="League Spartan Medium"/>
               </a:rPr>
               <a:t>01</a:t>
             </a:r>
@@ -20342,8 +19716,6 @@
                   <a:srgbClr val="96A2B2"/>
                 </a:solidFill>
                 <a:latin typeface="League Spartan"/>
-                <a:ea typeface="League Spartan"/>
-                <a:cs typeface="League Spartan"/>
               </a:rPr>
               <a:t>TITLE</a:t>
             </a:r>
@@ -20457,8 +19829,6 @@
                   <a:srgbClr val="FFFFFF"/>
                 </a:solidFill>
                 <a:latin typeface="League Spartan SemiBold"/>
-                <a:ea typeface="League Spartan SemiBold"/>
-                <a:cs typeface="League Spartan SemiBold"/>
               </a:rPr>
               <a:t>19</a:t>
             </a:r>
@@ -20494,8 +19864,6 @@
                   <a:srgbClr val="101A2B"/>
                 </a:solidFill>
                 <a:latin typeface="League Spartan SemiBold"/>
-                <a:ea typeface="League Spartan SemiBold"/>
-                <a:cs typeface="League Spartan SemiBold"/>
               </a:rPr>
               <a:t>SECTION NAME</a:t>
             </a:r>
@@ -20585,8 +19953,6 @@
                   <a:srgbClr val="64707A"/>
                 </a:solidFill>
                 <a:latin typeface="Poppins SemiBold"/>
-                <a:ea typeface="Poppins SemiBold"/>
-                <a:cs typeface="Poppins SemiBold"/>
               </a:rPr>
               <a:t>Page title</a:t>
             </a:r>
@@ -20622,8 +19988,6 @@
                   <a:srgbClr val="64707A"/>
                 </a:solidFill>
                 <a:latin typeface="Urbanist"/>
-                <a:ea typeface="Urbanist"/>
-                <a:cs typeface="Urbanist"/>
               </a:rPr>
               <a:t>One line under it saying what the page is for.</a:t>
             </a:r>
@@ -20659,8 +20023,6 @@
                   <a:srgbClr val="64707A"/>
                 </a:solidFill>
                 <a:latin typeface="Poppins"/>
-                <a:ea typeface="Poppins"/>
-                <a:cs typeface="Poppins"/>
               </a:rPr>
               <a:t>“</a:t>
             </a:r>
@@ -20700,8 +20062,6 @@
                   <a:srgbClr val="64707A"/>
                 </a:solidFill>
                 <a:latin typeface="Poppins SemiBold"/>
-                <a:ea typeface="Poppins SemiBold"/>
-                <a:cs typeface="Poppins SemiBold"/>
               </a:rPr>
               <a:t>The quotation, two lines at most. Cut it back until only the part worth repeating is left.</a:t>
             </a:r>
@@ -20767,8 +20127,6 @@
                   <a:srgbClr val="64707A"/>
                 </a:solidFill>
                 <a:latin typeface="Urbanist SemiBold"/>
-                <a:ea typeface="Urbanist SemiBold"/>
-                <a:cs typeface="Urbanist SemiBold"/>
               </a:rPr>
               <a:t>Name of the person</a:t>
             </a:r>
@@ -20804,8 +20162,6 @@
                   <a:srgbClr val="64707A"/>
                 </a:solidFill>
                 <a:latin typeface="League Spartan SemiBold"/>
-                <a:ea typeface="League Spartan SemiBold"/>
-                <a:cs typeface="League Spartan SemiBold"/>
               </a:rPr>
               <a:t>ROLE · ORGANISATION</a:t>
             </a:r>
@@ -20896,8 +20252,6 @@
                   <a:srgbClr val="64707A"/>
                 </a:solidFill>
                 <a:latin typeface="League Spartan Medium"/>
-                <a:ea typeface="League Spartan Medium"/>
-                <a:cs typeface="League Spartan Medium"/>
               </a:rPr>
               <a:t>19</a:t>
             </a:r>
@@ -20933,8 +20287,6 @@
                   <a:srgbClr val="64707A"/>
                 </a:solidFill>
                 <a:latin typeface="League Spartan"/>
-                <a:ea typeface="League Spartan"/>
-                <a:cs typeface="League Spartan"/>
               </a:rPr>
               <a:t>QUOTE</a:t>
             </a:r>
@@ -21048,8 +20400,6 @@
                   <a:srgbClr val="FFFFFF"/>
                 </a:solidFill>
                 <a:latin typeface="League Spartan SemiBold"/>
-                <a:ea typeface="League Spartan SemiBold"/>
-                <a:cs typeface="League Spartan SemiBold"/>
               </a:rPr>
               <a:t>20</a:t>
             </a:r>
@@ -21085,8 +20435,6 @@
                   <a:srgbClr val="101A2B"/>
                 </a:solidFill>
                 <a:latin typeface="League Spartan SemiBold"/>
-                <a:ea typeface="League Spartan SemiBold"/>
-                <a:cs typeface="League Spartan SemiBold"/>
               </a:rPr>
               <a:t>SECTION NAME</a:t>
             </a:r>
@@ -21176,8 +20524,6 @@
                   <a:srgbClr val="64707A"/>
                 </a:solidFill>
                 <a:latin typeface="Poppins SemiBold"/>
-                <a:ea typeface="Poppins SemiBold"/>
-                <a:cs typeface="Poppins SemiBold"/>
               </a:rPr>
               <a:t>Page title</a:t>
             </a:r>
@@ -21213,8 +20559,6 @@
                   <a:srgbClr val="64707A"/>
                 </a:solidFill>
                 <a:latin typeface="Urbanist"/>
-                <a:ea typeface="Urbanist"/>
-                <a:cs typeface="Urbanist"/>
               </a:rPr>
               <a:t>One line under it saying what the page is for.</a:t>
             </a:r>
@@ -21310,8 +20654,6 @@
                   <a:srgbClr val="FFFFFF"/>
                 </a:solidFill>
                 <a:latin typeface="League Spartan SemiBold"/>
-                <a:ea typeface="League Spartan SemiBold"/>
-                <a:cs typeface="League Spartan SemiBold"/>
               </a:rPr>
               <a:t>BEFORE</a:t>
             </a:r>
@@ -21372,8 +20714,6 @@
                   <a:srgbClr val="64707A"/>
                 </a:solidFill>
                 <a:latin typeface="Poppins SemiBold"/>
-                <a:ea typeface="Poppins SemiBold"/>
-                <a:cs typeface="Poppins SemiBold"/>
               </a:rPr>
               <a:t>What it was</a:t>
             </a:r>
@@ -21409,8 +20749,6 @@
                   <a:srgbClr val="64707A"/>
                 </a:solidFill>
                 <a:latin typeface="Urbanist"/>
-                <a:ea typeface="Urbanist"/>
-                <a:cs typeface="Urbanist"/>
               </a:rPr>
               <a:t>One or two sentences on the state it started in.</a:t>
             </a:r>
@@ -21506,8 +20844,6 @@
                   <a:srgbClr val="FFFFFF"/>
                 </a:solidFill>
                 <a:latin typeface="League Spartan SemiBold"/>
-                <a:ea typeface="League Spartan SemiBold"/>
-                <a:cs typeface="League Spartan SemiBold"/>
               </a:rPr>
               <a:t>AFTER</a:t>
             </a:r>
@@ -21568,8 +20904,6 @@
                   <a:srgbClr val="64707A"/>
                 </a:solidFill>
                 <a:latin typeface="Poppins SemiBold"/>
-                <a:ea typeface="Poppins SemiBold"/>
-                <a:cs typeface="Poppins SemiBold"/>
               </a:rPr>
               <a:t>What it became</a:t>
             </a:r>
@@ -21605,8 +20939,6 @@
                   <a:srgbClr val="64707A"/>
                 </a:solidFill>
                 <a:latin typeface="Urbanist"/>
-                <a:ea typeface="Urbanist"/>
-                <a:cs typeface="Urbanist"/>
               </a:rPr>
               <a:t>One or two sentences on the state it ended in.</a:t>
             </a:r>
@@ -21642,8 +20974,6 @@
                   <a:srgbClr val="64707A"/>
                 </a:solidFill>
                 <a:latin typeface="League Spartan Medium"/>
-                <a:ea typeface="League Spartan Medium"/>
-                <a:cs typeface="League Spartan Medium"/>
               </a:rPr>
               <a:t>20</a:t>
             </a:r>
@@ -21679,8 +21009,6 @@
                   <a:srgbClr val="64707A"/>
                 </a:solidFill>
                 <a:latin typeface="League Spartan"/>
-                <a:ea typeface="League Spartan"/>
-                <a:cs typeface="League Spartan"/>
               </a:rPr>
               <a:t>BEFORE AND AFTER</a:t>
             </a:r>
@@ -21914,8 +21242,6 @@
                   <a:srgbClr val="FFFFFF"/>
                 </a:solidFill>
                 <a:latin typeface="League Spartan SemiBold"/>
-                <a:ea typeface="League Spartan SemiBold"/>
-                <a:cs typeface="League Spartan SemiBold"/>
               </a:rPr>
               <a:t>02</a:t>
             </a:r>
@@ -21951,8 +21277,6 @@
                   <a:srgbClr val="E7EBF0"/>
                 </a:solidFill>
                 <a:latin typeface="League Spartan SemiBold"/>
-                <a:ea typeface="League Spartan SemiBold"/>
-                <a:cs typeface="League Spartan SemiBold"/>
               </a:rPr>
               <a:t>SECTION NAME</a:t>
             </a:r>
@@ -21988,8 +21312,6 @@
                   <a:srgbClr val="EC2326"/>
                 </a:solidFill>
                 <a:latin typeface="League Spartan SemiBold"/>
-                <a:ea typeface="League Spartan SemiBold"/>
-                <a:cs typeface="League Spartan SemiBold"/>
               </a:rPr>
               <a:t>PART 00 OF 00</a:t>
             </a:r>
@@ -22025,8 +21347,6 @@
                   <a:srgbClr val="EC2326"/>
                 </a:solidFill>
                 <a:latin typeface="Poppins"/>
-                <a:ea typeface="Poppins"/>
-                <a:cs typeface="Poppins"/>
               </a:rPr>
               <a:t>00</a:t>
             </a:r>
@@ -22062,8 +21382,6 @@
                   <a:srgbClr val="FFFFFF"/>
                 </a:solidFill>
                 <a:latin typeface="Poppins SemiBold"/>
-                <a:ea typeface="Poppins SemiBold"/>
-                <a:cs typeface="Poppins SemiBold"/>
               </a:rPr>
               <a:t>Section name</a:t>
             </a:r>
@@ -22099,8 +21417,6 @@
                   <a:srgbClr val="96A2B2"/>
                 </a:solidFill>
                 <a:latin typeface="League Spartan Medium"/>
-                <a:ea typeface="League Spartan Medium"/>
-                <a:cs typeface="League Spartan Medium"/>
               </a:rPr>
               <a:t>WHAT THIS PART COVERS</a:t>
             </a:r>
@@ -22168,8 +21484,6 @@
                   <a:srgbClr val="E7EBF0"/>
                 </a:solidFill>
                 <a:latin typeface="Urbanist Medium"/>
-                <a:ea typeface="Urbanist Medium"/>
-                <a:cs typeface="Urbanist Medium"/>
               </a:rPr>
               <a:t>A fact worth leading with</a:t>
             </a:r>
@@ -22205,8 +21519,6 @@
                   <a:srgbClr val="E7EBF0"/>
                 </a:solidFill>
                 <a:latin typeface="Urbanist Medium"/>
-                <a:ea typeface="Urbanist Medium"/>
-                <a:cs typeface="Urbanist Medium"/>
               </a:rPr>
               <a:t>A second fact, the same length</a:t>
             </a:r>
@@ -22266,8 +21578,6 @@
                   <a:srgbClr val="96A2B2"/>
                 </a:solidFill>
                 <a:latin typeface="League Spartan Medium"/>
-                <a:ea typeface="League Spartan Medium"/>
-                <a:cs typeface="League Spartan Medium"/>
               </a:rPr>
               <a:t>02</a:t>
             </a:r>
@@ -22381,8 +21691,6 @@
                   <a:srgbClr val="FFFFFF"/>
                 </a:solidFill>
                 <a:latin typeface="League Spartan SemiBold"/>
-                <a:ea typeface="League Spartan SemiBold"/>
-                <a:cs typeface="League Spartan SemiBold"/>
               </a:rPr>
               <a:t>03</a:t>
             </a:r>
@@ -22418,8 +21726,6 @@
                   <a:srgbClr val="101A2B"/>
                 </a:solidFill>
                 <a:latin typeface="League Spartan SemiBold"/>
-                <a:ea typeface="League Spartan SemiBold"/>
-                <a:cs typeface="League Spartan SemiBold"/>
               </a:rPr>
               <a:t>SECTION NAME</a:t>
             </a:r>
@@ -22509,8 +21815,6 @@
                   <a:srgbClr val="64707A"/>
                 </a:solidFill>
                 <a:latin typeface="Poppins SemiBold"/>
-                <a:ea typeface="Poppins SemiBold"/>
-                <a:cs typeface="Poppins SemiBold"/>
               </a:rPr>
               <a:t>Page title</a:t>
             </a:r>
@@ -22546,8 +21850,6 @@
                   <a:srgbClr val="64707A"/>
                 </a:solidFill>
                 <a:latin typeface="Urbanist"/>
-                <a:ea typeface="Urbanist"/>
-                <a:cs typeface="Urbanist"/>
               </a:rPr>
               <a:t>One line under it saying what the page is for.</a:t>
             </a:r>
@@ -22587,8 +21889,6 @@
                   <a:srgbClr val="64707A"/>
                 </a:solidFill>
                 <a:latin typeface="Poppins SemiBold"/>
-                <a:ea typeface="Poppins SemiBold"/>
-                <a:cs typeface="Poppins SemiBold"/>
               </a:rPr>
               <a:t>The statement, two lines at most, said plainly.</a:t>
             </a:r>
@@ -22628,8 +21928,6 @@
                   <a:srgbClr val="64707A"/>
                 </a:solidFill>
                 <a:latin typeface="Urbanist"/>
-                <a:ea typeface="Urbanist"/>
-                <a:cs typeface="Urbanist"/>
               </a:rPr>
               <a:t>Two or three sentences carrying the argument. Say what is true, what it is worth, and leave the rest to the next page.</a:t>
             </a:r>
@@ -22690,8 +21988,6 @@
                   <a:srgbClr val="64707A"/>
                 </a:solidFill>
                 <a:latin typeface="League Spartan Medium"/>
-                <a:ea typeface="League Spartan Medium"/>
-                <a:cs typeface="League Spartan Medium"/>
               </a:rPr>
               <a:t>03</a:t>
             </a:r>
@@ -22727,8 +22023,6 @@
                   <a:srgbClr val="64707A"/>
                 </a:solidFill>
                 <a:latin typeface="League Spartan"/>
-                <a:ea typeface="League Spartan"/>
-                <a:cs typeface="League Spartan"/>
               </a:rPr>
               <a:t>STATEMENT</a:t>
             </a:r>
@@ -22842,8 +22136,6 @@
                   <a:srgbClr val="FFFFFF"/>
                 </a:solidFill>
                 <a:latin typeface="League Spartan SemiBold"/>
-                <a:ea typeface="League Spartan SemiBold"/>
-                <a:cs typeface="League Spartan SemiBold"/>
               </a:rPr>
               <a:t>04</a:t>
             </a:r>
@@ -22879,8 +22171,6 @@
                   <a:srgbClr val="101A2B"/>
                 </a:solidFill>
                 <a:latin typeface="League Spartan SemiBold"/>
-                <a:ea typeface="League Spartan SemiBold"/>
-                <a:cs typeface="League Spartan SemiBold"/>
               </a:rPr>
               <a:t>SECTION NAME</a:t>
             </a:r>
@@ -22970,8 +22260,6 @@
                   <a:srgbClr val="64707A"/>
                 </a:solidFill>
                 <a:latin typeface="Poppins SemiBold"/>
-                <a:ea typeface="Poppins SemiBold"/>
-                <a:cs typeface="Poppins SemiBold"/>
               </a:rPr>
               <a:t>Page title</a:t>
             </a:r>
@@ -23007,8 +22295,6 @@
                   <a:srgbClr val="64707A"/>
                 </a:solidFill>
                 <a:latin typeface="Urbanist"/>
-                <a:ea typeface="Urbanist"/>
-                <a:cs typeface="Urbanist"/>
               </a:rPr>
               <a:t>One line under it saying what the page is for.</a:t>
             </a:r>
@@ -23074,8 +22360,6 @@
                   <a:srgbClr val="64707A"/>
                 </a:solidFill>
                 <a:latin typeface="League Spartan SemiBold"/>
-                <a:ea typeface="League Spartan SemiBold"/>
-                <a:cs typeface="League Spartan SemiBold"/>
               </a:rPr>
               <a:t>LABEL</a:t>
             </a:r>
@@ -23115,8 +22399,6 @@
                   <a:srgbClr val="FFFFFF"/>
                 </a:solidFill>
                 <a:latin typeface="Poppins"/>
-                <a:ea typeface="Poppins"/>
-                <a:cs typeface="Poppins"/>
               </a:rPr>
               <a:t>00</a:t>
             </a:r>
@@ -23126,8 +22408,6 @@
                   <a:srgbClr val="64707A"/>
                 </a:solidFill>
                 <a:latin typeface="Urbanist Medium"/>
-                <a:ea typeface="Urbanist Medium"/>
-                <a:cs typeface="Urbanist Medium"/>
               </a:rPr>
               <a:t>+</a:t>
             </a:r>
@@ -23163,8 +22443,6 @@
                   <a:srgbClr val="64707A"/>
                 </a:solidFill>
                 <a:latin typeface="Urbanist"/>
-                <a:ea typeface="Urbanist"/>
-                <a:cs typeface="Urbanist"/>
               </a:rPr>
               <a:t>What the figure counts, one line</a:t>
             </a:r>
@@ -23230,8 +22508,6 @@
                   <a:srgbClr val="64707A"/>
                 </a:solidFill>
                 <a:latin typeface="League Spartan SemiBold"/>
-                <a:ea typeface="League Spartan SemiBold"/>
-                <a:cs typeface="League Spartan SemiBold"/>
               </a:rPr>
               <a:t>LABEL</a:t>
             </a:r>
@@ -23271,8 +22547,6 @@
                   <a:srgbClr val="101A2B"/>
                 </a:solidFill>
                 <a:latin typeface="Poppins"/>
-                <a:ea typeface="Poppins"/>
-                <a:cs typeface="Poppins"/>
               </a:rPr>
               <a:t>00</a:t>
             </a:r>
@@ -23282,8 +22556,6 @@
                   <a:srgbClr val="64707A"/>
                 </a:solidFill>
                 <a:latin typeface="Urbanist Medium"/>
-                <a:ea typeface="Urbanist Medium"/>
-                <a:cs typeface="Urbanist Medium"/>
               </a:rPr>
               <a:t>unit</a:t>
             </a:r>
@@ -23319,8 +22591,6 @@
                   <a:srgbClr val="64707A"/>
                 </a:solidFill>
                 <a:latin typeface="Urbanist"/>
-                <a:ea typeface="Urbanist"/>
-                <a:cs typeface="Urbanist"/>
               </a:rPr>
               <a:t>What the figure counts, one line</a:t>
             </a:r>
@@ -23386,8 +22656,6 @@
                   <a:srgbClr val="64707A"/>
                 </a:solidFill>
                 <a:latin typeface="League Spartan SemiBold"/>
-                <a:ea typeface="League Spartan SemiBold"/>
-                <a:cs typeface="League Spartan SemiBold"/>
               </a:rPr>
               <a:t>LABEL</a:t>
             </a:r>
@@ -23427,8 +22695,6 @@
                   <a:srgbClr val="101A2B"/>
                 </a:solidFill>
                 <a:latin typeface="Poppins"/>
-                <a:ea typeface="Poppins"/>
-                <a:cs typeface="Poppins"/>
               </a:rPr>
               <a:t>00</a:t>
             </a:r>
@@ -23438,8 +22704,6 @@
                   <a:srgbClr val="64707A"/>
                 </a:solidFill>
                 <a:latin typeface="Urbanist Medium"/>
-                <a:ea typeface="Urbanist Medium"/>
-                <a:cs typeface="Urbanist Medium"/>
               </a:rPr>
               <a:t>%</a:t>
             </a:r>
@@ -23475,8 +22739,6 @@
                   <a:srgbClr val="64707A"/>
                 </a:solidFill>
                 <a:latin typeface="Urbanist"/>
-                <a:ea typeface="Urbanist"/>
-                <a:cs typeface="Urbanist"/>
               </a:rPr>
               <a:t>What the figure counts, one line</a:t>
             </a:r>
@@ -23542,8 +22804,6 @@
                   <a:srgbClr val="64707A"/>
                 </a:solidFill>
                 <a:latin typeface="League Spartan SemiBold"/>
-                <a:ea typeface="League Spartan SemiBold"/>
-                <a:cs typeface="League Spartan SemiBold"/>
               </a:rPr>
               <a:t>LABEL</a:t>
             </a:r>
@@ -23579,8 +22839,6 @@
                   <a:srgbClr val="101A2B"/>
                 </a:solidFill>
                 <a:latin typeface="Poppins"/>
-                <a:ea typeface="Poppins"/>
-                <a:cs typeface="Poppins"/>
               </a:rPr>
               <a:t>00</a:t>
             </a:r>
@@ -23616,8 +22874,6 @@
                   <a:srgbClr val="64707A"/>
                 </a:solidFill>
                 <a:latin typeface="Urbanist"/>
-                <a:ea typeface="Urbanist"/>
-                <a:cs typeface="Urbanist"/>
               </a:rPr>
               <a:t>What the figure counts, one line</a:t>
             </a:r>
@@ -23653,8 +22909,6 @@
                   <a:srgbClr val="64707A"/>
                 </a:solidFill>
                 <a:latin typeface="League Spartan Medium"/>
-                <a:ea typeface="League Spartan Medium"/>
-                <a:cs typeface="League Spartan Medium"/>
               </a:rPr>
               <a:t>04</a:t>
             </a:r>
@@ -23690,8 +22944,6 @@
                   <a:srgbClr val="64707A"/>
                 </a:solidFill>
                 <a:latin typeface="League Spartan"/>
-                <a:ea typeface="League Spartan"/>
-                <a:cs typeface="League Spartan"/>
               </a:rPr>
               <a:t>HIGHLIGHTS</a:t>
             </a:r>
@@ -23805,8 +23057,6 @@
                   <a:srgbClr val="FFFFFF"/>
                 </a:solidFill>
                 <a:latin typeface="League Spartan SemiBold"/>
-                <a:ea typeface="League Spartan SemiBold"/>
-                <a:cs typeface="League Spartan SemiBold"/>
               </a:rPr>
               <a:t>05</a:t>
             </a:r>
@@ -23842,8 +23092,6 @@
                   <a:srgbClr val="101A2B"/>
                 </a:solidFill>
                 <a:latin typeface="League Spartan SemiBold"/>
-                <a:ea typeface="League Spartan SemiBold"/>
-                <a:cs typeface="League Spartan SemiBold"/>
               </a:rPr>
               <a:t>SECTION NAME</a:t>
             </a:r>
@@ -23933,8 +23181,6 @@
                   <a:srgbClr val="64707A"/>
                 </a:solidFill>
                 <a:latin typeface="Poppins SemiBold"/>
-                <a:ea typeface="Poppins SemiBold"/>
-                <a:cs typeface="Poppins SemiBold"/>
               </a:rPr>
               <a:t>Page title</a:t>
             </a:r>
@@ -23970,8 +23216,6 @@
                   <a:srgbClr val="64707A"/>
                 </a:solidFill>
                 <a:latin typeface="Urbanist"/>
-                <a:ea typeface="Urbanist"/>
-                <a:cs typeface="Urbanist"/>
               </a:rPr>
               <a:t>One line under it saying what the page is for.</a:t>
             </a:r>
@@ -24093,8 +23337,6 @@
                   <a:srgbClr val="64707A"/>
                 </a:solidFill>
                 <a:latin typeface="Urbanist SemiBold"/>
-                <a:ea typeface="Urbanist SemiBold"/>
-                <a:cs typeface="Urbanist SemiBold"/>
               </a:rPr>
               <a:t>Item name</a:t>
             </a:r>
@@ -24130,8 +23372,6 @@
                   <a:srgbClr val="64707A"/>
                 </a:solidFill>
                 <a:latin typeface="Urbanist"/>
-                <a:ea typeface="Urbanist"/>
-                <a:cs typeface="Urbanist"/>
               </a:rPr>
               <a:t>What it covers, four or five words</a:t>
             </a:r>
@@ -24169,8 +23409,6 @@
                   </a:srgbClr>
                 </a:solidFill>
                 <a:latin typeface="Poppins"/>
-                <a:ea typeface="Poppins"/>
-                <a:cs typeface="Poppins"/>
               </a:rPr>
               <a:t>01</a:t>
             </a:r>
@@ -24292,8 +23530,6 @@
                   <a:srgbClr val="64707A"/>
                 </a:solidFill>
                 <a:latin typeface="Urbanist SemiBold"/>
-                <a:ea typeface="Urbanist SemiBold"/>
-                <a:cs typeface="Urbanist SemiBold"/>
               </a:rPr>
               <a:t>Item name</a:t>
             </a:r>
@@ -24329,8 +23565,6 @@
                   <a:srgbClr val="64707A"/>
                 </a:solidFill>
                 <a:latin typeface="Urbanist"/>
-                <a:ea typeface="Urbanist"/>
-                <a:cs typeface="Urbanist"/>
               </a:rPr>
               <a:t>What it covers, four or five words</a:t>
             </a:r>
@@ -24368,8 +23602,6 @@
                   </a:srgbClr>
                 </a:solidFill>
                 <a:latin typeface="Poppins"/>
-                <a:ea typeface="Poppins"/>
-                <a:cs typeface="Poppins"/>
               </a:rPr>
               <a:t>02</a:t>
             </a:r>
@@ -24491,8 +23723,6 @@
                   <a:srgbClr val="64707A"/>
                 </a:solidFill>
                 <a:latin typeface="Urbanist SemiBold"/>
-                <a:ea typeface="Urbanist SemiBold"/>
-                <a:cs typeface="Urbanist SemiBold"/>
               </a:rPr>
               <a:t>Item name</a:t>
             </a:r>
@@ -24528,8 +23758,6 @@
                   <a:srgbClr val="64707A"/>
                 </a:solidFill>
                 <a:latin typeface="Urbanist"/>
-                <a:ea typeface="Urbanist"/>
-                <a:cs typeface="Urbanist"/>
               </a:rPr>
               <a:t>What it covers, four or five words</a:t>
             </a:r>
@@ -24567,8 +23795,6 @@
                   </a:srgbClr>
                 </a:solidFill>
                 <a:latin typeface="Poppins"/>
-                <a:ea typeface="Poppins"/>
-                <a:cs typeface="Poppins"/>
               </a:rPr>
               <a:t>03</a:t>
             </a:r>
@@ -24690,8 +23916,6 @@
                   <a:srgbClr val="64707A"/>
                 </a:solidFill>
                 <a:latin typeface="Urbanist SemiBold"/>
-                <a:ea typeface="Urbanist SemiBold"/>
-                <a:cs typeface="Urbanist SemiBold"/>
               </a:rPr>
               <a:t>Item name</a:t>
             </a:r>
@@ -24727,8 +23951,6 @@
                   <a:srgbClr val="64707A"/>
                 </a:solidFill>
                 <a:latin typeface="Urbanist"/>
-                <a:ea typeface="Urbanist"/>
-                <a:cs typeface="Urbanist"/>
               </a:rPr>
               <a:t>What it covers, four or five words</a:t>
             </a:r>
@@ -24766,8 +23988,6 @@
                   </a:srgbClr>
                 </a:solidFill>
                 <a:latin typeface="Poppins"/>
-                <a:ea typeface="Poppins"/>
-                <a:cs typeface="Poppins"/>
               </a:rPr>
               <a:t>04</a:t>
             </a:r>
@@ -24919,8 +24139,6 @@
                   <a:srgbClr val="64707A"/>
                 </a:solidFill>
                 <a:latin typeface="Urbanist SemiBold"/>
-                <a:ea typeface="Urbanist SemiBold"/>
-                <a:cs typeface="Urbanist SemiBold"/>
               </a:rPr>
               <a:t>Item name</a:t>
             </a:r>
@@ -24956,8 +24174,6 @@
                   <a:srgbClr val="64707A"/>
                 </a:solidFill>
                 <a:latin typeface="Urbanist"/>
-                <a:ea typeface="Urbanist"/>
-                <a:cs typeface="Urbanist"/>
               </a:rPr>
               <a:t>What it covers, four or five words</a:t>
             </a:r>
@@ -24995,8 +24211,6 @@
                   </a:srgbClr>
                 </a:solidFill>
                 <a:latin typeface="Poppins"/>
-                <a:ea typeface="Poppins"/>
-                <a:cs typeface="Poppins"/>
               </a:rPr>
               <a:t>05</a:t>
             </a:r>
@@ -25148,8 +24362,6 @@
                   <a:srgbClr val="64707A"/>
                 </a:solidFill>
                 <a:latin typeface="Urbanist SemiBold"/>
-                <a:ea typeface="Urbanist SemiBold"/>
-                <a:cs typeface="Urbanist SemiBold"/>
               </a:rPr>
               <a:t>Item name</a:t>
             </a:r>
@@ -25185,8 +24397,6 @@
                   <a:srgbClr val="64707A"/>
                 </a:solidFill>
                 <a:latin typeface="Urbanist"/>
-                <a:ea typeface="Urbanist"/>
-                <a:cs typeface="Urbanist"/>
               </a:rPr>
               <a:t>What it covers, four or five words</a:t>
             </a:r>
@@ -25224,8 +24434,6 @@
                   </a:srgbClr>
                 </a:solidFill>
                 <a:latin typeface="Poppins"/>
-                <a:ea typeface="Poppins"/>
-                <a:cs typeface="Poppins"/>
               </a:rPr>
               <a:t>06</a:t>
             </a:r>
@@ -25261,8 +24469,6 @@
                   <a:srgbClr val="64707A"/>
                 </a:solidFill>
                 <a:latin typeface="League Spartan Medium"/>
-                <a:ea typeface="League Spartan Medium"/>
-                <a:cs typeface="League Spartan Medium"/>
               </a:rPr>
               <a:t>05</a:t>
             </a:r>
@@ -25298,8 +24504,6 @@
                   <a:srgbClr val="64707A"/>
                 </a:solidFill>
                 <a:latin typeface="League Spartan"/>
-                <a:ea typeface="League Spartan"/>
-                <a:cs typeface="League Spartan"/>
               </a:rPr>
               <a:t>ICON CARDS</a:t>
             </a:r>
@@ -25413,8 +24617,6 @@
                   <a:srgbClr val="FFFFFF"/>
                 </a:solidFill>
                 <a:latin typeface="League Spartan SemiBold"/>
-                <a:ea typeface="League Spartan SemiBold"/>
-                <a:cs typeface="League Spartan SemiBold"/>
               </a:rPr>
               <a:t>06</a:t>
             </a:r>
@@ -25450,8 +24652,6 @@
                   <a:srgbClr val="101A2B"/>
                 </a:solidFill>
                 <a:latin typeface="League Spartan SemiBold"/>
-                <a:ea typeface="League Spartan SemiBold"/>
-                <a:cs typeface="League Spartan SemiBold"/>
               </a:rPr>
               <a:t>SECTION NAME</a:t>
             </a:r>
@@ -25541,8 +24741,6 @@
                   <a:srgbClr val="64707A"/>
                 </a:solidFill>
                 <a:latin typeface="Poppins SemiBold"/>
-                <a:ea typeface="Poppins SemiBold"/>
-                <a:cs typeface="Poppins SemiBold"/>
               </a:rPr>
               <a:t>Page title</a:t>
             </a:r>
@@ -25578,8 +24776,6 @@
                   <a:srgbClr val="64707A"/>
                 </a:solidFill>
                 <a:latin typeface="Urbanist"/>
-                <a:ea typeface="Urbanist"/>
-                <a:cs typeface="Urbanist"/>
               </a:rPr>
               <a:t>One line under it saying what the page is for.</a:t>
             </a:r>
@@ -25645,8 +24841,6 @@
                   <a:srgbClr val="64707A"/>
                 </a:solidFill>
                 <a:latin typeface="League Spartan SemiBold"/>
-                <a:ea typeface="League Spartan SemiBold"/>
-                <a:cs typeface="League Spartan SemiBold"/>
               </a:rPr>
               <a:t>OPTION 01</a:t>
             </a:r>
@@ -25682,8 +24876,6 @@
                   <a:srgbClr val="64707A"/>
                 </a:solidFill>
                 <a:latin typeface="Poppins SemiBold"/>
-                <a:ea typeface="Poppins SemiBold"/>
-                <a:cs typeface="Poppins SemiBold"/>
               </a:rPr>
               <a:t>First option</a:t>
             </a:r>
@@ -25749,8 +24941,6 @@
                   <a:srgbClr val="64707A"/>
                 </a:solidFill>
                 <a:latin typeface="Urbanist"/>
-                <a:ea typeface="Urbanist"/>
-                <a:cs typeface="Urbanist"/>
               </a:rPr>
               <a:t>One sentence saying what it is.</a:t>
             </a:r>
@@ -25816,8 +25006,6 @@
                   <a:srgbClr val="64707A"/>
                 </a:solidFill>
                 <a:latin typeface="Urbanist"/>
-                <a:ea typeface="Urbanist"/>
-                <a:cs typeface="Urbanist"/>
               </a:rPr>
               <a:t>A point of difference</a:t>
             </a:r>
@@ -25883,8 +25071,6 @@
                   <a:srgbClr val="64707A"/>
                 </a:solidFill>
                 <a:latin typeface="Urbanist"/>
-                <a:ea typeface="Urbanist"/>
-                <a:cs typeface="Urbanist"/>
               </a:rPr>
               <a:t>A second point</a:t>
             </a:r>
@@ -25950,8 +25136,6 @@
                   <a:srgbClr val="64707A"/>
                 </a:solidFill>
                 <a:latin typeface="Urbanist"/>
-                <a:ea typeface="Urbanist"/>
-                <a:cs typeface="Urbanist"/>
               </a:rPr>
               <a:t>A third point</a:t>
             </a:r>
@@ -26017,8 +25201,6 @@
                   <a:srgbClr val="64707A"/>
                 </a:solidFill>
                 <a:latin typeface="Urbanist"/>
-                <a:ea typeface="Urbanist"/>
-                <a:cs typeface="Urbanist"/>
               </a:rPr>
               <a:t>When to choose it</a:t>
             </a:r>
@@ -26084,8 +25266,6 @@
                   <a:srgbClr val="64707A"/>
                 </a:solidFill>
                 <a:latin typeface="League Spartan SemiBold"/>
-                <a:ea typeface="League Spartan SemiBold"/>
-                <a:cs typeface="League Spartan SemiBold"/>
               </a:rPr>
               <a:t>OPTION 02</a:t>
             </a:r>
@@ -26121,8 +25301,6 @@
                   <a:srgbClr val="64707A"/>
                 </a:solidFill>
                 <a:latin typeface="Poppins SemiBold"/>
-                <a:ea typeface="Poppins SemiBold"/>
-                <a:cs typeface="Poppins SemiBold"/>
               </a:rPr>
               <a:t>Second option</a:t>
             </a:r>
@@ -26188,8 +25366,6 @@
                   <a:srgbClr val="64707A"/>
                 </a:solidFill>
                 <a:latin typeface="Urbanist"/>
-                <a:ea typeface="Urbanist"/>
-                <a:cs typeface="Urbanist"/>
               </a:rPr>
               <a:t>One sentence saying what it is.</a:t>
             </a:r>
@@ -26255,8 +25431,6 @@
                   <a:srgbClr val="E7EBF0"/>
                 </a:solidFill>
                 <a:latin typeface="Urbanist"/>
-                <a:ea typeface="Urbanist"/>
-                <a:cs typeface="Urbanist"/>
               </a:rPr>
               <a:t>A point of difference</a:t>
             </a:r>
@@ -26322,8 +25496,6 @@
                   <a:srgbClr val="E7EBF0"/>
                 </a:solidFill>
                 <a:latin typeface="Urbanist"/>
-                <a:ea typeface="Urbanist"/>
-                <a:cs typeface="Urbanist"/>
               </a:rPr>
               <a:t>A second point</a:t>
             </a:r>
@@ -26389,8 +25561,6 @@
                   <a:srgbClr val="E7EBF0"/>
                 </a:solidFill>
                 <a:latin typeface="Urbanist"/>
-                <a:ea typeface="Urbanist"/>
-                <a:cs typeface="Urbanist"/>
               </a:rPr>
               <a:t>A third point</a:t>
             </a:r>
@@ -26456,8 +25626,6 @@
                   <a:srgbClr val="E7EBF0"/>
                 </a:solidFill>
                 <a:latin typeface="Urbanist"/>
-                <a:ea typeface="Urbanist"/>
-                <a:cs typeface="Urbanist"/>
               </a:rPr>
               <a:t>When to choose it</a:t>
             </a:r>
@@ -26523,8 +25691,6 @@
                   <a:srgbClr val="64707A"/>
                 </a:solidFill>
                 <a:latin typeface="League Spartan SemiBold"/>
-                <a:ea typeface="League Spartan SemiBold"/>
-                <a:cs typeface="League Spartan SemiBold"/>
               </a:rPr>
               <a:t>OPTION 03</a:t>
             </a:r>
@@ -26560,8 +25726,6 @@
                   <a:srgbClr val="64707A"/>
                 </a:solidFill>
                 <a:latin typeface="Poppins SemiBold"/>
-                <a:ea typeface="Poppins SemiBold"/>
-                <a:cs typeface="Poppins SemiBold"/>
               </a:rPr>
               <a:t>Third option</a:t>
             </a:r>
@@ -26627,8 +25791,6 @@
                   <a:srgbClr val="64707A"/>
                 </a:solidFill>
                 <a:latin typeface="Urbanist"/>
-                <a:ea typeface="Urbanist"/>
-                <a:cs typeface="Urbanist"/>
               </a:rPr>
               <a:t>One sentence saying what it is.</a:t>
             </a:r>
@@ -26694,8 +25856,6 @@
                   <a:srgbClr val="64707A"/>
                 </a:solidFill>
                 <a:latin typeface="Urbanist"/>
-                <a:ea typeface="Urbanist"/>
-                <a:cs typeface="Urbanist"/>
               </a:rPr>
               <a:t>A point of difference</a:t>
             </a:r>
@@ -26761,8 +25921,6 @@
                   <a:srgbClr val="64707A"/>
                 </a:solidFill>
                 <a:latin typeface="Urbanist"/>
-                <a:ea typeface="Urbanist"/>
-                <a:cs typeface="Urbanist"/>
               </a:rPr>
               <a:t>A second point</a:t>
             </a:r>
@@ -26828,8 +25986,6 @@
                   <a:srgbClr val="64707A"/>
                 </a:solidFill>
                 <a:latin typeface="Urbanist"/>
-                <a:ea typeface="Urbanist"/>
-                <a:cs typeface="Urbanist"/>
               </a:rPr>
               <a:t>A third point</a:t>
             </a:r>
@@ -26895,8 +26051,6 @@
                   <a:srgbClr val="64707A"/>
                 </a:solidFill>
                 <a:latin typeface="Urbanist"/>
-                <a:ea typeface="Urbanist"/>
-                <a:cs typeface="Urbanist"/>
               </a:rPr>
               <a:t>When to choose it</a:t>
             </a:r>
@@ -26932,8 +26086,6 @@
                   <a:srgbClr val="64707A"/>
                 </a:solidFill>
                 <a:latin typeface="League Spartan Medium"/>
-                <a:ea typeface="League Spartan Medium"/>
-                <a:cs typeface="League Spartan Medium"/>
               </a:rPr>
               <a:t>06</a:t>
             </a:r>
@@ -26969,8 +26121,6 @@
                   <a:srgbClr val="64707A"/>
                 </a:solidFill>
                 <a:latin typeface="League Spartan"/>
-                <a:ea typeface="League Spartan"/>
-                <a:cs typeface="League Spartan"/>
               </a:rPr>
               <a:t>COMPARISON</a:t>
             </a:r>
@@ -27084,8 +26234,6 @@
                   <a:srgbClr val="FFFFFF"/>
                 </a:solidFill>
                 <a:latin typeface="League Spartan SemiBold"/>
-                <a:ea typeface="League Spartan SemiBold"/>
-                <a:cs typeface="League Spartan SemiBold"/>
               </a:rPr>
               <a:t>07</a:t>
             </a:r>
@@ -27121,8 +26269,6 @@
                   <a:srgbClr val="101A2B"/>
                 </a:solidFill>
                 <a:latin typeface="League Spartan SemiBold"/>
-                <a:ea typeface="League Spartan SemiBold"/>
-                <a:cs typeface="League Spartan SemiBold"/>
               </a:rPr>
               <a:t>SECTION NAME</a:t>
             </a:r>
@@ -27212,8 +26358,6 @@
                   <a:srgbClr val="64707A"/>
                 </a:solidFill>
                 <a:latin typeface="Poppins SemiBold"/>
-                <a:ea typeface="Poppins SemiBold"/>
-                <a:cs typeface="Poppins SemiBold"/>
               </a:rPr>
               <a:t>Page title</a:t>
             </a:r>
@@ -27249,8 +26393,6 @@
                   <a:srgbClr val="64707A"/>
                 </a:solidFill>
                 <a:latin typeface="Urbanist"/>
-                <a:ea typeface="Urbanist"/>
-                <a:cs typeface="Urbanist"/>
               </a:rPr>
               <a:t>One line under it saying what the page is for.</a:t>
             </a:r>
@@ -27316,8 +26458,6 @@
                   <a:srgbClr val="64707A"/>
                 </a:solidFill>
                 <a:latin typeface="League Spartan SemiBold"/>
-                <a:ea typeface="League Spartan SemiBold"/>
-                <a:cs typeface="League Spartan SemiBold"/>
               </a:rPr>
               <a:t>ROLE</a:t>
             </a:r>
@@ -27353,8 +26493,6 @@
                   <a:srgbClr val="64707A"/>
                 </a:solidFill>
                 <a:latin typeface="Poppins SemiBold"/>
-                <a:ea typeface="Poppins SemiBold"/>
-                <a:cs typeface="Poppins SemiBold"/>
               </a:rPr>
               <a:t>Name or function</a:t>
             </a:r>
@@ -27390,8 +26528,6 @@
                   <a:srgbClr val="64707A"/>
                 </a:solidFill>
                 <a:latin typeface="Urbanist"/>
-                <a:ea typeface="Urbanist"/>
-                <a:cs typeface="Urbanist"/>
               </a:rPr>
               <a:t>What they are accountable for</a:t>
             </a:r>
@@ -27637,8 +26773,6 @@
                   <a:srgbClr val="64707A"/>
                 </a:solidFill>
                 <a:latin typeface="League Spartan SemiBold"/>
-                <a:ea typeface="League Spartan SemiBold"/>
-                <a:cs typeface="League Spartan SemiBold"/>
               </a:rPr>
               <a:t>ROLE</a:t>
             </a:r>
@@ -27674,8 +26808,6 @@
                   <a:srgbClr val="64707A"/>
                 </a:solidFill>
                 <a:latin typeface="Poppins SemiBold"/>
-                <a:ea typeface="Poppins SemiBold"/>
-                <a:cs typeface="Poppins SemiBold"/>
               </a:rPr>
               <a:t>Name or function</a:t>
             </a:r>
@@ -27711,8 +26843,6 @@
                   <a:srgbClr val="64707A"/>
                 </a:solidFill>
                 <a:latin typeface="Urbanist"/>
-                <a:ea typeface="Urbanist"/>
-                <a:cs typeface="Urbanist"/>
               </a:rPr>
               <a:t>One line</a:t>
             </a:r>
@@ -27778,8 +26908,6 @@
                   <a:srgbClr val="64707A"/>
                 </a:solidFill>
                 <a:latin typeface="League Spartan SemiBold"/>
-                <a:ea typeface="League Spartan SemiBold"/>
-                <a:cs typeface="League Spartan SemiBold"/>
               </a:rPr>
               <a:t>ROLE</a:t>
             </a:r>
@@ -27815,8 +26943,6 @@
                   <a:srgbClr val="64707A"/>
                 </a:solidFill>
                 <a:latin typeface="Poppins SemiBold"/>
-                <a:ea typeface="Poppins SemiBold"/>
-                <a:cs typeface="Poppins SemiBold"/>
               </a:rPr>
               <a:t>Name or function</a:t>
             </a:r>
@@ -27852,8 +26978,6 @@
                   <a:srgbClr val="64707A"/>
                 </a:solidFill>
                 <a:latin typeface="Urbanist"/>
-                <a:ea typeface="Urbanist"/>
-                <a:cs typeface="Urbanist"/>
               </a:rPr>
               <a:t>One line</a:t>
             </a:r>
@@ -27919,8 +27043,6 @@
                   <a:srgbClr val="64707A"/>
                 </a:solidFill>
                 <a:latin typeface="League Spartan SemiBold"/>
-                <a:ea typeface="League Spartan SemiBold"/>
-                <a:cs typeface="League Spartan SemiBold"/>
               </a:rPr>
               <a:t>ROLE</a:t>
             </a:r>
@@ -27956,8 +27078,6 @@
                   <a:srgbClr val="64707A"/>
                 </a:solidFill>
                 <a:latin typeface="Poppins SemiBold"/>
-                <a:ea typeface="Poppins SemiBold"/>
-                <a:cs typeface="Poppins SemiBold"/>
               </a:rPr>
               <a:t>Name or function</a:t>
             </a:r>
@@ -27993,8 +27113,6 @@
                   <a:srgbClr val="64707A"/>
                 </a:solidFill>
                 <a:latin typeface="Urbanist"/>
-                <a:ea typeface="Urbanist"/>
-                <a:cs typeface="Urbanist"/>
               </a:rPr>
               <a:t>One line</a:t>
             </a:r>
@@ -28060,8 +27178,6 @@
                   <a:srgbClr val="64707A"/>
                 </a:solidFill>
                 <a:latin typeface="League Spartan SemiBold"/>
-                <a:ea typeface="League Spartan SemiBold"/>
-                <a:cs typeface="League Spartan SemiBold"/>
               </a:rPr>
               <a:t>ROLE</a:t>
             </a:r>
@@ -28097,8 +27213,6 @@
                   <a:srgbClr val="64707A"/>
                 </a:solidFill>
                 <a:latin typeface="Poppins SemiBold"/>
-                <a:ea typeface="Poppins SemiBold"/>
-                <a:cs typeface="Poppins SemiBold"/>
               </a:rPr>
               <a:t>Name or function</a:t>
             </a:r>
@@ -28134,8 +27248,6 @@
                   <a:srgbClr val="64707A"/>
                 </a:solidFill>
                 <a:latin typeface="Urbanist"/>
-                <a:ea typeface="Urbanist"/>
-                <a:cs typeface="Urbanist"/>
               </a:rPr>
               <a:t>One line</a:t>
             </a:r>
@@ -28171,8 +27283,6 @@
                   <a:srgbClr val="64707A"/>
                 </a:solidFill>
                 <a:latin typeface="League Spartan Medium"/>
-                <a:ea typeface="League Spartan Medium"/>
-                <a:cs typeface="League Spartan Medium"/>
               </a:rPr>
               <a:t>07</a:t>
             </a:r>
@@ -28208,8 +27318,6 @@
                   <a:srgbClr val="64707A"/>
                 </a:solidFill>
                 <a:latin typeface="League Spartan"/>
-                <a:ea typeface="League Spartan"/>
-                <a:cs typeface="League Spartan"/>
               </a:rPr>
               <a:t>ORG CHART · REPORTING TREE</a:t>
             </a:r>
@@ -28323,8 +27431,6 @@
                   <a:srgbClr val="FFFFFF"/>
                 </a:solidFill>
                 <a:latin typeface="League Spartan SemiBold"/>
-                <a:ea typeface="League Spartan SemiBold"/>
-                <a:cs typeface="League Spartan SemiBold"/>
               </a:rPr>
               <a:t>08</a:t>
             </a:r>
@@ -28360,8 +27466,6 @@
                   <a:srgbClr val="101A2B"/>
                 </a:solidFill>
                 <a:latin typeface="League Spartan SemiBold"/>
-                <a:ea typeface="League Spartan SemiBold"/>
-                <a:cs typeface="League Spartan SemiBold"/>
               </a:rPr>
               <a:t>SECTION NAME</a:t>
             </a:r>
@@ -28451,8 +27555,6 @@
                   <a:srgbClr val="64707A"/>
                 </a:solidFill>
                 <a:latin typeface="Poppins SemiBold"/>
-                <a:ea typeface="Poppins SemiBold"/>
-                <a:cs typeface="Poppins SemiBold"/>
               </a:rPr>
               <a:t>Page title</a:t>
             </a:r>
@@ -28488,8 +27590,6 @@
                   <a:srgbClr val="64707A"/>
                 </a:solidFill>
                 <a:latin typeface="Urbanist"/>
-                <a:ea typeface="Urbanist"/>
-                <a:cs typeface="Urbanist"/>
               </a:rPr>
               <a:t>One line under it saying what the page is for.</a:t>
             </a:r>
@@ -28611,8 +27711,6 @@
                   <a:srgbClr val="64707A"/>
                 </a:solidFill>
                 <a:latin typeface="League Spartan SemiBold"/>
-                <a:ea typeface="League Spartan SemiBold"/>
-                <a:cs typeface="League Spartan SemiBold"/>
               </a:rPr>
               <a:t>ROLE</a:t>
             </a:r>
@@ -28648,8 +27746,6 @@
                   <a:srgbClr val="64707A"/>
                 </a:solidFill>
                 <a:latin typeface="Poppins SemiBold"/>
-                <a:ea typeface="Poppins SemiBold"/>
-                <a:cs typeface="Poppins SemiBold"/>
               </a:rPr>
               <a:t>Name</a:t>
             </a:r>
@@ -28685,8 +27781,6 @@
                   <a:srgbClr val="64707A"/>
                 </a:solidFill>
                 <a:latin typeface="Urbanist"/>
-                <a:ea typeface="Urbanist"/>
-                <a:cs typeface="Urbanist"/>
               </a:rPr>
               <a:t>What they own</a:t>
             </a:r>
@@ -28808,8 +27902,6 @@
                   <a:srgbClr val="64707A"/>
                 </a:solidFill>
                 <a:latin typeface="League Spartan SemiBold"/>
-                <a:ea typeface="League Spartan SemiBold"/>
-                <a:cs typeface="League Spartan SemiBold"/>
               </a:rPr>
               <a:t>ROLE</a:t>
             </a:r>
@@ -28845,8 +27937,6 @@
                   <a:srgbClr val="64707A"/>
                 </a:solidFill>
                 <a:latin typeface="Poppins SemiBold"/>
-                <a:ea typeface="Poppins SemiBold"/>
-                <a:cs typeface="Poppins SemiBold"/>
               </a:rPr>
               <a:t>Name</a:t>
             </a:r>
@@ -28882,8 +27972,6 @@
                   <a:srgbClr val="64707A"/>
                 </a:solidFill>
                 <a:latin typeface="Urbanist"/>
-                <a:ea typeface="Urbanist"/>
-                <a:cs typeface="Urbanist"/>
               </a:rPr>
               <a:t>What they own</a:t>
             </a:r>
@@ -29005,8 +28093,6 @@
                   <a:srgbClr val="64707A"/>
                 </a:solidFill>
                 <a:latin typeface="League Spartan SemiBold"/>
-                <a:ea typeface="League Spartan SemiBold"/>
-                <a:cs typeface="League Spartan SemiBold"/>
               </a:rPr>
               <a:t>ROLE</a:t>
             </a:r>
@@ -29042,8 +28128,6 @@
                   <a:srgbClr val="64707A"/>
                 </a:solidFill>
                 <a:latin typeface="Poppins SemiBold"/>
-                <a:ea typeface="Poppins SemiBold"/>
-                <a:cs typeface="Poppins SemiBold"/>
               </a:rPr>
               <a:t>Name</a:t>
             </a:r>
@@ -29079,8 +28163,6 @@
                   <a:srgbClr val="64707A"/>
                 </a:solidFill>
                 <a:latin typeface="Urbanist"/>
-                <a:ea typeface="Urbanist"/>
-                <a:cs typeface="Urbanist"/>
               </a:rPr>
               <a:t>What they own</a:t>
             </a:r>
@@ -29202,8 +28284,6 @@
                   <a:srgbClr val="64707A"/>
                 </a:solidFill>
                 <a:latin typeface="League Spartan SemiBold"/>
-                <a:ea typeface="League Spartan SemiBold"/>
-                <a:cs typeface="League Spartan SemiBold"/>
               </a:rPr>
               <a:t>ROLE</a:t>
             </a:r>
@@ -29239,8 +28319,6 @@
                   <a:srgbClr val="64707A"/>
                 </a:solidFill>
                 <a:latin typeface="Poppins SemiBold"/>
-                <a:ea typeface="Poppins SemiBold"/>
-                <a:cs typeface="Poppins SemiBold"/>
               </a:rPr>
               <a:t>Name</a:t>
             </a:r>
@@ -29276,8 +28354,6 @@
                   <a:srgbClr val="64707A"/>
                 </a:solidFill>
                 <a:latin typeface="Urbanist"/>
-                <a:ea typeface="Urbanist"/>
-                <a:cs typeface="Urbanist"/>
               </a:rPr>
               <a:t>What they own</a:t>
             </a:r>
@@ -29399,8 +28475,6 @@
                   <a:srgbClr val="64707A"/>
                 </a:solidFill>
                 <a:latin typeface="League Spartan SemiBold"/>
-                <a:ea typeface="League Spartan SemiBold"/>
-                <a:cs typeface="League Spartan SemiBold"/>
               </a:rPr>
               <a:t>ROLE</a:t>
             </a:r>
@@ -29436,8 +28510,6 @@
                   <a:srgbClr val="64707A"/>
                 </a:solidFill>
                 <a:latin typeface="Poppins SemiBold"/>
-                <a:ea typeface="Poppins SemiBold"/>
-                <a:cs typeface="Poppins SemiBold"/>
               </a:rPr>
               <a:t>Name</a:t>
             </a:r>
@@ -29473,8 +28545,6 @@
                   <a:srgbClr val="64707A"/>
                 </a:solidFill>
                 <a:latin typeface="Urbanist"/>
-                <a:ea typeface="Urbanist"/>
-                <a:cs typeface="Urbanist"/>
               </a:rPr>
               <a:t>What they own</a:t>
             </a:r>
@@ -29510,8 +28580,6 @@
                   <a:srgbClr val="64707A"/>
                 </a:solidFill>
                 <a:latin typeface="League Spartan Medium"/>
-                <a:ea typeface="League Spartan Medium"/>
-                <a:cs typeface="League Spartan Medium"/>
               </a:rPr>
               <a:t>08</a:t>
             </a:r>
@@ -29547,8 +28615,6 @@
                   <a:srgbClr val="64707A"/>
                 </a:solidFill>
                 <a:latin typeface="League Spartan"/>
-                <a:ea typeface="League Spartan"/>
-                <a:cs typeface="League Spartan"/>
               </a:rPr>
               <a:t>ORG CHART · FLAT TEAM BAND</a:t>
             </a:r>
